--- a/docs/vogiatzis_findings_2026-08.pptx
+++ b/docs/vogiatzis_findings_2026-08.pptx
@@ -16,6 +16,12 @@
     <p:sldId id="264" r:id="rId15"/>
     <p:sldId id="265" r:id="rId16"/>
     <p:sldId id="266" r:id="rId17"/>
+    <p:sldId id="267" r:id="rId18"/>
+    <p:sldId id="268" r:id="rId19"/>
+    <p:sldId id="269" r:id="rId20"/>
+    <p:sldId id="270" r:id="rId21"/>
+    <p:sldId id="271" r:id="rId22"/>
+    <p:sldId id="272" r:id="rId23"/>
   </p:sldIdLst>
   <p:sldSz cx="12191695" cy="6858000" type="screen4x3"/>
   <p:notesSz cx="6858000" cy="9144000"/>
@@ -3106,8 +3112,8 @@
         </p:nvSpPr>
         <p:spPr>
           <a:xfrm>
-            <a:off x="731520" y="2011680"/>
-            <a:ext cx="10698480" cy="2377440"/>
+            <a:off x="731520" y="1920240"/>
+            <a:ext cx="10698480" cy="2743200"/>
           </a:xfrm>
           <a:prstGeom prst="rect">
             <a:avLst/>
@@ -3121,39 +3127,47 @@
           <a:lstStyle/>
           <a:p>
             <a:pPr>
-              <a:defRPr sz="4000" b="1">
+              <a:defRPr sz="3800" b="1">
                 <a:solidFill>
                   <a:srgbClr val="1A2E4A"/>
                 </a:solidFill>
               </a:defRPr>
             </a:pPr>
             <a:r>
-              <a:t>3D Structure and Adjacent-Lanthanide Selectivity</a:t>
+              <a:t>Predicting Adjacent-Lanthanide Selectivity from 3D Structure</a:t>
             </a:r>
           </a:p>
           <a:p>
             <a:pPr>
-              <a:defRPr sz="2000">
+              <a:defRPr sz="1900" b="0">
                 <a:solidFill>
                   <a:srgbClr val="555A60"/>
                 </a:solidFill>
               </a:defRPr>
             </a:pPr>
             <a:r>
-              <a:t>Complete findings: where the Vietoris–Rips encoder helps, where it cannot, and why</a:t>
-            </a:r>
-          </a:p>
-          <a:p>
-            <a:br/>
+              <a:t>Dataset, models, and complete findings — including where 3D helps and where it provably cannot</a:t>
+            </a:r>
+          </a:p>
+          <a:p>
             <a:pPr>
-              <a:defRPr sz="1600">
+              <a:defRPr sz="1200" b="0">
                 <a:solidFill>
                   <a:srgbClr val="555A60"/>
                 </a:solidFill>
               </a:defRPr>
             </a:pPr>
-            <a:r>
-              <a:t>Bogdan Mironov — prepared for discussion with Prof. K. Vogiatzis, August 2026</a:t>
+          </a:p>
+          <a:p>
+            <a:pPr>
+              <a:defRPr sz="1500" b="0">
+                <a:solidFill>
+                  <a:srgbClr val="555A60"/>
+                </a:solidFill>
+              </a:defRPr>
+            </a:pPr>
+            <a:r>
+              <a:t>Bogdan Mironov · prepared for discussion with Prof. K. Vogiatzis · August 2026</a:t>
             </a:r>
           </a:p>
         </p:txBody>
@@ -3184,8 +3198,8 @@
         </p:nvSpPr>
         <p:spPr>
           <a:xfrm>
-            <a:off x="502920" y="320040"/>
-            <a:ext cx="11155680" cy="822960"/>
+            <a:off x="502920" y="274320"/>
+            <a:ext cx="11247120" cy="868680"/>
           </a:xfrm>
           <a:prstGeom prst="rect">
             <a:avLst/>
@@ -3199,40 +3213,349 @@
           <a:lstStyle/>
           <a:p>
             <a:pPr>
-              <a:defRPr sz="3000" b="1">
+              <a:defRPr sz="2800" b="1">
                 <a:solidFill>
                   <a:srgbClr val="1A2E4A"/>
                 </a:solidFill>
               </a:defRPr>
             </a:pPr>
             <a:r>
-              <a:t>Methodological findings (the transferable part)</a:t>
-            </a:r>
-          </a:p>
-          <a:p>
-            <a:pPr>
-              <a:defRPr sz="1500">
-                <a:solidFill>
-                  <a:srgbClr val="555A60"/>
-                </a:solidFill>
-              </a:defRPr>
-            </a:pPr>
-            <a:r>
-              <a:t>Three false positives were caught and killed in one week — each by a specific check</a:t>
-            </a:r>
-          </a:p>
-        </p:txBody>
-      </p:sp>
-      <p:sp>
-        <p:nvSpPr>
-          <p:cNvPr id="3" name="TextBox 2"/>
+              <a:t>The current best result, and its honest boundary</a:t>
+            </a:r>
+          </a:p>
+        </p:txBody>
+      </p:sp>
+      <p:graphicFrame>
+        <p:nvGraphicFramePr>
+          <p:cNvPr id="3" name="Table 2"/>
+          <p:cNvGraphicFramePr>
+            <a:graphicFrameLocks noGrp="1"/>
+          </p:cNvGraphicFramePr>
+          <p:nvPr/>
+        </p:nvGraphicFramePr>
+        <p:xfrm>
+          <a:off x="640080" y="1463040"/>
+          <a:ext cx="10881360" cy="2066544"/>
+        </p:xfrm>
+        <a:graphic>
+          <a:graphicData uri="http://schemas.openxmlformats.org/drawingml/2006/table">
+            <a:tbl>
+              <a:tblPr firstRow="1" bandRow="1">
+                <a:tableStyleId>{5C22544A-7EE6-4342-B048-85BDC9FD1C3A}</a:tableStyleId>
+              </a:tblPr>
+              <a:tblGrid>
+                <a:gridCol w="5852160"/>
+                <a:gridCol w="2743200"/>
+                <a:gridCol w="2286000"/>
+              </a:tblGrid>
+              <a:tr h="344424">
+                <a:tc>
+                  <a:txBody>
+                    <a:bodyPr/>
+                    <a:lstStyle/>
+                    <a:p>
+                      <a:pPr>
+                        <a:defRPr sz="1400" b="1">
+                          <a:solidFill>
+                            <a:srgbClr val="FFFFFF"/>
+                          </a:solidFill>
+                        </a:defRPr>
+                      </a:pPr>
+                      <a:r>
+                        <a:t>configuration</a:t>
+                      </a:r>
+                    </a:p>
+                  </a:txBody>
+                  <a:tcPr/>
+                </a:tc>
+                <a:tc>
+                  <a:txBody>
+                    <a:bodyPr/>
+                    <a:lstStyle/>
+                    <a:p>
+                      <a:pPr>
+                        <a:defRPr sz="1400" b="1">
+                          <a:solidFill>
+                            <a:srgbClr val="FFFFFF"/>
+                          </a:solidFill>
+                        </a:defRPr>
+                      </a:pPr>
+                      <a:r>
+                        <a:t>adjacent-pair R²</a:t>
+                      </a:r>
+                    </a:p>
+                  </a:txBody>
+                  <a:tcPr/>
+                </a:tc>
+                <a:tc>
+                  <a:txBody>
+                    <a:bodyPr/>
+                    <a:lstStyle/>
+                    <a:p>
+                      <a:pPr>
+                        <a:defRPr sz="1400" b="1">
+                          <a:solidFill>
+                            <a:srgbClr val="FFFFFF"/>
+                          </a:solidFill>
+                        </a:defRPr>
+                      </a:pPr>
+                      <a:r>
+                        <a:t>3D marginal</a:t>
+                      </a:r>
+                    </a:p>
+                  </a:txBody>
+                  <a:tcPr/>
+                </a:tc>
+              </a:tr>
+              <a:tr h="344424">
+                <a:tc>
+                  <a:txBody>
+                    <a:bodyPr/>
+                    <a:lstStyle/>
+                    <a:p>
+                      <a:pPr>
+                        <a:defRPr sz="1400"/>
+                      </a:pPr>
+                      <a:r>
+                        <a:t>best 2D single model (tuned boosting)</a:t>
+                      </a:r>
+                    </a:p>
+                  </a:txBody>
+                  <a:tcPr/>
+                </a:tc>
+                <a:tc>
+                  <a:txBody>
+                    <a:bodyPr/>
+                    <a:lstStyle/>
+                    <a:p>
+                      <a:pPr>
+                        <a:defRPr sz="1400"/>
+                      </a:pPr>
+                      <a:r>
+                        <a:t>+0.278</a:t>
+                      </a:r>
+                    </a:p>
+                  </a:txBody>
+                  <a:tcPr/>
+                </a:tc>
+                <a:tc>
+                  <a:txBody>
+                    <a:bodyPr/>
+                    <a:lstStyle/>
+                    <a:p>
+                      <a:pPr>
+                        <a:defRPr sz="1400"/>
+                      </a:pPr>
+                      <a:r>
+                        <a:t>—</a:t>
+                      </a:r>
+                    </a:p>
+                  </a:txBody>
+                  <a:tcPr/>
+                </a:tc>
+              </a:tr>
+              <a:tr h="344424">
+                <a:tc>
+                  <a:txBody>
+                    <a:bodyPr/>
+                    <a:lstStyle/>
+                    <a:p>
+                      <a:pPr>
+                        <a:defRPr sz="1400"/>
+                      </a:pPr>
+                      <a:r>
+                        <a:t>2D stack (boosting + fingerprint net)</a:t>
+                      </a:r>
+                    </a:p>
+                  </a:txBody>
+                  <a:tcPr/>
+                </a:tc>
+                <a:tc>
+                  <a:txBody>
+                    <a:bodyPr/>
+                    <a:lstStyle/>
+                    <a:p>
+                      <a:pPr>
+                        <a:defRPr sz="1400"/>
+                      </a:pPr>
+                      <a:r>
+                        <a:t>+0.291</a:t>
+                      </a:r>
+                    </a:p>
+                  </a:txBody>
+                  <a:tcPr/>
+                </a:tc>
+                <a:tc>
+                  <a:txBody>
+                    <a:bodyPr/>
+                    <a:lstStyle/>
+                    <a:p>
+                      <a:pPr>
+                        <a:defRPr sz="1400"/>
+                      </a:pPr>
+                      <a:r>
+                        <a:t>—</a:t>
+                      </a:r>
+                    </a:p>
+                  </a:txBody>
+                  <a:tcPr/>
+                </a:tc>
+              </a:tr>
+              <a:tr h="344424">
+                <a:tc>
+                  <a:txBody>
+                    <a:bodyPr/>
+                    <a:lstStyle/>
+                    <a:p>
+                      <a:pPr>
+                        <a:defRPr sz="1400"/>
+                      </a:pPr>
+                      <a:r>
+                        <a:t>2D stack + 3D encoder</a:t>
+                      </a:r>
+                    </a:p>
+                  </a:txBody>
+                  <a:tcPr/>
+                </a:tc>
+                <a:tc>
+                  <a:txBody>
+                    <a:bodyPr/>
+                    <a:lstStyle/>
+                    <a:p>
+                      <a:pPr>
+                        <a:defRPr sz="1400"/>
+                      </a:pPr>
+                      <a:r>
+                        <a:t>+0.313</a:t>
+                      </a:r>
+                    </a:p>
+                  </a:txBody>
+                  <a:tcPr/>
+                </a:tc>
+                <a:tc>
+                  <a:txBody>
+                    <a:bodyPr/>
+                    <a:lstStyle/>
+                    <a:p>
+                      <a:pPr>
+                        <a:defRPr sz="1400"/>
+                      </a:pPr>
+                      <a:r>
+                        <a:t>+0.023</a:t>
+                      </a:r>
+                    </a:p>
+                  </a:txBody>
+                  <a:tcPr/>
+                </a:tc>
+              </a:tr>
+              <a:tr h="344424">
+                <a:tc>
+                  <a:txBody>
+                    <a:bodyPr/>
+                    <a:lstStyle/>
+                    <a:p>
+                      <a:pPr>
+                        <a:defRPr sz="1400"/>
+                      </a:pPr>
+                      <a:r>
+                        <a:t>same, strict condition key (1,417 pairs)</a:t>
+                      </a:r>
+                    </a:p>
+                  </a:txBody>
+                  <a:tcPr/>
+                </a:tc>
+                <a:tc>
+                  <a:txBody>
+                    <a:bodyPr/>
+                    <a:lstStyle/>
+                    <a:p>
+                      <a:pPr>
+                        <a:defRPr sz="1400"/>
+                      </a:pPr>
+                      <a:r>
+                        <a:t>+0.210 vs +0.200</a:t>
+                      </a:r>
+                    </a:p>
+                  </a:txBody>
+                  <a:tcPr/>
+                </a:tc>
+                <a:tc>
+                  <a:txBody>
+                    <a:bodyPr/>
+                    <a:lstStyle/>
+                    <a:p>
+                      <a:pPr>
+                        <a:defRPr sz="1400"/>
+                      </a:pPr>
+                      <a:r>
+                        <a:t>+0.010</a:t>
+                      </a:r>
+                    </a:p>
+                  </a:txBody>
+                  <a:tcPr/>
+                </a:tc>
+              </a:tr>
+              <a:tr h="344424">
+                <a:tc>
+                  <a:txBody>
+                    <a:bodyPr/>
+                    <a:lstStyle/>
+                    <a:p>
+                      <a:pPr>
+                        <a:defRPr sz="1400"/>
+                      </a:pPr>
+                      <a:r>
+                        <a:t>published July stack (for reference)</a:t>
+                      </a:r>
+                    </a:p>
+                  </a:txBody>
+                  <a:tcPr/>
+                </a:tc>
+                <a:tc>
+                  <a:txBody>
+                    <a:bodyPr/>
+                    <a:lstStyle/>
+                    <a:p>
+                      <a:pPr>
+                        <a:defRPr sz="1400"/>
+                      </a:pPr>
+                      <a:r>
+                        <a:t>+0.267</a:t>
+                      </a:r>
+                    </a:p>
+                  </a:txBody>
+                  <a:tcPr/>
+                </a:tc>
+                <a:tc>
+                  <a:txBody>
+                    <a:bodyPr/>
+                    <a:lstStyle/>
+                    <a:p>
+                      <a:pPr>
+                        <a:defRPr sz="1400"/>
+                      </a:pPr>
+                      <a:r>
+                        <a:t>+0.038</a:t>
+                      </a:r>
+                    </a:p>
+                  </a:txBody>
+                  <a:tcPr/>
+                </a:tc>
+              </a:tr>
+            </a:tbl>
+          </a:graphicData>
+        </a:graphic>
+      </p:graphicFrame>
+      <p:sp>
+        <p:nvSpPr>
+          <p:cNvPr id="4" name="TextBox 3"/>
           <p:cNvSpPr txBox="1"/>
           <p:nvPr/>
         </p:nvSpPr>
         <p:spPr>
           <a:xfrm>
-            <a:off x="548640" y="1371600"/>
-            <a:ext cx="11064240" cy="5212080"/>
+            <a:off x="548640" y="3794760"/>
+            <a:ext cx="11064240" cy="2834639"/>
           </a:xfrm>
           <a:prstGeom prst="rect">
             <a:avLst/>
@@ -3247,76 +3570,46 @@
           <a:p>
             <a:pPr>
               <a:spcAft>
-                <a:spcPts val="700"/>
+                <a:spcPts val="600"/>
               </a:spcAft>
-              <a:defRPr sz="1700" b="0">
+              <a:defRPr sz="1600" b="0">
                 <a:solidFill>
                   <a:srgbClr val="22262A"/>
                 </a:solidFill>
               </a:defRPr>
             </a:pPr>
             <a:r>
-              <a:t>Power: the per-seed sd of a paired Δ is 0.0285, so 8-seed comparisons resolve only ~0.028. Three 'significant' gains at n = 4–8 dissolved on independent seeds. All confirmatory runs now use 24–32 seeds.</a:t>
+              <a:t>The 3D contribution SHRANK as partners improved (+0.038 → +0.023): complementarity means a stronger partner leaves less to correct. This was predicted by the error-correlation mechanism before it was observed.</a:t>
             </a:r>
           </a:p>
           <a:p>
             <a:pPr>
               <a:spcAft>
-                <a:spcPts val="700"/>
+                <a:spcPts val="600"/>
               </a:spcAft>
-              <a:defRPr sz="1700" b="0">
+              <a:defRPr sz="1600" b="0">
                 <a:solidFill>
                   <a:srgbClr val="22262A"/>
                 </a:solidFill>
               </a:defRPr>
             </a:pPr>
             <a:r>
-              <a:t>Scale-free check: on a negative-R² baseline, R² rises when predictions shrink toward the mean. Requiring Pearson² to agree in sign exposed a p = 0.02, 7/8-seed artefact.</a:t>
+              <a:t>Strict key = only the lanthanide varies within a block. The published +0.038 was already indistinguishable there; the honest statement is that the 3D gain lives partly in condition-binning.</a:t>
             </a:r>
           </a:p>
           <a:p>
             <a:pPr>
               <a:spcAft>
-                <a:spcPts val="700"/>
+                <a:spcPts val="600"/>
               </a:spcAft>
-              <a:defRPr sz="1700" b="0">
-                <a:solidFill>
-                  <a:srgbClr val="22262A"/>
-                </a:solidFill>
-              </a:defRPr>
-            </a:pPr>
-            <a:r>
-              <a:t>Silent no-ops: five CLI flags were accepted, recorded as enabled, and ignored by the architecture that lacked them (--pair-head among them — never actually tested in the whole study until now). A capability gate now raises instead.</a:t>
-            </a:r>
-          </a:p>
-          <a:p>
-            <a:pPr>
-              <a:spcAft>
-                <a:spcPts val="700"/>
-              </a:spcAft>
-              <a:defRPr sz="1700" b="0">
-                <a:solidFill>
-                  <a:srgbClr val="22262A"/>
-                </a:solidFill>
-              </a:defRPr>
-            </a:pPr>
-            <a:r>
-              <a:t>Selection hygiene: axes that cleared +0.02 on screening data four times over all failed held-out. A config-histogram zero is not evidence a question is open — two of tonight's arms turned out to be axes already falsified.</a:t>
-            </a:r>
-          </a:p>
-          <a:p>
-            <a:pPr>
-              <a:spcAft>
-                <a:spcPts val="700"/>
-              </a:spcAft>
-              <a:defRPr sz="1700" b="1">
-                <a:solidFill>
-                  <a:srgbClr val="1A2E4A"/>
-                </a:solidFill>
-              </a:defRPr>
-            </a:pPr>
-            <a:r>
-              <a:t>Every confirmatory claim is pre-registered with its bar and the consequence of a null, committed before the data exists.</a:t>
+              <a:defRPr sz="1600" b="1">
+                <a:solidFill>
+                  <a:srgbClr val="A8322D"/>
+                </a:solidFill>
+              </a:defRPr>
+            </a:pPr>
+            <a:r>
+              <a:t>Status: exploratory — both improved components were tuned on data inside this population, and every clean held-out partition is now spent. A fresh split is the next confirmatory step.</a:t>
             </a:r>
           </a:p>
         </p:txBody>
@@ -3347,8 +3640,8 @@
         </p:nvSpPr>
         <p:spPr>
           <a:xfrm>
-            <a:off x="502920" y="320040"/>
-            <a:ext cx="11155680" cy="822960"/>
+            <a:off x="502920" y="274320"/>
+            <a:ext cx="11247120" cy="868680"/>
           </a:xfrm>
           <a:prstGeom prst="rect">
             <a:avLst/>
@@ -3362,14 +3655,26 @@
           <a:lstStyle/>
           <a:p>
             <a:pPr>
-              <a:defRPr sz="3000" b="1">
+              <a:defRPr sz="2800" b="1">
                 <a:solidFill>
                   <a:srgbClr val="1A2E4A"/>
                 </a:solidFill>
               </a:defRPr>
             </a:pPr>
             <a:r>
-              <a:t>Summary — the three claims I will defend on the call</a:t>
+              <a:t>Why 3D contributes so little: the Hamiltonian, not the encoders</a:t>
+            </a:r>
+          </a:p>
+          <a:p>
+            <a:pPr>
+              <a:defRPr sz="1400">
+                <a:solidFill>
+                  <a:srgbClr val="555A60"/>
+                </a:solidFill>
+              </a:defRPr>
+            </a:pPr>
+            <a:r>
+              <a:t>A property of GFN2-xTB's parameterisation</a:t>
             </a:r>
           </a:p>
         </p:txBody>
@@ -3382,8 +3687,8 @@
         </p:nvSpPr>
         <p:spPr>
           <a:xfrm>
-            <a:off x="548640" y="1371600"/>
-            <a:ext cx="11064240" cy="5212080"/>
+            <a:off x="548640" y="1325880"/>
+            <a:ext cx="11064240" cy="5303520"/>
           </a:xfrm>
           <a:prstGeom prst="rect">
             <a:avLst/>
@@ -3398,73 +3703,1175 @@
           <a:p>
             <a:pPr>
               <a:spcAft>
-                <a:spcPts val="700"/>
+                <a:spcPts val="600"/>
               </a:spcAft>
-              <a:defRPr sz="1700" b="1">
+              <a:defRPr sz="1600" b="1">
                 <a:solidFill>
                   <a:srgbClr val="1A2E4A"/>
                 </a:solidFill>
               </a:defRPr>
             </a:pPr>
             <a:r>
-              <a:t>1.  The 3D encoder is necessary for the best result, via complementarity: +0.313 with it, +0.291 without, largest stack weight — but it is no longer the strongest single model, and its marginal value shrinks as 2D partners improve.</a:t>
+              <a:t>Every GFN2-xTB lanthanide parameter from Ce(58) to Lu(71) is linear interpolation between two fitted anchors (max residual 5×10⁻⁷ — the file's printed precision; documented by the method's authors).</a:t>
             </a:r>
           </a:p>
           <a:p>
             <a:pPr>
               <a:spcAft>
-                <a:spcPts val="700"/>
+                <a:spcPts val="600"/>
               </a:spcAft>
-              <a:defRPr sz="1700" b="1">
-                <a:solidFill>
-                  <a:srgbClr val="1A2E4A"/>
-                </a:solidFill>
-              </a:defRPr>
-            </a:pPr>
-            <a:r>
-              <a:t>2.  The 3D ceiling is a property of GFN2-xTB, not of the encoders: lanthanide parameters are linear in Z, the contraction is under-predicted 2.47×, and fixing the chemistry (g-xTB, within 8% of experiment) does NOT move the score. The chemistry result stands on its own.</a:t>
+              <a:defRPr sz="1600" b="0">
+                <a:solidFill>
+                  <a:srgbClr val="22262A"/>
+                </a:solidFill>
+              </a:defRPr>
+            </a:pPr>
+            <a:r>
+              <a:t>Metal identity therefore enters every geometry as ONE scalar, linear in Z: no f-shell, no crystal field, no gadolinium break, no tetrad effect — by construction.</a:t>
             </a:r>
           </a:p>
           <a:p>
             <a:pPr>
               <a:spcAft>
-                <a:spcPts val="700"/>
+                <a:spcPts val="600"/>
               </a:spcAft>
-              <a:defRPr sz="1700" b="1">
-                <a:solidFill>
-                  <a:srgbClr val="1A2E4A"/>
-                </a:solidFill>
-              </a:defRPr>
-            </a:pPr>
-            <a:r>
-              <a:t>3.  The lever for this property is the objective, not the representation: every surviving gain came from aligning the loss with the scored contrast, and the effect transfers across architectures.</a:t>
+              <a:defRPr sz="1600" b="0">
+                <a:solidFill>
+                  <a:srgbClr val="22262A"/>
+                </a:solidFill>
+              </a:defRPr>
+            </a:pPr>
+            <a:r>
+              <a:t>This retrodicts our strangest observation: eight different 3D encoders are mutually interchangeable — two architectures correlate at 0.986, the same as two seed-ensembles of one architecture (effective rank 1.05 of 8).</a:t>
             </a:r>
           </a:p>
           <a:p>
             <a:pPr>
               <a:spcAft>
-                <a:spcPts val="700"/>
+                <a:spcPts val="600"/>
               </a:spcAft>
-              <a:defRPr sz="1700" b="0">
-                <a:solidFill>
-                  <a:srgbClr val="22262A"/>
-                </a:solidFill>
-              </a:defRPr>
-            </a:pPr>
-          </a:p>
+              <a:defRPr sz="1600" b="1">
+                <a:solidFill>
+                  <a:srgbClr val="0E7A5F"/>
+                </a:solidFill>
+              </a:defRPr>
+            </a:pPr>
+            <a:r>
+              <a:t>And that one scalar is already in the tabular block as the Shannon ionic radius — so any encoder reading these geometries is re-deriving a feature the models already have.</a:t>
+            </a:r>
+          </a:p>
+        </p:txBody>
+      </p:sp>
+    </p:spTree>
+  </p:cSld>
+  <p:clrMapOvr>
+    <a:masterClrMapping/>
+  </p:clrMapOvr>
+</p:sld>
+</file>
+
+<file path=ppt/slides/slide12.xml><?xml version="1.0" encoding="utf-8"?>
+<p:sld xmlns:a="http://schemas.openxmlformats.org/drawingml/2006/main" xmlns:p="http://schemas.openxmlformats.org/presentationml/2006/main" xmlns:r="http://schemas.openxmlformats.org/officeDocument/2006/relationships">
+  <p:cSld>
+    <p:spTree>
+      <p:nvGrpSpPr>
+        <p:cNvPr id="1" name=""/>
+        <p:cNvGrpSpPr/>
+        <p:nvPr/>
+      </p:nvGrpSpPr>
+      <p:grpSpPr/>
+      <p:sp>
+        <p:nvSpPr>
+          <p:cNvPr id="2" name="TextBox 1"/>
+          <p:cNvSpPr txBox="1"/>
+          <p:nvPr/>
+        </p:nvSpPr>
+        <p:spPr>
+          <a:xfrm>
+            <a:off x="502920" y="274320"/>
+            <a:ext cx="11247120" cy="868680"/>
+          </a:xfrm>
+          <a:prstGeom prst="rect">
+            <a:avLst/>
+          </a:prstGeom>
+          <a:noFill/>
+        </p:spPr>
+        <p:txBody>
+          <a:bodyPr wrap="none">
+            <a:spAutoFit/>
+          </a:bodyPr>
+          <a:lstStyle/>
+          <a:p>
+            <a:pPr>
+              <a:defRPr sz="2800" b="1">
+                <a:solidFill>
+                  <a:srgbClr val="1A2E4A"/>
+                </a:solidFill>
+              </a:defRPr>
+            </a:pPr>
+            <a:r>
+              <a:t>Quantified against experiment: GFN2 under-predicts the contraction 2.5×</a:t>
+            </a:r>
+          </a:p>
+          <a:p>
+            <a:pPr>
+              <a:defRPr sz="1400">
+                <a:solidFill>
+                  <a:srgbClr val="555A60"/>
+                </a:solidFill>
+              </a:defRPr>
+            </a:pPr>
+            <a:r>
+              <a:t>g-xTB (Grimme 2025, f-electrons in valence) reproduces it — 71/71 ligands, p = 5×10⁻⁵²</a:t>
+            </a:r>
+          </a:p>
+        </p:txBody>
+      </p:sp>
+      <p:pic>
+        <p:nvPicPr>
+          <p:cNvPr id="3" name="Picture 2" descr="f5_contraction.png"/>
+          <p:cNvPicPr>
+            <a:picLocks noChangeAspect="1"/>
+          </p:cNvPicPr>
+          <p:nvPr/>
+        </p:nvPicPr>
+        <p:blipFill>
+          <a:blip r:embed="rId2"/>
+          <a:stretch>
+            <a:fillRect/>
+          </a:stretch>
+        </p:blipFill>
+        <p:spPr>
+          <a:xfrm>
+            <a:off x="1889607" y="1325880"/>
+            <a:ext cx="8412480" cy="3900844"/>
+          </a:xfrm>
+          <a:prstGeom prst="rect">
+            <a:avLst/>
+          </a:prstGeom>
+        </p:spPr>
+      </p:pic>
+      <p:sp>
+        <p:nvSpPr>
+          <p:cNvPr id="4" name="TextBox 3"/>
+          <p:cNvSpPr txBox="1"/>
+          <p:nvPr/>
+        </p:nvSpPr>
+        <p:spPr>
+          <a:xfrm>
+            <a:off x="548640" y="5074920"/>
+            <a:ext cx="11064240" cy="1554480"/>
+          </a:xfrm>
+          <a:prstGeom prst="rect">
+            <a:avLst/>
+          </a:prstGeom>
+          <a:noFill/>
+        </p:spPr>
+        <p:txBody>
+          <a:bodyPr wrap="square">
+            <a:spAutoFit/>
+          </a:bodyPr>
+          <a:lstStyle/>
           <a:p>
             <a:pPr>
               <a:spcAft>
-                <a:spcPts val="700"/>
+                <a:spcPts val="600"/>
               </a:spcAft>
-              <a:defRPr sz="1700" b="0">
+              <a:defRPr sz="1600" b="0">
+                <a:solidFill>
+                  <a:srgbClr val="22262A"/>
+                </a:solidFill>
+              </a:defRPr>
+            </a:pPr>
+            <a:r>
+              <a:t>GFN2's per-ligand slope is also mostly noise: only 23% of its non-linear response is shared across ligands, vs 96% for g-xTB. Reproduced in implicit solvent and on an independent pilot.</a:t>
+            </a:r>
+          </a:p>
+          <a:p>
+            <a:pPr>
+              <a:spcAft>
+                <a:spcPts val="600"/>
+              </a:spcAft>
+              <a:defRPr sz="1600" b="1">
+                <a:solidFill>
+                  <a:srgbClr val="0E7A5F"/>
+                </a:solidFill>
+              </a:defRPr>
+            </a:pPr>
+            <a:r>
+              <a:t>To our knowledge a new benchmark result, publishable independently of any ML outcome.</a:t>
+            </a:r>
+          </a:p>
+        </p:txBody>
+      </p:sp>
+    </p:spTree>
+  </p:cSld>
+  <p:clrMapOvr>
+    <a:masterClrMapping/>
+  </p:clrMapOvr>
+</p:sld>
+</file>
+
+<file path=ppt/slides/slide13.xml><?xml version="1.0" encoding="utf-8"?>
+<p:sld xmlns:a="http://schemas.openxmlformats.org/drawingml/2006/main" xmlns:p="http://schemas.openxmlformats.org/presentationml/2006/main" xmlns:r="http://schemas.openxmlformats.org/officeDocument/2006/relationships">
+  <p:cSld>
+    <p:spTree>
+      <p:nvGrpSpPr>
+        <p:cNvPr id="1" name=""/>
+        <p:cNvGrpSpPr/>
+        <p:nvPr/>
+      </p:nvGrpSpPr>
+      <p:grpSpPr/>
+      <p:sp>
+        <p:nvSpPr>
+          <p:cNvPr id="2" name="TextBox 1"/>
+          <p:cNvSpPr txBox="1"/>
+          <p:nvPr/>
+        </p:nvSpPr>
+        <p:spPr>
+          <a:xfrm>
+            <a:off x="502920" y="274320"/>
+            <a:ext cx="11247120" cy="868680"/>
+          </a:xfrm>
+          <a:prstGeom prst="rect">
+            <a:avLst/>
+          </a:prstGeom>
+          <a:noFill/>
+        </p:spPr>
+        <p:txBody>
+          <a:bodyPr wrap="none">
+            <a:spAutoFit/>
+          </a:bodyPr>
+          <a:lstStyle/>
+          <a:p>
+            <a:pPr>
+              <a:defRPr sz="2800" b="1">
+                <a:solidFill>
+                  <a:srgbClr val="1A2E4A"/>
+                </a:solidFill>
+              </a:defRPr>
+            </a:pPr>
+            <a:r>
+              <a:t>The decisive negative: fixing the chemistry does not fix the score</a:t>
+            </a:r>
+          </a:p>
+          <a:p>
+            <a:pPr>
+              <a:defRPr sz="1400">
                 <a:solidFill>
                   <a:srgbClr val="555A60"/>
                 </a:solidFill>
               </a:defRPr>
             </a:pPr>
             <a:r>
-              <a:t>Open for discussion: a fresh held-out split for confirmatory numbers; whether the g-xTB benchmark merits a standalone paper; direct pair modelling as the route toward the +0.53 ceiling.</a:t>
+              <a:t>All 956 complexes re-optimised with g-xTB; matched-pair training, identical rows</a:t>
+            </a:r>
+          </a:p>
+        </p:txBody>
+      </p:sp>
+      <p:graphicFrame>
+        <p:nvGraphicFramePr>
+          <p:cNvPr id="3" name="Table 2"/>
+          <p:cNvGraphicFramePr>
+            <a:graphicFrameLocks noGrp="1"/>
+          </p:cNvGraphicFramePr>
+          <p:nvPr/>
+        </p:nvGraphicFramePr>
+        <p:xfrm>
+          <a:off x="640080" y="1463040"/>
+          <a:ext cx="10881360" cy="1737360"/>
+        </p:xfrm>
+        <a:graphic>
+          <a:graphicData uri="http://schemas.openxmlformats.org/drawingml/2006/table">
+            <a:tbl>
+              <a:tblPr firstRow="1" bandRow="1">
+                <a:tableStyleId>{5C22544A-7EE6-4342-B048-85BDC9FD1C3A}</a:tableStyleId>
+              </a:tblPr>
+              <a:tblGrid>
+                <a:gridCol w="6400800"/>
+                <a:gridCol w="2377440"/>
+                <a:gridCol w="2103120"/>
+              </a:tblGrid>
+              <a:tr h="347472">
+                <a:tc>
+                  <a:txBody>
+                    <a:bodyPr/>
+                    <a:lstStyle/>
+                    <a:p>
+                      <a:pPr>
+                        <a:defRPr sz="1400" b="1">
+                          <a:solidFill>
+                            <a:srgbClr val="FFFFFF"/>
+                          </a:solidFill>
+                        </a:defRPr>
+                      </a:pPr>
+                      <a:r>
+                        <a:t>representation-side intervention</a:t>
+                      </a:r>
+                    </a:p>
+                  </a:txBody>
+                  <a:tcPr/>
+                </a:tc>
+                <a:tc>
+                  <a:txBody>
+                    <a:bodyPr/>
+                    <a:lstStyle/>
+                    <a:p>
+                      <a:pPr>
+                        <a:defRPr sz="1400" b="1">
+                          <a:solidFill>
+                            <a:srgbClr val="FFFFFF"/>
+                          </a:solidFill>
+                        </a:defRPr>
+                      </a:pPr>
+                      <a:r>
+                        <a:t>Δ adjacent R²</a:t>
+                      </a:r>
+                    </a:p>
+                  </a:txBody>
+                  <a:tcPr/>
+                </a:tc>
+                <a:tc>
+                  <a:txBody>
+                    <a:bodyPr/>
+                    <a:lstStyle/>
+                    <a:p>
+                      <a:pPr>
+                        <a:defRPr sz="1400" b="1">
+                          <a:solidFill>
+                            <a:srgbClr val="FFFFFF"/>
+                          </a:solidFill>
+                        </a:defRPr>
+                      </a:pPr>
+                      <a:r>
+                        <a:t>verdict</a:t>
+                      </a:r>
+                    </a:p>
+                  </a:txBody>
+                  <a:tcPr/>
+                </a:tc>
+              </a:tr>
+              <a:tr h="347472">
+                <a:tc>
+                  <a:txBody>
+                    <a:bodyPr/>
+                    <a:lstStyle/>
+                    <a:p>
+                      <a:pPr>
+                        <a:defRPr sz="1400"/>
+                      </a:pPr>
+                      <a:r>
+                        <a:t>g-xTB geometries (correct contraction) vs shipped</a:t>
+                      </a:r>
+                    </a:p>
+                  </a:txBody>
+                  <a:tcPr/>
+                </a:tc>
+                <a:tc>
+                  <a:txBody>
+                    <a:bodyPr/>
+                    <a:lstStyle/>
+                    <a:p>
+                      <a:pPr>
+                        <a:defRPr sz="1400"/>
+                      </a:pPr>
+                      <a:r>
+                        <a:t>+0.004 (p = 0.68)</a:t>
+                      </a:r>
+                    </a:p>
+                  </a:txBody>
+                  <a:tcPr/>
+                </a:tc>
+                <a:tc>
+                  <a:txBody>
+                    <a:bodyPr/>
+                    <a:lstStyle/>
+                    <a:p>
+                      <a:pPr>
+                        <a:defRPr sz="1400"/>
+                      </a:pPr>
+                      <a:r>
+                        <a:t>null</a:t>
+                      </a:r>
+                    </a:p>
+                  </a:txBody>
+                  <a:tcPr/>
+                </a:tc>
+              </a:tr>
+              <a:tr h="347472">
+                <a:tc>
+                  <a:txBody>
+                    <a:bodyPr/>
+                    <a:lstStyle/>
+                    <a:p>
+                      <a:pPr>
+                        <a:defRPr sz="1400"/>
+                      </a:pPr>
+                      <a:r>
+                        <a:t>structures rebuilt in correspondence (455× less conformer noise)</a:t>
+                      </a:r>
+                    </a:p>
+                  </a:txBody>
+                  <a:tcPr/>
+                </a:tc>
+                <a:tc>
+                  <a:txBody>
+                    <a:bodyPr/>
+                    <a:lstStyle/>
+                    <a:p>
+                      <a:pPr>
+                        <a:defRPr sz="1400"/>
+                      </a:pPr>
+                      <a:r>
+                        <a:t>−0.013</a:t>
+                      </a:r>
+                    </a:p>
+                  </a:txBody>
+                  <a:tcPr/>
+                </a:tc>
+                <a:tc>
+                  <a:txBody>
+                    <a:bodyPr/>
+                    <a:lstStyle/>
+                    <a:p>
+                      <a:pPr>
+                        <a:defRPr sz="1400"/>
+                      </a:pPr>
+                      <a:r>
+                        <a:t>negative</a:t>
+                      </a:r>
+                    </a:p>
+                  </a:txBody>
+                  <a:tcPr/>
+                </a:tc>
+              </a:tr>
+              <a:tr h="347472">
+                <a:tc>
+                  <a:txBody>
+                    <a:bodyPr/>
+                    <a:lstStyle/>
+                    <a:p>
+                      <a:pPr>
+                        <a:defRPr sz="1400"/>
+                      </a:pPr>
+                      <a:r>
+                        <a:t>conditions modulating the 3D embedding (FiLM)</a:t>
+                      </a:r>
+                    </a:p>
+                  </a:txBody>
+                  <a:tcPr/>
+                </a:tc>
+                <a:tc>
+                  <a:txBody>
+                    <a:bodyPr/>
+                    <a:lstStyle/>
+                    <a:p>
+                      <a:pPr>
+                        <a:defRPr sz="1400"/>
+                      </a:pPr>
+                      <a:r>
+                        <a:t>−0.108 (p = 0.003)</a:t>
+                      </a:r>
+                    </a:p>
+                  </a:txBody>
+                  <a:tcPr/>
+                </a:tc>
+                <a:tc>
+                  <a:txBody>
+                    <a:bodyPr/>
+                    <a:lstStyle/>
+                    <a:p>
+                      <a:pPr>
+                        <a:defRPr sz="1400"/>
+                      </a:pPr>
+                      <a:r>
+                        <a:t>harmful</a:t>
+                      </a:r>
+                    </a:p>
+                  </a:txBody>
+                  <a:tcPr/>
+                </a:tc>
+              </a:tr>
+              <a:tr h="347472">
+                <a:tc>
+                  <a:txBody>
+                    <a:bodyPr/>
+                    <a:lstStyle/>
+                    <a:p>
+                      <a:pPr>
+                        <a:defRPr sz="1400"/>
+                      </a:pPr>
+                      <a:r>
+                        <a:t>direct pair head + reconciliation</a:t>
+                      </a:r>
+                    </a:p>
+                  </a:txBody>
+                  <a:tcPr/>
+                </a:tc>
+                <a:tc>
+                  <a:txBody>
+                    <a:bodyPr/>
+                    <a:lstStyle/>
+                    <a:p>
+                      <a:pPr>
+                        <a:defRPr sz="1400"/>
+                      </a:pPr>
+                      <a:r>
+                        <a:t>−1.16</a:t>
+                      </a:r>
+                    </a:p>
+                  </a:txBody>
+                  <a:tcPr/>
+                </a:tc>
+                <a:tc>
+                  <a:txBody>
+                    <a:bodyPr/>
+                    <a:lstStyle/>
+                    <a:p>
+                      <a:pPr>
+                        <a:defRPr sz="1400"/>
+                      </a:pPr>
+                      <a:r>
+                        <a:t>catastrophic</a:t>
+                      </a:r>
+                    </a:p>
+                  </a:txBody>
+                  <a:tcPr/>
+                </a:tc>
+              </a:tr>
+            </a:tbl>
+          </a:graphicData>
+        </a:graphic>
+      </p:graphicFrame>
+      <p:sp>
+        <p:nvSpPr>
+          <p:cNvPr id="4" name="TextBox 3"/>
+          <p:cNvSpPr txBox="1"/>
+          <p:nvPr/>
+        </p:nvSpPr>
+        <p:spPr>
+          <a:xfrm>
+            <a:off x="548640" y="3429000"/>
+            <a:ext cx="11064240" cy="3200400"/>
+          </a:xfrm>
+          <a:prstGeom prst="rect">
+            <a:avLst/>
+          </a:prstGeom>
+          <a:noFill/>
+        </p:spPr>
+        <p:txBody>
+          <a:bodyPr wrap="square">
+            <a:spAutoFit/>
+          </a:bodyPr>
+          <a:lstStyle/>
+          <a:p>
+            <a:pPr>
+              <a:spcAft>
+                <a:spcPts val="600"/>
+              </a:spcAft>
+              <a:defRPr sz="1600" b="0">
+                <a:solidFill>
+                  <a:srgbClr val="22262A"/>
+                </a:solidFill>
+              </a:defRPr>
+            </a:pPr>
+            <a:r>
+              <a:t>One apparent positive (+0.033, p = 0.02, 7/8 seeds) was exposed as prediction shrinkage: rescaling the OLD geometry by one constant recovered 237% of the 'gain'. R²-on-a-weak-baseline needs a scale-free check.</a:t>
+            </a:r>
+          </a:p>
+          <a:p>
+            <a:pPr>
+              <a:spcAft>
+                <a:spcPts val="600"/>
+              </a:spcAft>
+              <a:defRPr sz="1600" b="1">
+                <a:solidFill>
+                  <a:srgbClr val="A8322D"/>
+                </a:solidFill>
+              </a:defRPr>
+            </a:pPr>
+            <a:r>
+              <a:t>Conclusion: the information the models lack is not in the coordinates. Geometric fidelity is not the bottleneck for this property.</a:t>
+            </a:r>
+          </a:p>
+        </p:txBody>
+      </p:sp>
+    </p:spTree>
+  </p:cSld>
+  <p:clrMapOvr>
+    <a:masterClrMapping/>
+  </p:clrMapOvr>
+</p:sld>
+</file>
+
+<file path=ppt/slides/slide14.xml><?xml version="1.0" encoding="utf-8"?>
+<p:sld xmlns:a="http://schemas.openxmlformats.org/drawingml/2006/main" xmlns:p="http://schemas.openxmlformats.org/presentationml/2006/main" xmlns:r="http://schemas.openxmlformats.org/officeDocument/2006/relationships">
+  <p:cSld>
+    <p:spTree>
+      <p:nvGrpSpPr>
+        <p:cNvPr id="1" name=""/>
+        <p:cNvGrpSpPr/>
+        <p:nvPr/>
+      </p:nvGrpSpPr>
+      <p:grpSpPr/>
+      <p:sp>
+        <p:nvSpPr>
+          <p:cNvPr id="2" name="TextBox 1"/>
+          <p:cNvSpPr txBox="1"/>
+          <p:nvPr/>
+        </p:nvSpPr>
+        <p:spPr>
+          <a:xfrm>
+            <a:off x="502920" y="274320"/>
+            <a:ext cx="11247120" cy="868680"/>
+          </a:xfrm>
+          <a:prstGeom prst="rect">
+            <a:avLst/>
+          </a:prstGeom>
+          <a:noFill/>
+        </p:spPr>
+        <p:txBody>
+          <a:bodyPr wrap="none">
+            <a:spAutoFit/>
+          </a:bodyPr>
+          <a:lstStyle/>
+          <a:p>
+            <a:pPr>
+              <a:defRPr sz="2800" b="1">
+                <a:solidFill>
+                  <a:srgbClr val="1A2E4A"/>
+                </a:solidFill>
+              </a:defRPr>
+            </a:pPr>
+            <a:r>
+              <a:t>What does move the metric: aligning the loss with the scored contrast</a:t>
+            </a:r>
+          </a:p>
+          <a:p>
+            <a:pPr>
+              <a:defRPr sz="1400">
+                <a:solidFill>
+                  <a:srgbClr val="555A60"/>
+                </a:solidFill>
+              </a:defRPr>
+            </a:pPr>
+            <a:r>
+              <a:t>The same change, two architectures, disjoint seed sets</a:t>
+            </a:r>
+          </a:p>
+        </p:txBody>
+      </p:sp>
+      <p:pic>
+        <p:nvPicPr>
+          <p:cNvPr id="3" name="Picture 2" descr="f6_transfer.png"/>
+          <p:cNvPicPr>
+            <a:picLocks noChangeAspect="1"/>
+          </p:cNvPicPr>
+          <p:nvPr/>
+        </p:nvPicPr>
+        <p:blipFill>
+          <a:blip r:embed="rId2"/>
+          <a:stretch>
+            <a:fillRect/>
+          </a:stretch>
+        </p:blipFill>
+        <p:spPr>
+          <a:xfrm>
+            <a:off x="1981047" y="1325880"/>
+            <a:ext cx="8229600" cy="3615199"/>
+          </a:xfrm>
+          <a:prstGeom prst="rect">
+            <a:avLst/>
+          </a:prstGeom>
+        </p:spPr>
+      </p:pic>
+      <p:sp>
+        <p:nvSpPr>
+          <p:cNvPr id="4" name="TextBox 3"/>
+          <p:cNvSpPr txBox="1"/>
+          <p:nvPr/>
+        </p:nvSpPr>
+        <p:spPr>
+          <a:xfrm>
+            <a:off x="548640" y="4983480"/>
+            <a:ext cx="11064240" cy="1645919"/>
+          </a:xfrm>
+          <a:prstGeom prst="rect">
+            <a:avLst/>
+          </a:prstGeom>
+          <a:noFill/>
+        </p:spPr>
+        <p:txBody>
+          <a:bodyPr wrap="square">
+            <a:spAutoFit/>
+          </a:bodyPr>
+          <a:lstStyle/>
+          <a:p>
+            <a:pPr>
+              <a:spcAft>
+                <a:spcPts val="600"/>
+              </a:spcAft>
+              <a:defRPr sz="1600" b="0">
+                <a:solidFill>
+                  <a:srgbClr val="22262A"/>
+                </a:solidFill>
+              </a:defRPr>
+            </a:pPr>
+            <a:r>
+              <a:t>Up-weighting the within-block contrast term (weight 2 → 4): +0.0142 on the distance encoder (40 seeds, p = 0.014) and +0.0146 on the simplicial encoder (24 seeds, p = 0.035) — the signature of an objective-level effect, not an encoder artefact.</a:t>
+            </a:r>
+          </a:p>
+          <a:p>
+            <a:pPr>
+              <a:spcAft>
+                <a:spcPts val="600"/>
+              </a:spcAft>
+              <a:defRPr sz="1600" b="0">
+                <a:solidFill>
+                  <a:srgbClr val="22262A"/>
+                </a:solidFill>
+              </a:defRPr>
+            </a:pPr>
+            <a:r>
+              <a:t>Cost: overall log D R² dips slightly (−0.015). This is a selectivity setting, not a free win.</a:t>
+            </a:r>
+          </a:p>
+        </p:txBody>
+      </p:sp>
+    </p:spTree>
+  </p:cSld>
+  <p:clrMapOvr>
+    <a:masterClrMapping/>
+  </p:clrMapOvr>
+</p:sld>
+</file>
+
+<file path=ppt/slides/slide15.xml><?xml version="1.0" encoding="utf-8"?>
+<p:sld xmlns:a="http://schemas.openxmlformats.org/drawingml/2006/main" xmlns:p="http://schemas.openxmlformats.org/presentationml/2006/main" xmlns:r="http://schemas.openxmlformats.org/officeDocument/2006/relationships">
+  <p:cSld>
+    <p:spTree>
+      <p:nvGrpSpPr>
+        <p:cNvPr id="1" name=""/>
+        <p:cNvGrpSpPr/>
+        <p:nvPr/>
+      </p:nvGrpSpPr>
+      <p:grpSpPr/>
+      <p:sp>
+        <p:nvSpPr>
+          <p:cNvPr id="2" name="TextBox 1"/>
+          <p:cNvSpPr txBox="1"/>
+          <p:nvPr/>
+        </p:nvSpPr>
+        <p:spPr>
+          <a:xfrm>
+            <a:off x="502920" y="274320"/>
+            <a:ext cx="11247120" cy="868680"/>
+          </a:xfrm>
+          <a:prstGeom prst="rect">
+            <a:avLst/>
+          </a:prstGeom>
+          <a:noFill/>
+        </p:spPr>
+        <p:txBody>
+          <a:bodyPr wrap="none">
+            <a:spAutoFit/>
+          </a:bodyPr>
+          <a:lstStyle/>
+          <a:p>
+            <a:pPr>
+              <a:defRPr sz="2800" b="1">
+                <a:solidFill>
+                  <a:srgbClr val="1A2E4A"/>
+                </a:solidFill>
+              </a:defRPr>
+            </a:pPr>
+            <a:r>
+              <a:t>Headroom: the labels support roughly +0.53</a:t>
+            </a:r>
+          </a:p>
+          <a:p>
+            <a:pPr>
+              <a:defRPr sz="1400">
+                <a:solidFill>
+                  <a:srgbClr val="555A60"/>
+                </a:solidFill>
+              </a:defRPr>
+            </a:pPr>
+            <a:r>
+              <a:t>Condition effects cancel on differencing — separations reproduce 6× tighter than levels</a:t>
+            </a:r>
+          </a:p>
+        </p:txBody>
+      </p:sp>
+      <p:pic>
+        <p:nvPicPr>
+          <p:cNvPr id="3" name="Picture 2" descr="f7_ceiling.png"/>
+          <p:cNvPicPr>
+            <a:picLocks noChangeAspect="1"/>
+          </p:cNvPicPr>
+          <p:nvPr/>
+        </p:nvPicPr>
+        <p:blipFill>
+          <a:blip r:embed="rId2"/>
+          <a:stretch>
+            <a:fillRect/>
+          </a:stretch>
+        </p:blipFill>
+        <p:spPr>
+          <a:xfrm>
+            <a:off x="1615287" y="1371600"/>
+            <a:ext cx="8961120" cy="3360420"/>
+          </a:xfrm>
+          <a:prstGeom prst="rect">
+            <a:avLst/>
+          </a:prstGeom>
+        </p:spPr>
+      </p:pic>
+      <p:sp>
+        <p:nvSpPr>
+          <p:cNvPr id="4" name="TextBox 3"/>
+          <p:cNvSpPr txBox="1"/>
+          <p:nvPr/>
+        </p:nvSpPr>
+        <p:spPr>
+          <a:xfrm>
+            <a:off x="548640" y="4709160"/>
+            <a:ext cx="11064240" cy="1920239"/>
+          </a:xfrm>
+          <a:prstGeom prst="rect">
+            <a:avLst/>
+          </a:prstGeom>
+          <a:noFill/>
+        </p:spPr>
+        <p:txBody>
+          <a:bodyPr wrap="square">
+            <a:spAutoFit/>
+          </a:bodyPr>
+          <a:lstStyle/>
+          <a:p>
+            <a:pPr>
+              <a:spcAft>
+                <a:spcPts val="600"/>
+              </a:spcAft>
+              <a:defRPr sz="1600" b="0">
+                <a:solidFill>
+                  <a:srgbClr val="22262A"/>
+                </a:solidFill>
+              </a:defRPr>
+            </a:pPr>
+            <a:r>
+              <a:t>Raw log D scatter within a (block, metal) group is 0.72–0.95, but the same adjacent separation measured in independent blocks reproduces to 0.153 on a spread of 0.224 → ceiling ≈ +0.53.</a:t>
+            </a:r>
+          </a:p>
+          <a:p>
+            <a:pPr>
+              <a:spcAft>
+                <a:spcPts val="600"/>
+              </a:spcAft>
+              <a:defRPr sz="1600" b="1">
+                <a:solidFill>
+                  <a:srgbClr val="1A2E4A"/>
+                </a:solidFill>
+              </a:defRPr>
+            </a:pPr>
+            <a:r>
+              <a:t>We are at ~60% of the ceiling. Geometry explains ~1% of pair variance under either Hamiltonian; the remaining signal points at conditions and direct pair modelling.</a:t>
+            </a:r>
+          </a:p>
+        </p:txBody>
+      </p:sp>
+    </p:spTree>
+  </p:cSld>
+  <p:clrMapOvr>
+    <a:masterClrMapping/>
+  </p:clrMapOvr>
+</p:sld>
+</file>
+
+<file path=ppt/slides/slide16.xml><?xml version="1.0" encoding="utf-8"?>
+<p:sld xmlns:a="http://schemas.openxmlformats.org/drawingml/2006/main" xmlns:p="http://schemas.openxmlformats.org/presentationml/2006/main" xmlns:r="http://schemas.openxmlformats.org/officeDocument/2006/relationships">
+  <p:cSld>
+    <p:spTree>
+      <p:nvGrpSpPr>
+        <p:cNvPr id="1" name=""/>
+        <p:cNvGrpSpPr/>
+        <p:nvPr/>
+      </p:nvGrpSpPr>
+      <p:grpSpPr/>
+      <p:sp>
+        <p:nvSpPr>
+          <p:cNvPr id="2" name="TextBox 1"/>
+          <p:cNvSpPr txBox="1"/>
+          <p:nvPr/>
+        </p:nvSpPr>
+        <p:spPr>
+          <a:xfrm>
+            <a:off x="502920" y="274320"/>
+            <a:ext cx="11247120" cy="868680"/>
+          </a:xfrm>
+          <a:prstGeom prst="rect">
+            <a:avLst/>
+          </a:prstGeom>
+          <a:noFill/>
+        </p:spPr>
+        <p:txBody>
+          <a:bodyPr wrap="none">
+            <a:spAutoFit/>
+          </a:bodyPr>
+          <a:lstStyle/>
+          <a:p>
+            <a:pPr>
+              <a:defRPr sz="2800" b="1">
+                <a:solidFill>
+                  <a:srgbClr val="1A2E4A"/>
+                </a:solidFill>
+              </a:defRPr>
+            </a:pPr>
+            <a:r>
+              <a:t>Methodological findings — the transferable part</a:t>
+            </a:r>
+          </a:p>
+          <a:p>
+            <a:pPr>
+              <a:defRPr sz="1400">
+                <a:solidFill>
+                  <a:srgbClr val="555A60"/>
+                </a:solidFill>
+              </a:defRPr>
+            </a:pPr>
+            <a:r>
+              <a:t>Three false positives were caught and killed in one week, each by a specific check</a:t>
+            </a:r>
+          </a:p>
+        </p:txBody>
+      </p:sp>
+      <p:sp>
+        <p:nvSpPr>
+          <p:cNvPr id="3" name="TextBox 2"/>
+          <p:cNvSpPr txBox="1"/>
+          <p:nvPr/>
+        </p:nvSpPr>
+        <p:spPr>
+          <a:xfrm>
+            <a:off x="548640" y="1325880"/>
+            <a:ext cx="11064240" cy="5303520"/>
+          </a:xfrm>
+          <a:prstGeom prst="rect">
+            <a:avLst/>
+          </a:prstGeom>
+          <a:noFill/>
+        </p:spPr>
+        <p:txBody>
+          <a:bodyPr wrap="square">
+            <a:spAutoFit/>
+          </a:bodyPr>
+          <a:lstStyle/>
+          <a:p>
+            <a:pPr>
+              <a:spcAft>
+                <a:spcPts val="600"/>
+              </a:spcAft>
+              <a:defRPr sz="1600" b="0">
+                <a:solidFill>
+                  <a:srgbClr val="22262A"/>
+                </a:solidFill>
+              </a:defRPr>
+            </a:pPr>
+            <a:r>
+              <a:t>Power: the per-seed sd of a paired Δ is 0.0285 — an 8-seed comparison resolves only ~0.028, while the true effects here are 0.01–0.02. All confirmatory runs now use 24–32 seeds; three n≤8 'significant' gains dissolved on independent seeds.</a:t>
+            </a:r>
+          </a:p>
+          <a:p>
+            <a:pPr>
+              <a:spcAft>
+                <a:spcPts val="600"/>
+              </a:spcAft>
+              <a:defRPr sz="1600" b="0">
+                <a:solidFill>
+                  <a:srgbClr val="22262A"/>
+                </a:solidFill>
+              </a:defRPr>
+            </a:pPr>
+            <a:r>
+              <a:t>Scale-free check: on a weak baseline, R² rises when predictions shrink toward the mean. Requiring Pearson² to agree in sign killed a p = 0.02 artefact.</a:t>
+            </a:r>
+          </a:p>
+          <a:p>
+            <a:pPr>
+              <a:spcAft>
+                <a:spcPts val="600"/>
+              </a:spcAft>
+              <a:defRPr sz="1600" b="0">
+                <a:solidFill>
+                  <a:srgbClr val="22262A"/>
+                </a:solidFill>
+              </a:defRPr>
+            </a:pPr>
+            <a:r>
+              <a:t>Silent no-ops: five CLI flags were accepted, recorded as enabled, and ignored by an architecture that lacked them — including the pair head, untested for the entire study without anyone knowing. A capability gate now raises instead.</a:t>
+            </a:r>
+          </a:p>
+          <a:p>
+            <a:pPr>
+              <a:spcAft>
+                <a:spcPts val="600"/>
+              </a:spcAft>
+              <a:defRPr sz="1600" b="0">
+                <a:solidFill>
+                  <a:srgbClr val="22262A"/>
+                </a:solidFill>
+              </a:defRPr>
+            </a:pPr>
+            <a:r>
+              <a:t>Selection hygiene: every axis that cleared +0.02 on screening data (four of them) failed held-out. Pre-registration with the bar and the null-consequence committed before the data exists is now standard for every confirmatory claim.</a:t>
+            </a:r>
+          </a:p>
+        </p:txBody>
+      </p:sp>
+    </p:spTree>
+  </p:cSld>
+  <p:clrMapOvr>
+    <a:masterClrMapping/>
+  </p:clrMapOvr>
+</p:sld>
+</file>
+
+<file path=ppt/slides/slide17.xml><?xml version="1.0" encoding="utf-8"?>
+<p:sld xmlns:a="http://schemas.openxmlformats.org/drawingml/2006/main" xmlns:p="http://schemas.openxmlformats.org/presentationml/2006/main" xmlns:r="http://schemas.openxmlformats.org/officeDocument/2006/relationships">
+  <p:cSld>
+    <p:spTree>
+      <p:nvGrpSpPr>
+        <p:cNvPr id="1" name=""/>
+        <p:cNvGrpSpPr/>
+        <p:nvPr/>
+      </p:nvGrpSpPr>
+      <p:grpSpPr/>
+      <p:sp>
+        <p:nvSpPr>
+          <p:cNvPr id="2" name="TextBox 1"/>
+          <p:cNvSpPr txBox="1"/>
+          <p:nvPr/>
+        </p:nvSpPr>
+        <p:spPr>
+          <a:xfrm>
+            <a:off x="502920" y="274320"/>
+            <a:ext cx="11247120" cy="868680"/>
+          </a:xfrm>
+          <a:prstGeom prst="rect">
+            <a:avLst/>
+          </a:prstGeom>
+          <a:noFill/>
+        </p:spPr>
+        <p:txBody>
+          <a:bodyPr wrap="none">
+            <a:spAutoFit/>
+          </a:bodyPr>
+          <a:lstStyle/>
+          <a:p>
+            <a:pPr>
+              <a:defRPr sz="2800" b="1">
+                <a:solidFill>
+                  <a:srgbClr val="1A2E4A"/>
+                </a:solidFill>
+              </a:defRPr>
+            </a:pPr>
+            <a:r>
+              <a:t>Summary — three claims, and what I'd like to discuss</a:t>
+            </a:r>
+          </a:p>
+        </p:txBody>
+      </p:sp>
+      <p:sp>
+        <p:nvSpPr>
+          <p:cNvPr id="3" name="TextBox 2"/>
+          <p:cNvSpPr txBox="1"/>
+          <p:nvPr/>
+        </p:nvSpPr>
+        <p:spPr>
+          <a:xfrm>
+            <a:off x="548640" y="1325880"/>
+            <a:ext cx="11064240" cy="5303520"/>
+          </a:xfrm>
+          <a:prstGeom prst="rect">
+            <a:avLst/>
+          </a:prstGeom>
+          <a:noFill/>
+        </p:spPr>
+        <p:txBody>
+          <a:bodyPr wrap="square">
+            <a:spAutoFit/>
+          </a:bodyPr>
+          <a:lstStyle/>
+          <a:p>
+            <a:pPr>
+              <a:spcAft>
+                <a:spcPts val="600"/>
+              </a:spcAft>
+              <a:defRPr sz="1600" b="1">
+                <a:solidFill>
+                  <a:srgbClr val="1A2E4A"/>
+                </a:solidFill>
+              </a:defRPr>
+            </a:pPr>
+            <a:r>
+              <a:t>1.  The 3D encoder is necessary for the best result via complementarity (0.313 vs 0.291, largest stack weight) — but it is no longer the strongest single model, and its marginal value shrinks as 2D partners improve and under strict blocking.</a:t>
+            </a:r>
+          </a:p>
+          <a:p>
+            <a:pPr>
+              <a:spcAft>
+                <a:spcPts val="600"/>
+              </a:spcAft>
+              <a:defRPr sz="1600" b="1">
+                <a:solidFill>
+                  <a:srgbClr val="1A2E4A"/>
+                </a:solidFill>
+              </a:defRPr>
+            </a:pPr>
+            <a:r>
+              <a:t>2.  The 3D ceiling is a property of GFN2-xTB: lanthanide parameters linear in Z, contraction under-predicted 2.47×; fixing the chemistry (g-xTB, 8% of experiment, 71/71 ligands) does NOT move the score. The chemistry benchmark stands alone.</a:t>
+            </a:r>
+          </a:p>
+          <a:p>
+            <a:pPr>
+              <a:spcAft>
+                <a:spcPts val="600"/>
+              </a:spcAft>
+              <a:defRPr sz="1600" b="1">
+                <a:solidFill>
+                  <a:srgbClr val="1A2E4A"/>
+                </a:solidFill>
+              </a:defRPr>
+            </a:pPr>
+            <a:r>
+              <a:t>3.  The lever for selectivity is the objective, not the representation: every surviving gain came from aligning the loss with the scored contrast, and the effect transfers across architectures.</a:t>
+            </a:r>
+          </a:p>
+          <a:p>
+            <a:pPr>
+              <a:spcAft>
+                <a:spcPts val="600"/>
+              </a:spcAft>
+              <a:defRPr sz="1600" b="0">
+                <a:solidFill>
+                  <a:srgbClr val="22262A"/>
+                </a:solidFill>
+              </a:defRPr>
+            </a:pPr>
+          </a:p>
+          <a:p>
+            <a:pPr>
+              <a:spcAft>
+                <a:spcPts val="600"/>
+              </a:spcAft>
+              <a:defRPr sz="1600" b="0">
+                <a:solidFill>
+                  <a:srgbClr val="555A60"/>
+                </a:solidFill>
+              </a:defRPr>
+            </a:pPr>
+            <a:r>
+              <a:t>To discuss:  (a) a fresh held-out split for confirmatory numbers;  (b) the g-xTB contraction benchmark as a standalone paper;  (c) direct pair modelling toward the +0.53 ceiling;  (d) whether VR-encoder complementarity merits a methods note given the strict-key bound.</a:t>
             </a:r>
           </a:p>
         </p:txBody>
@@ -3495,8 +4902,8 @@
         </p:nvSpPr>
         <p:spPr>
           <a:xfrm>
-            <a:off x="502920" y="320040"/>
-            <a:ext cx="11155680" cy="822960"/>
+            <a:off x="502920" y="274320"/>
+            <a:ext cx="11247120" cy="868680"/>
           </a:xfrm>
           <a:prstGeom prst="rect">
             <a:avLst/>
@@ -3510,26 +4917,26 @@
           <a:lstStyle/>
           <a:p>
             <a:pPr>
-              <a:defRPr sz="3000" b="1">
+              <a:defRPr sz="2800" b="1">
                 <a:solidFill>
                   <a:srgbClr val="1A2E4A"/>
                 </a:solidFill>
               </a:defRPr>
             </a:pPr>
             <a:r>
-              <a:t>Your question first: “constantly more accurate — am I right?”</a:t>
+              <a:t>Background: why adjacent lanthanides</a:t>
             </a:r>
           </a:p>
           <a:p>
             <a:pPr>
-              <a:defRPr sz="1500">
+              <a:defRPr sz="1400">
                 <a:solidFill>
                   <a:srgbClr val="555A60"/>
                 </a:solidFill>
               </a:defRPr>
             </a:pPr>
             <a:r>
-              <a:t>The precise claim is narrower than that, and stronger where it counts</a:t>
+              <a:t>The industrially hard case in rare-earth separations</a:t>
             </a:r>
           </a:p>
         </p:txBody>
@@ -3542,8 +4949,8 @@
         </p:nvSpPr>
         <p:spPr>
           <a:xfrm>
-            <a:off x="548640" y="1371600"/>
-            <a:ext cx="11064240" cy="5212080"/>
+            <a:off x="548640" y="1325880"/>
+            <a:ext cx="11064240" cy="5303520"/>
           </a:xfrm>
           <a:prstGeom prst="rect">
             <a:avLst/>
@@ -3558,106 +4965,76 @@
           <a:p>
             <a:pPr>
               <a:spcAft>
-                <a:spcPts val="700"/>
+                <a:spcPts val="600"/>
               </a:spcAft>
-              <a:defRPr sz="1700" b="1">
-                <a:solidFill>
-                  <a:srgbClr val="A8322D"/>
-                </a:solidFill>
-              </a:defRPr>
-            </a:pPr>
-            <a:r>
-              <a:t>Not constantly more accurate as a single model.</a:t>
-            </a:r>
-          </a:p>
-          <a:p>
-            <a:pPr lvl="1">
-              <a:spcAft>
-                <a:spcPts val="700"/>
-              </a:spcAft>
-              <a:defRPr sz="1500" b="0">
+              <a:defRPr sz="1600" b="0">
                 <a:solidFill>
                   <a:srgbClr val="22262A"/>
                 </a:solidFill>
               </a:defRPr>
             </a:pPr>
             <a:r>
-              <a:t>Given the right loss function, plain gradient boosting on 2D descriptors now reaches 0.278 — above the 3D encoder alone (0.266) and above the July combination (0.267).</a:t>
+              <a:t>Separating neighbouring lanthanides (Nd/Pr, Dy/Tb, …) is the bottleneck of rare-earth processing: liquid–liquid extraction with designed organic extractants is the industrial route.</a:t>
             </a:r>
           </a:p>
           <a:p>
             <a:pPr>
               <a:spcAft>
-                <a:spcPts val="700"/>
+                <a:spcPts val="600"/>
               </a:spcAft>
-              <a:defRPr sz="1700" b="1">
-                <a:solidFill>
-                  <a:srgbClr val="0E7A5F"/>
-                </a:solidFill>
-              </a:defRPr>
-            </a:pPr>
-            <a:r>
-              <a:t>But the best system still requires the 3D encoder.</a:t>
-            </a:r>
-          </a:p>
-          <a:p>
-            <a:pPr lvl="1">
-              <a:spcAft>
-                <a:spcPts val="700"/>
-              </a:spcAft>
-              <a:defRPr sz="1500" b="0">
+              <a:defRPr sz="1600" b="0">
                 <a:solidFill>
                   <a:srgbClr val="22262A"/>
                 </a:solidFill>
               </a:defRPr>
             </a:pPr>
             <a:r>
-              <a:t>Best combination WITH the 3D encoder:  0.313.  Without it:  0.291.</a:t>
-            </a:r>
-          </a:p>
-          <a:p>
-            <a:pPr lvl="1">
-              <a:spcAft>
-                <a:spcPts val="700"/>
-              </a:spcAft>
-              <a:defRPr sz="1500" b="0">
-                <a:solidFill>
-                  <a:srgbClr val="22262A"/>
-                </a:solidFill>
-              </a:defRPr>
-            </a:pPr>
-            <a:r>
-              <a:t>The pair-fitted combiner assigns the 3D encoder the LARGEST weight of the three models: 0.46 vs 0.42 (boosting) and 0.11 (fingerprint network).</a:t>
+              <a:t>The physics is unforgiving: adjacent trivalent ions differ by ~0.013 Å in ionic radius — the lanthanide contraction — and by essentially nothing else a classical descriptor sees.</a:t>
             </a:r>
           </a:p>
           <a:p>
             <a:pPr>
               <a:spcAft>
-                <a:spcPts val="700"/>
+                <a:spcPts val="600"/>
               </a:spcAft>
-              <a:defRPr sz="1700" b="1">
+              <a:defRPr sz="1600" b="1">
                 <a:solidFill>
                   <a:srgbClr val="1A2E4A"/>
                 </a:solidFill>
               </a:defRPr>
             </a:pPr>
             <a:r>
-              <a:t>The defensible statement: the 3D encoder contributes by complementarity — it corrects errors the 2D models share — not by outranking them.</a:t>
+              <a:t>A model that predicts the DIFFERENCE in log D between two adjacent lanthanides under identical conditions would allow in-silico screening of extractants for a target pair.</a:t>
             </a:r>
           </a:p>
           <a:p>
             <a:pPr>
               <a:spcAft>
-                <a:spcPts val="700"/>
+                <a:spcPts val="600"/>
               </a:spcAft>
-              <a:defRPr sz="1700" b="0">
+              <a:defRPr sz="1600" b="0">
                 <a:solidFill>
                   <a:srgbClr val="22262A"/>
                 </a:solidFill>
               </a:defRPr>
             </a:pPr>
             <a:r>
-              <a:t>Everything on the following slides is leave-extractants-out, 16–32 seed ensembles, out-of-fold.</a:t>
+              <a:t>Metric used throughout: R² of the predicted adjacent-pair log separation factor (905 pairs). Zero = no better than predicting the average separation for every pair.</a:t>
+            </a:r>
+          </a:p>
+          <a:p>
+            <a:pPr>
+              <a:spcAft>
+                <a:spcPts val="600"/>
+              </a:spcAft>
+              <a:defRPr sz="1600" b="0">
+                <a:solidFill>
+                  <a:srgbClr val="22262A"/>
+                </a:solidFill>
+              </a:defRPr>
+            </a:pPr>
+            <a:r>
+              <a:t>Hypothesis under test since the project began: quantum-chemistry-derived 3D structure (Architector + GFN2-xTB), read by a topological encoder, carries selectivity information that 2D descriptors miss.</a:t>
             </a:r>
           </a:p>
         </p:txBody>
@@ -3688,8 +5065,8 @@
         </p:nvSpPr>
         <p:spPr>
           <a:xfrm>
-            <a:off x="502920" y="320040"/>
-            <a:ext cx="11155680" cy="822960"/>
+            <a:off x="502920" y="274320"/>
+            <a:ext cx="11247120" cy="868680"/>
           </a:xfrm>
           <a:prstGeom prst="rect">
             <a:avLst/>
@@ -3703,26 +5080,26 @@
           <a:lstStyle/>
           <a:p>
             <a:pPr>
-              <a:defRPr sz="3000" b="1">
+              <a:defRPr sz="2800" b="1">
                 <a:solidFill>
                   <a:srgbClr val="1A2E4A"/>
                 </a:solidFill>
               </a:defRPr>
             </a:pPr>
             <a:r>
-              <a:t>What changed since my July email</a:t>
+              <a:t>Data: the SAFE solvent-extraction database</a:t>
             </a:r>
           </a:p>
           <a:p>
             <a:pPr>
-              <a:defRPr sz="1500">
+              <a:defRPr sz="1400">
                 <a:solidFill>
                   <a:srgbClr val="555A60"/>
                 </a:solidFill>
               </a:defRPr>
             </a:pPr>
             <a:r>
-              <a:t>Two components improved; the July numbers are superseded</a:t>
+              <a:t>Literature-curated, DOI-linked distribution-ratio measurements</a:t>
             </a:r>
           </a:p>
         </p:txBody>
@@ -3737,7 +5114,7 @@
         </p:nvGraphicFramePr>
         <p:xfrm>
           <a:off x="640080" y="1463040"/>
-          <a:ext cx="10881359" cy="1783079"/>
+          <a:ext cx="10881360" cy="1737360"/>
         </p:xfrm>
         <a:graphic>
           <a:graphicData uri="http://schemas.openxmlformats.org/drawingml/2006/table">
@@ -3746,331 +5123,171 @@
                 <a:tableStyleId>{5C22544A-7EE6-4342-B048-85BDC9FD1C3A}</a:tableStyleId>
               </a:tblPr>
               <a:tblGrid>
-                <a:gridCol w="4206240"/>
-                <a:gridCol w="1463040"/>
-                <a:gridCol w="1463040"/>
-                <a:gridCol w="3749039"/>
+                <a:gridCol w="2377440"/>
+                <a:gridCol w="8503920"/>
               </a:tblGrid>
-              <a:tr h="356615">
-                <a:tc>
-                  <a:txBody>
-                    <a:bodyPr/>
-                    <a:lstStyle/>
-                    <a:p>
-                      <a:pPr>
-                        <a:defRPr sz="1500" b="1">
+              <a:tr h="347472">
+                <a:tc>
+                  <a:txBody>
+                    <a:bodyPr/>
+                    <a:lstStyle/>
+                    <a:p>
+                      <a:pPr>
+                        <a:defRPr sz="1400" b="1">
                           <a:solidFill>
                             <a:srgbClr val="FFFFFF"/>
                           </a:solidFill>
                         </a:defRPr>
                       </a:pPr>
                       <a:r>
-                        <a:t>model (adjacent-pair log SF R²)</a:t>
-                      </a:r>
-                    </a:p>
-                  </a:txBody>
-                  <a:tcPr/>
-                </a:tc>
-                <a:tc>
-                  <a:txBody>
-                    <a:bodyPr/>
-                    <a:lstStyle/>
-                    <a:p>
-                      <a:pPr>
-                        <a:defRPr sz="1500" b="1">
+                        <a:t>stage</a:t>
+                      </a:r>
+                    </a:p>
+                  </a:txBody>
+                  <a:tcPr/>
+                </a:tc>
+                <a:tc>
+                  <a:txBody>
+                    <a:bodyPr/>
+                    <a:lstStyle/>
+                    <a:p>
+                      <a:pPr>
+                        <a:defRPr sz="1400" b="1">
                           <a:solidFill>
                             <a:srgbClr val="FFFFFF"/>
                           </a:solidFill>
                         </a:defRPr>
                       </a:pPr>
                       <a:r>
-                        <a:t>July email</a:t>
-                      </a:r>
-                    </a:p>
-                  </a:txBody>
-                  <a:tcPr/>
-                </a:tc>
-                <a:tc>
-                  <a:txBody>
-                    <a:bodyPr/>
-                    <a:lstStyle/>
-                    <a:p>
-                      <a:pPr>
-                        <a:defRPr sz="1500" b="1">
-                          <a:solidFill>
-                            <a:srgbClr val="FFFFFF"/>
-                          </a:solidFill>
-                        </a:defRPr>
-                      </a:pPr>
-                      <a:r>
-                        <a:t>today</a:t>
-                      </a:r>
-                    </a:p>
-                  </a:txBody>
-                  <a:tcPr/>
-                </a:tc>
-                <a:tc>
-                  <a:txBody>
-                    <a:bodyPr/>
-                    <a:lstStyle/>
-                    <a:p>
-                      <a:pPr>
-                        <a:defRPr sz="1500" b="1">
-                          <a:solidFill>
-                            <a:srgbClr val="FFFFFF"/>
-                          </a:solidFill>
-                        </a:defRPr>
-                      </a:pPr>
-                      <a:r>
-                        <a:t>change</a:t>
+                        <a:t>content</a:t>
                       </a:r>
                     </a:p>
                   </a:txBody>
                   <a:tcPr/>
                 </a:tc>
               </a:tr>
-              <a:tr h="356615">
-                <a:tc>
-                  <a:txBody>
-                    <a:bodyPr/>
-                    <a:lstStyle/>
-                    <a:p>
-                      <a:pPr>
-                        <a:defRPr sz="1500"/>
-                      </a:pPr>
-                      <a:r>
-                        <a:t>gradient boosting, 2D descriptors</a:t>
-                      </a:r>
-                    </a:p>
-                  </a:txBody>
-                  <a:tcPr/>
-                </a:tc>
-                <a:tc>
-                  <a:txBody>
-                    <a:bodyPr/>
-                    <a:lstStyle/>
-                    <a:p>
-                      <a:pPr algn="r">
-                        <a:defRPr sz="1500"/>
-                      </a:pPr>
-                      <a:r>
-                        <a:t>0.142</a:t>
-                      </a:r>
-                    </a:p>
-                  </a:txBody>
-                  <a:tcPr/>
-                </a:tc>
-                <a:tc>
-                  <a:txBody>
-                    <a:bodyPr/>
-                    <a:lstStyle/>
-                    <a:p>
-                      <a:pPr algn="r">
-                        <a:defRPr sz="1500"/>
-                      </a:pPr>
-                      <a:r>
-                        <a:t>0.278</a:t>
-                      </a:r>
-                    </a:p>
-                  </a:txBody>
-                  <a:tcPr/>
-                </a:tc>
-                <a:tc>
-                  <a:txBody>
-                    <a:bodyPr/>
-                    <a:lstStyle/>
-                    <a:p>
-                      <a:pPr>
-                        <a:defRPr sz="1500"/>
-                      </a:pPr>
-                      <a:r>
-                        <a:t>loss: RMSE → Quantile(0.6) + re-tuned depth/rsm</a:t>
+              <a:tr h="347472">
+                <a:tc>
+                  <a:txBody>
+                    <a:bodyPr/>
+                    <a:lstStyle/>
+                    <a:p>
+                      <a:pPr>
+                        <a:defRPr sz="1400"/>
+                      </a:pPr>
+                      <a:r>
+                        <a:t>raw source</a:t>
+                      </a:r>
+                    </a:p>
+                  </a:txBody>
+                  <a:tcPr/>
+                </a:tc>
+                <a:tc>
+                  <a:txBody>
+                    <a:bodyPr/>
+                    <a:lstStyle/>
+                    <a:p>
+                      <a:pPr>
+                        <a:defRPr sz="1400"/>
+                      </a:pPr>
+                      <a:r>
+                        <a:t>SAFE database: 48,138 curated measurements, 31 elements, 181 distinct publications (each row DOI-linked, with conditions)</a:t>
                       </a:r>
                     </a:p>
                   </a:txBody>
                   <a:tcPr/>
                 </a:tc>
               </a:tr>
-              <a:tr h="356615">
-                <a:tc>
-                  <a:txBody>
-                    <a:bodyPr/>
-                    <a:lstStyle/>
-                    <a:p>
-                      <a:pPr>
-                        <a:defRPr sz="1500"/>
-                      </a:pPr>
-                      <a:r>
-                        <a:t>fingerprint network</a:t>
-                      </a:r>
-                    </a:p>
-                  </a:txBody>
-                  <a:tcPr/>
-                </a:tc>
-                <a:tc>
-                  <a:txBody>
-                    <a:bodyPr/>
-                    <a:lstStyle/>
-                    <a:p>
-                      <a:pPr algn="r">
-                        <a:defRPr sz="1500"/>
-                      </a:pPr>
-                      <a:r>
-                        <a:t>0.221</a:t>
-                      </a:r>
-                    </a:p>
-                  </a:txBody>
-                  <a:tcPr/>
-                </a:tc>
-                <a:tc>
-                  <a:txBody>
-                    <a:bodyPr/>
-                    <a:lstStyle/>
-                    <a:p>
-                      <a:pPr algn="r">
-                        <a:defRPr sz="1500"/>
-                      </a:pPr>
-                      <a:r>
-                        <a:t>0.221</a:t>
-                      </a:r>
-                    </a:p>
-                  </a:txBody>
-                  <a:tcPr/>
-                </a:tc>
-                <a:tc>
-                  <a:txBody>
-                    <a:bodyPr/>
-                    <a:lstStyle/>
-                    <a:p>
-                      <a:pPr>
-                        <a:defRPr sz="1500"/>
-                      </a:pPr>
-                      <a:r>
-                        <a:t>unchanged</a:t>
+              <a:tr h="347472">
+                <a:tc>
+                  <a:txBody>
+                    <a:bodyPr/>
+                    <a:lstStyle/>
+                    <a:p>
+                      <a:pPr>
+                        <a:defRPr sz="1400"/>
+                      </a:pPr>
+                      <a:r>
+                        <a:t>per-row conditions</a:t>
+                      </a:r>
+                    </a:p>
+                  </a:txBody>
+                  <a:tcPr/>
+                </a:tc>
+                <a:tc>
+                  <a:txBody>
+                    <a:bodyPr/>
+                    <a:lstStyle/>
+                    <a:p>
+                      <a:pPr>
+                        <a:defRPr sz="1400"/>
+                      </a:pPr>
+                      <a:r>
+                        <a:t>extractant SMILES + concentration, acid + concentration, diluent, metal + oxidation state, temperature, phase modifiers</a:t>
                       </a:r>
                     </a:p>
                   </a:txBody>
                   <a:tcPr/>
                 </a:tc>
               </a:tr>
-              <a:tr h="356615">
-                <a:tc>
-                  <a:txBody>
-                    <a:bodyPr/>
-                    <a:lstStyle/>
-                    <a:p>
-                      <a:pPr>
-                        <a:defRPr sz="1500"/>
-                      </a:pPr>
-                      <a:r>
-                        <a:t>3D encoder (Vietoris–Rips + message passing)</a:t>
-                      </a:r>
-                    </a:p>
-                  </a:txBody>
-                  <a:tcPr/>
-                </a:tc>
-                <a:tc>
-                  <a:txBody>
-                    <a:bodyPr/>
-                    <a:lstStyle/>
-                    <a:p>
-                      <a:pPr algn="r">
-                        <a:defRPr sz="1500"/>
-                      </a:pPr>
-                      <a:r>
-                        <a:t>0.238</a:t>
-                      </a:r>
-                    </a:p>
-                  </a:txBody>
-                  <a:tcPr/>
-                </a:tc>
-                <a:tc>
-                  <a:txBody>
-                    <a:bodyPr/>
-                    <a:lstStyle/>
-                    <a:p>
-                      <a:pPr algn="r">
-                        <a:defRPr sz="1500"/>
-                      </a:pPr>
-                      <a:r>
-                        <a:t>0.266</a:t>
-                      </a:r>
-                    </a:p>
-                  </a:txBody>
-                  <a:tcPr/>
-                </a:tc>
-                <a:tc>
-                  <a:txBody>
-                    <a:bodyPr/>
-                    <a:lstStyle/>
-                    <a:p>
-                      <a:pPr>
-                        <a:defRPr sz="1500"/>
-                      </a:pPr>
-                      <a:r>
-                        <a:t>contrast-loss weight 2 → 4</a:t>
+              <a:tr h="347472">
+                <a:tc>
+                  <a:txBody>
+                    <a:bodyPr/>
+                    <a:lstStyle/>
+                    <a:p>
+                      <a:pPr>
+                        <a:defRPr sz="1400"/>
+                      </a:pPr>
+                      <a:r>
+                        <a:t>modelled subset</a:t>
+                      </a:r>
+                    </a:p>
+                  </a:txBody>
+                  <a:tcPr/>
+                </a:tc>
+                <a:tc>
+                  <a:txBody>
+                    <a:bodyPr/>
+                    <a:lstStyle/>
+                    <a:p>
+                      <a:pPr>
+                        <a:defRPr sz="1400"/>
+                      </a:pPr>
+                      <a:r>
+                        <a:t>trivalent lanthanides with resolvable structures: 4,746 measurements · 162 extractants · 14 lanthanides (Pm absent in nature)</a:t>
                       </a:r>
                     </a:p>
                   </a:txBody>
                   <a:tcPr/>
                 </a:tc>
               </a:tr>
-              <a:tr h="356619">
-                <a:tc>
-                  <a:txBody>
-                    <a:bodyPr/>
-                    <a:lstStyle/>
-                    <a:p>
-                      <a:pPr>
-                        <a:defRPr sz="1500"/>
-                      </a:pPr>
-                      <a:r>
-                        <a:t>best combination</a:t>
-                      </a:r>
-                    </a:p>
-                  </a:txBody>
-                  <a:tcPr/>
-                </a:tc>
-                <a:tc>
-                  <a:txBody>
-                    <a:bodyPr/>
-                    <a:lstStyle/>
-                    <a:p>
-                      <a:pPr algn="r">
-                        <a:defRPr sz="1500"/>
-                      </a:pPr>
-                      <a:r>
-                        <a:t>0.267</a:t>
-                      </a:r>
-                    </a:p>
-                  </a:txBody>
-                  <a:tcPr/>
-                </a:tc>
-                <a:tc>
-                  <a:txBody>
-                    <a:bodyPr/>
-                    <a:lstStyle/>
-                    <a:p>
-                      <a:pPr algn="r">
-                        <a:defRPr sz="1500"/>
-                      </a:pPr>
-                      <a:r>
-                        <a:t>0.313</a:t>
-                      </a:r>
-                    </a:p>
-                  </a:txBody>
-                  <a:tcPr/>
-                </a:tc>
-                <a:tc>
-                  <a:txBody>
-                    <a:bodyPr/>
-                    <a:lstStyle/>
-                    <a:p>
-                      <a:pPr>
-                        <a:defRPr sz="1500"/>
-                      </a:pPr>
-                      <a:r>
-                        <a:t>both improvements + pair-fitted stacking</a:t>
+              <a:tr h="347472">
+                <a:tc>
+                  <a:txBody>
+                    <a:bodyPr/>
+                    <a:lstStyle/>
+                    <a:p>
+                      <a:pPr>
+                        <a:defRPr sz="1400"/>
+                      </a:pPr>
+                      <a:r>
+                        <a:t>target</a:t>
+                      </a:r>
+                    </a:p>
+                  </a:txBody>
+                  <a:tcPr/>
+                </a:tc>
+                <a:tc>
+                  <a:txBody>
+                    <a:bodyPr/>
+                    <a:lstStyle/>
+                    <a:p>
+                      <a:pPr>
+                        <a:defRPr sz="1400"/>
+                      </a:pPr>
+                      <a:r>
+                        <a:t>log D (distribution ratio, organic/aqueous)</a:t>
                       </a:r>
                     </a:p>
                   </a:txBody>
@@ -4089,8 +5306,8 @@
         </p:nvSpPr>
         <p:spPr>
           <a:xfrm>
-            <a:off x="548640" y="3749039"/>
-            <a:ext cx="11064240" cy="2834640"/>
+            <a:off x="548640" y="3977639"/>
+            <a:ext cx="11064240" cy="2651760"/>
           </a:xfrm>
           <a:prstGeom prst="rect">
             <a:avLst/>
@@ -4105,31 +5322,31 @@
           <a:p>
             <a:pPr>
               <a:spcAft>
-                <a:spcPts val="700"/>
+                <a:spcPts val="600"/>
               </a:spcAft>
-              <a:defRPr sz="1700" b="1">
-                <a:solidFill>
-                  <a:srgbClr val="1A2E4A"/>
-                </a:solidFill>
-              </a:defRPr>
-            </a:pPr>
-            <a:r>
-              <a:t>Neither improvement is architectural. Both are objective-function changes; the representations are untouched.</a:t>
+              <a:defRPr sz="1600" b="0">
+                <a:solidFill>
+                  <a:srgbClr val="22262A"/>
+                </a:solidFill>
+              </a:defRPr>
+            </a:pPr>
+            <a:r>
+              <a:t>Replicates are real replicates: the same (extractant, conditions, metal) measured in different labs/papers — later used to measure the label noise floor.</a:t>
             </a:r>
           </a:p>
           <a:p>
             <a:pPr>
               <a:spcAft>
-                <a:spcPts val="700"/>
+                <a:spcPts val="600"/>
               </a:spcAft>
-              <a:defRPr sz="1700" b="0">
+              <a:defRPr sz="1600" b="0">
                 <a:solidFill>
                   <a:srgbClr val="22262A"/>
                 </a:solidFill>
               </a:defRPr>
             </a:pPr>
             <a:r>
-              <a:t>The single largest lever in the whole project was the tree model's loss function: RMSE → MAE → Quantile(0.6), cumulatively +0.136 on the adjacent metric.</a:t>
+              <a:t>Grouping key for selectivity: a composition block = one extractant under one binned condition set; adjacent pairs are differenced within blocks only.</a:t>
             </a:r>
           </a:p>
         </p:txBody>
@@ -4160,8 +5377,8 @@
         </p:nvSpPr>
         <p:spPr>
           <a:xfrm>
-            <a:off x="502920" y="320040"/>
-            <a:ext cx="11155680" cy="822960"/>
+            <a:off x="502920" y="274320"/>
+            <a:ext cx="11247120" cy="868680"/>
           </a:xfrm>
           <a:prstGeom prst="rect">
             <a:avLst/>
@@ -4175,26 +5392,14 @@
           <a:lstStyle/>
           <a:p>
             <a:pPr>
-              <a:defRPr sz="3000" b="1">
+              <a:defRPr sz="2800" b="1">
                 <a:solidFill>
                   <a:srgbClr val="1A2E4A"/>
                 </a:solidFill>
               </a:defRPr>
             </a:pPr>
             <a:r>
-              <a:t>The current best result</a:t>
-            </a:r>
-          </a:p>
-          <a:p>
-            <a:pPr>
-              <a:defRPr sz="1500">
-                <a:solidFill>
-                  <a:srgbClr val="555A60"/>
-                </a:solidFill>
-              </a:defRPr>
-            </a:pPr>
-            <a:r>
-              <a:t>Nested pair-fitted stack, weights refitted per held-out extractant</a:t>
+              <a:t>From SMILES to structure: the 3D compilation pipeline</a:t>
             </a:r>
           </a:p>
         </p:txBody>
@@ -4209,7 +5414,7 @@
         </p:nvGraphicFramePr>
         <p:xfrm>
           <a:off x="640080" y="1463040"/>
-          <a:ext cx="10881360" cy="1783079"/>
+          <a:ext cx="10881360" cy="2066544"/>
         </p:xfrm>
         <a:graphic>
           <a:graphicData uri="http://schemas.openxmlformats.org/drawingml/2006/table">
@@ -4218,251 +5423,298 @@
                 <a:tableStyleId>{5C22544A-7EE6-4342-B048-85BDC9FD1C3A}</a:tableStyleId>
               </a:tblPr>
               <a:tblGrid>
-                <a:gridCol w="5669280"/>
-                <a:gridCol w="2926080"/>
-                <a:gridCol w="2286000"/>
+                <a:gridCol w="2194560"/>
+                <a:gridCol w="2377440"/>
+                <a:gridCol w="6309360"/>
               </a:tblGrid>
-              <a:tr h="356615">
-                <a:tc>
-                  <a:txBody>
-                    <a:bodyPr/>
-                    <a:lstStyle/>
-                    <a:p>
-                      <a:pPr>
-                        <a:defRPr sz="1500" b="1">
+              <a:tr h="344424">
+                <a:tc>
+                  <a:txBody>
+                    <a:bodyPr/>
+                    <a:lstStyle/>
+                    <a:p>
+                      <a:pPr>
+                        <a:defRPr sz="1300" b="1">
                           <a:solidFill>
                             <a:srgbClr val="FFFFFF"/>
                           </a:solidFill>
                         </a:defRPr>
                       </a:pPr>
                       <a:r>
-                        <a:t>configuration</a:t>
-                      </a:r>
-                    </a:p>
-                  </a:txBody>
-                  <a:tcPr/>
-                </a:tc>
-                <a:tc>
-                  <a:txBody>
-                    <a:bodyPr/>
-                    <a:lstStyle/>
-                    <a:p>
-                      <a:pPr>
-                        <a:defRPr sz="1500" b="1">
+                        <a:t>step</a:t>
+                      </a:r>
+                    </a:p>
+                  </a:txBody>
+                  <a:tcPr/>
+                </a:tc>
+                <a:tc>
+                  <a:txBody>
+                    <a:bodyPr/>
+                    <a:lstStyle/>
+                    <a:p>
+                      <a:pPr>
+                        <a:defRPr sz="1300" b="1">
                           <a:solidFill>
                             <a:srgbClr val="FFFFFF"/>
                           </a:solidFill>
                         </a:defRPr>
                       </a:pPr>
                       <a:r>
-                        <a:t>adjacent-pair R²</a:t>
-                      </a:r>
-                    </a:p>
-                  </a:txBody>
-                  <a:tcPr/>
-                </a:tc>
-                <a:tc>
-                  <a:txBody>
-                    <a:bodyPr/>
-                    <a:lstStyle/>
-                    <a:p>
-                      <a:pPr>
-                        <a:defRPr sz="1500" b="1">
+                        <a:t>tool</a:t>
+                      </a:r>
+                    </a:p>
+                  </a:txBody>
+                  <a:tcPr/>
+                </a:tc>
+                <a:tc>
+                  <a:txBody>
+                    <a:bodyPr/>
+                    <a:lstStyle/>
+                    <a:p>
+                      <a:pPr>
+                        <a:defRPr sz="1300" b="1">
                           <a:solidFill>
                             <a:srgbClr val="FFFFFF"/>
                           </a:solidFill>
                         </a:defRPr>
                       </a:pPr>
                       <a:r>
-                        <a:t>3D marginal</a:t>
+                        <a:t>output</a:t>
                       </a:r>
                     </a:p>
                   </a:txBody>
                   <a:tcPr/>
                 </a:tc>
               </a:tr>
-              <a:tr h="356615">
-                <a:tc>
-                  <a:txBody>
-                    <a:bodyPr/>
-                    <a:lstStyle/>
-                    <a:p>
-                      <a:pPr>
-                        <a:defRPr sz="1500"/>
-                      </a:pPr>
-                      <a:r>
-                        <a:t>best 2D single model</a:t>
-                      </a:r>
-                    </a:p>
-                  </a:txBody>
-                  <a:tcPr/>
-                </a:tc>
-                <a:tc>
-                  <a:txBody>
-                    <a:bodyPr/>
-                    <a:lstStyle/>
-                    <a:p>
-                      <a:pPr algn="r">
-                        <a:defRPr sz="1500"/>
-                      </a:pPr>
-                      <a:r>
-                        <a:t>+0.278</a:t>
-                      </a:r>
-                    </a:p>
-                  </a:txBody>
-                  <a:tcPr/>
-                </a:tc>
-                <a:tc>
-                  <a:txBody>
-                    <a:bodyPr/>
-                    <a:lstStyle/>
-                    <a:p>
-                      <a:pPr>
-                        <a:defRPr sz="1500"/>
-                      </a:pPr>
-                      <a:r>
-                        <a:t>—</a:t>
+              <a:tr h="344424">
+                <a:tc>
+                  <a:txBody>
+                    <a:bodyPr/>
+                    <a:lstStyle/>
+                    <a:p>
+                      <a:pPr>
+                        <a:defRPr sz="1300"/>
+                      </a:pPr>
+                      <a:r>
+                        <a:t>1. complex assembly</a:t>
+                      </a:r>
+                    </a:p>
+                  </a:txBody>
+                  <a:tcPr/>
+                </a:tc>
+                <a:tc>
+                  <a:txBody>
+                    <a:bodyPr/>
+                    <a:lstStyle/>
+                    <a:p>
+                      <a:pPr>
+                        <a:defRPr sz="1300"/>
+                      </a:pPr>
+                      <a:r>
+                        <a:t>Architector</a:t>
+                      </a:r>
+                    </a:p>
+                  </a:txBody>
+                  <a:tcPr/>
+                </a:tc>
+                <a:tc>
+                  <a:txBody>
+                    <a:bodyPr/>
+                    <a:lstStyle/>
+                    <a:p>
+                      <a:pPr>
+                        <a:defRPr sz="1300"/>
+                      </a:pPr>
+                      <a:r>
+                        <a:t>3D guess for each (extractant, Ln, anion/water fill) at chemically sensible coordination numbers (CN 8–9)</a:t>
                       </a:r>
                     </a:p>
                   </a:txBody>
                   <a:tcPr/>
                 </a:tc>
               </a:tr>
-              <a:tr h="356615">
-                <a:tc>
-                  <a:txBody>
-                    <a:bodyPr/>
-                    <a:lstStyle/>
-                    <a:p>
-                      <a:pPr>
-                        <a:defRPr sz="1500"/>
-                      </a:pPr>
-                      <a:r>
-                        <a:t>2D stack (boosting + fingerprint net)</a:t>
-                      </a:r>
-                    </a:p>
-                  </a:txBody>
-                  <a:tcPr/>
-                </a:tc>
-                <a:tc>
-                  <a:txBody>
-                    <a:bodyPr/>
-                    <a:lstStyle/>
-                    <a:p>
-                      <a:pPr algn="r">
-                        <a:defRPr sz="1500"/>
-                      </a:pPr>
-                      <a:r>
-                        <a:t>+0.291</a:t>
-                      </a:r>
-                    </a:p>
-                  </a:txBody>
-                  <a:tcPr/>
-                </a:tc>
-                <a:tc>
-                  <a:txBody>
-                    <a:bodyPr/>
-                    <a:lstStyle/>
-                    <a:p>
-                      <a:pPr>
-                        <a:defRPr sz="1500"/>
-                      </a:pPr>
-                      <a:r>
-                        <a:t>—</a:t>
+              <a:tr h="344424">
+                <a:tc>
+                  <a:txBody>
+                    <a:bodyPr/>
+                    <a:lstStyle/>
+                    <a:p>
+                      <a:pPr>
+                        <a:defRPr sz="1300"/>
+                      </a:pPr>
+                      <a:r>
+                        <a:t>2. relaxation</a:t>
+                      </a:r>
+                    </a:p>
+                  </a:txBody>
+                  <a:tcPr/>
+                </a:tc>
+                <a:tc>
+                  <a:txBody>
+                    <a:bodyPr/>
+                    <a:lstStyle/>
+                    <a:p>
+                      <a:pPr>
+                        <a:defRPr sz="1300"/>
+                      </a:pPr>
+                      <a:r>
+                        <a:t>GFN2-xTB (ALPB water)</a:t>
+                      </a:r>
+                    </a:p>
+                  </a:txBody>
+                  <a:tcPr/>
+                </a:tc>
+                <a:tc>
+                  <a:txBody>
+                    <a:bodyPr/>
+                    <a:lstStyle/>
+                    <a:p>
+                      <a:pPr>
+                        <a:defRPr sz="1300"/>
+                      </a:pPr>
+                      <a:r>
+                        <a:t>956 unique optimised complexes; convergence force-checked independently</a:t>
                       </a:r>
                     </a:p>
                   </a:txBody>
                   <a:tcPr/>
                 </a:tc>
               </a:tr>
-              <a:tr h="356615">
-                <a:tc>
-                  <a:txBody>
-                    <a:bodyPr/>
-                    <a:lstStyle/>
-                    <a:p>
-                      <a:pPr>
-                        <a:defRPr sz="1500"/>
-                      </a:pPr>
-                      <a:r>
-                        <a:t>2D stack + 3D encoder</a:t>
-                      </a:r>
-                    </a:p>
-                  </a:txBody>
-                  <a:tcPr/>
-                </a:tc>
-                <a:tc>
-                  <a:txBody>
-                    <a:bodyPr/>
-                    <a:lstStyle/>
-                    <a:p>
-                      <a:pPr algn="r">
-                        <a:defRPr sz="1500"/>
-                      </a:pPr>
-                      <a:r>
-                        <a:t>+0.313</a:t>
-                      </a:r>
-                    </a:p>
-                  </a:txBody>
-                  <a:tcPr/>
-                </a:tc>
-                <a:tc>
-                  <a:txBody>
-                    <a:bodyPr/>
-                    <a:lstStyle/>
-                    <a:p>
-                      <a:pPr algn="r">
-                        <a:defRPr sz="1500"/>
-                      </a:pPr>
-                      <a:r>
-                        <a:t>+0.023</a:t>
+              <a:tr h="344424">
+                <a:tc>
+                  <a:txBody>
+                    <a:bodyPr/>
+                    <a:lstStyle/>
+                    <a:p>
+                      <a:pPr>
+                        <a:defRPr sz="1300"/>
+                      </a:pPr>
+                      <a:r>
+                        <a:t>3. atom features</a:t>
+                      </a:r>
+                    </a:p>
+                  </a:txBody>
+                  <a:tcPr/>
+                </a:tc>
+                <a:tc>
+                  <a:txBody>
+                    <a:bodyPr/>
+                    <a:lstStyle/>
+                    <a:p>
+                      <a:pPr>
+                        <a:defRPr sz="1300"/>
+                      </a:pPr>
+                      <a:r>
+                        <a:t>xTB Mulliken charges</a:t>
+                      </a:r>
+                    </a:p>
+                  </a:txBody>
+                  <a:tcPr/>
+                </a:tc>
+                <a:tc>
+                  <a:txBody>
+                    <a:bodyPr/>
+                    <a:lstStyle/>
+                    <a:p>
+                      <a:pPr>
+                        <a:defRPr sz="1300"/>
+                      </a:pPr>
+                      <a:r>
+                        <a:t>per-atom partial charges; metal &amp; donor-atom flags; distances to metal</a:t>
                       </a:r>
                     </a:p>
                   </a:txBody>
                   <a:tcPr/>
                 </a:tc>
               </a:tr>
-              <a:tr h="356619">
-                <a:tc>
-                  <a:txBody>
-                    <a:bodyPr/>
-                    <a:lstStyle/>
-                    <a:p>
-                      <a:pPr>
-                        <a:defRPr sz="1500"/>
-                      </a:pPr>
-                      <a:r>
-                        <a:t>  same, under the strict condition key</a:t>
-                      </a:r>
-                    </a:p>
-                  </a:txBody>
-                  <a:tcPr/>
-                </a:tc>
-                <a:tc>
-                  <a:txBody>
-                    <a:bodyPr/>
-                    <a:lstStyle/>
-                    <a:p>
-                      <a:pPr algn="r">
-                        <a:defRPr sz="1500"/>
-                      </a:pPr>
-                      <a:r>
-                        <a:t>+0.210 vs +0.200</a:t>
-                      </a:r>
-                    </a:p>
-                  </a:txBody>
-                  <a:tcPr/>
-                </a:tc>
-                <a:tc>
-                  <a:txBody>
-                    <a:bodyPr/>
-                    <a:lstStyle/>
-                    <a:p>
-                      <a:pPr algn="r">
-                        <a:defRPr sz="1500"/>
-                      </a:pPr>
-                      <a:r>
-                        <a:t>+0.010</a:t>
+              <a:tr h="344424">
+                <a:tc>
+                  <a:txBody>
+                    <a:bodyPr/>
+                    <a:lstStyle/>
+                    <a:p>
+                      <a:pPr>
+                        <a:defRPr sz="1300"/>
+                      </a:pPr>
+                      <a:r>
+                        <a:t>4. topological object</a:t>
+                      </a:r>
+                    </a:p>
+                  </a:txBody>
+                  <a:tcPr/>
+                </a:tc>
+                <a:tc>
+                  <a:txBody>
+                    <a:bodyPr/>
+                    <a:lstStyle/>
+                    <a:p>
+                      <a:pPr>
+                        <a:defRPr sz="1300"/>
+                      </a:pPr>
+                      <a:r>
+                        <a:t>Vietoris–Rips at 3.5 Å</a:t>
+                      </a:r>
+                    </a:p>
+                  </a:txBody>
+                  <a:tcPr/>
+                </a:tc>
+                <a:tc>
+                  <a:txBody>
+                    <a:bodyPr/>
+                    <a:lstStyle/>
+                    <a:p>
+                      <a:pPr>
+                        <a:defRPr sz="1300"/>
+                      </a:pPr>
+                      <a:r>
+                        <a:t>nodes + edges + 2-simplices (triangles) per complex — the 3D encoder's input; no raw coordinates enter the network</a:t>
+                      </a:r>
+                    </a:p>
+                  </a:txBody>
+                  <a:tcPr/>
+                </a:tc>
+              </a:tr>
+              <a:tr h="344424">
+                <a:tc>
+                  <a:txBody>
+                    <a:bodyPr/>
+                    <a:lstStyle/>
+                    <a:p>
+                      <a:pPr>
+                        <a:defRPr sz="1300"/>
+                      </a:pPr>
+                      <a:r>
+                        <a:t>5. tabular features</a:t>
+                      </a:r>
+                    </a:p>
+                  </a:txBody>
+                  <a:tcPr/>
+                </a:tc>
+                <a:tc>
+                  <a:txBody>
+                    <a:bodyPr/>
+                    <a:lstStyle/>
+                    <a:p>
+                      <a:pPr>
+                        <a:defRPr sz="1300"/>
+                      </a:pPr>
+                      <a:r>
+                        <a:t>RDKit · ECFP · conditions</a:t>
+                      </a:r>
+                    </a:p>
+                  </a:txBody>
+                  <a:tcPr/>
+                </a:tc>
+                <a:tc>
+                  <a:txBody>
+                    <a:bodyPr/>
+                    <a:lstStyle/>
+                    <a:p>
+                      <a:pPr>
+                        <a:defRPr sz="1300"/>
+                      </a:pPr>
+                      <a:r>
+                        <a:t>746 columns: 2D descriptors, fingerprints, metal constants, 64 condition columns</a:t>
                       </a:r>
                     </a:p>
                   </a:txBody>
@@ -4481,8 +5733,8 @@
         </p:nvSpPr>
         <p:spPr>
           <a:xfrm>
-            <a:off x="548640" y="3566160"/>
-            <a:ext cx="11064240" cy="3017520"/>
+            <a:off x="548640" y="4572000"/>
+            <a:ext cx="11064240" cy="2057400"/>
           </a:xfrm>
           <a:prstGeom prst="rect">
             <a:avLst/>
@@ -4497,46 +5749,16 @@
           <a:p>
             <a:pPr>
               <a:spcAft>
-                <a:spcPts val="700"/>
+                <a:spcPts val="600"/>
               </a:spcAft>
-              <a:defRPr sz="1700" b="0">
-                <a:solidFill>
-                  <a:srgbClr val="22262A"/>
-                </a:solidFill>
-              </a:defRPr>
-            </a:pPr>
-            <a:r>
-              <a:t>The 3D contribution SHRANK as the 2D partners improved: +0.038 published → +0.023 now. This is the complementarity mechanism working in reverse — a stronger partner leaves less to correct.</a:t>
-            </a:r>
-          </a:p>
-          <a:p>
-            <a:pPr>
-              <a:spcAft>
-                <a:spcPts val="700"/>
-              </a:spcAft>
-              <a:defRPr sz="1700" b="0">
-                <a:solidFill>
-                  <a:srgbClr val="22262A"/>
-                </a:solidFill>
-              </a:defRPr>
-            </a:pPr>
-            <a:r>
-              <a:t>Under the strict key (only the lanthanide varies within a block) the contribution halves and was already statistically indistinguishable in the published analysis. This is the honest boundary of the claim.</a:t>
-            </a:r>
-          </a:p>
-          <a:p>
-            <a:pPr>
-              <a:spcAft>
-                <a:spcPts val="700"/>
-              </a:spcAft>
-              <a:defRPr sz="1700" b="1">
-                <a:solidFill>
-                  <a:srgbClr val="A8322D"/>
-                </a:solidFill>
-              </a:defRPr>
-            </a:pPr>
-            <a:r>
-              <a:t>Status: exploratory. Both improved components were tuned on data inside this population; every clean held-out partition has now been spent. A fresh split is needed for a confirmatory number.</a:t>
+              <a:defRPr sz="1600" b="1">
+                <a:solidFill>
+                  <a:srgbClr val="1A2E4A"/>
+                </a:solidFill>
+              </a:defRPr>
+            </a:pPr>
+            <a:r>
+              <a:t>Every result is leave-extractants-out CV (5 folds × 3 repeats): no ligand appears in both train and test. Ensembles of 16–32 seeds, scored out-of-fold.</a:t>
             </a:r>
           </a:p>
         </p:txBody>
@@ -4567,8 +5789,8 @@
         </p:nvSpPr>
         <p:spPr>
           <a:xfrm>
-            <a:off x="502920" y="320040"/>
-            <a:ext cx="11155680" cy="822960"/>
+            <a:off x="502920" y="274320"/>
+            <a:ext cx="11247120" cy="868680"/>
           </a:xfrm>
           <a:prstGeom prst="rect">
             <a:avLst/>
@@ -4582,113 +5804,66 @@
           <a:lstStyle/>
           <a:p>
             <a:pPr>
-              <a:defRPr sz="3000" b="1">
+              <a:defRPr sz="2800" b="1">
                 <a:solidFill>
                   <a:srgbClr val="1A2E4A"/>
                 </a:solidFill>
               </a:defRPr>
             </a:pPr>
             <a:r>
-              <a:t>Why 3D contributes so little — it is the Hamiltonian, not the encoder</a:t>
-            </a:r>
-          </a:p>
-          <a:p>
-            <a:pPr>
-              <a:defRPr sz="1500">
-                <a:solidFill>
-                  <a:srgbClr val="555A60"/>
-                </a:solidFill>
-              </a:defRPr>
-            </a:pPr>
-            <a:r>
-              <a:t>GFN2-xTB's own parameter file, confirmed by its authors' documentation</a:t>
-            </a:r>
-          </a:p>
-        </p:txBody>
-      </p:sp>
-      <p:sp>
-        <p:nvSpPr>
-          <p:cNvPr id="3" name="TextBox 2"/>
-          <p:cNvSpPr txBox="1"/>
+              <a:t>The data at a glance</a:t>
+            </a:r>
+          </a:p>
+        </p:txBody>
+      </p:sp>
+      <p:pic>
+        <p:nvPicPr>
+          <p:cNvPr id="3" name="Picture 2" descr="f1_composition.png"/>
+          <p:cNvPicPr>
+            <a:picLocks noChangeAspect="1"/>
+          </p:cNvPicPr>
           <p:nvPr/>
-        </p:nvSpPr>
+        </p:nvPicPr>
+        <p:blipFill>
+          <a:blip r:embed="rId2"/>
+          <a:stretch>
+            <a:fillRect/>
+          </a:stretch>
+        </p:blipFill>
         <p:spPr>
           <a:xfrm>
-            <a:off x="548640" y="1371600"/>
-            <a:ext cx="11064240" cy="5212080"/>
+            <a:off x="2163927" y="1234440"/>
+            <a:ext cx="7863840" cy="3518033"/>
           </a:xfrm>
           <a:prstGeom prst="rect">
             <a:avLst/>
           </a:prstGeom>
-          <a:noFill/>
         </p:spPr>
-        <p:txBody>
-          <a:bodyPr wrap="square">
-            <a:spAutoFit/>
-          </a:bodyPr>
-          <a:lstStyle/>
-          <a:p>
-            <a:pPr>
-              <a:spcAft>
-                <a:spcPts val="700"/>
-              </a:spcAft>
-              <a:defRPr sz="1700" b="1">
-                <a:solidFill>
-                  <a:srgbClr val="1A2E4A"/>
-                </a:solidFill>
-              </a:defRPr>
-            </a:pPr>
-            <a:r>
-              <a:t>Every GFN2-xTB lanthanide parameter from Ce(58) to Lu(71) is LINEAR INTERPOLATION between two fitted anchors (max residual 5×10⁻⁷ — the file's printed precision).</a:t>
-            </a:r>
-          </a:p>
-          <a:p>
-            <a:pPr>
-              <a:spcAft>
-                <a:spcPts val="700"/>
-              </a:spcAft>
-              <a:defRPr sz="1700" b="0">
-                <a:solidFill>
-                  <a:srgbClr val="22262A"/>
-                </a:solidFill>
-              </a:defRPr>
-            </a:pPr>
-            <a:r>
-              <a:t>Metal identity therefore enters every geometry as ONE scalar, linear in Z. No f-shell, no crystal field, no gadolinium break, no tetrad effect — by construction.</a:t>
-            </a:r>
-          </a:p>
-          <a:p>
-            <a:pPr>
-              <a:spcAft>
-                <a:spcPts val="700"/>
-              </a:spcAft>
-              <a:defRPr sz="1700" b="0">
-                <a:solidFill>
-                  <a:srgbClr val="22262A"/>
-                </a:solidFill>
-              </a:defRPr>
-            </a:pPr>
-            <a:r>
-              <a:t>This retrodicts our strangest observation: eight different 3D encoders were mutually interchangeable (effective rank 1.05 of 8; two architectures correlate at 0.986, same as two seeds of one architecture).</a:t>
-            </a:r>
-          </a:p>
-          <a:p>
-            <a:pPr>
-              <a:spcAft>
-                <a:spcPts val="700"/>
-              </a:spcAft>
-              <a:defRPr sz="1700" b="1">
-                <a:solidFill>
-                  <a:srgbClr val="0E7A5F"/>
-                </a:solidFill>
-              </a:defRPr>
-            </a:pPr>
-            <a:r>
-              <a:t>Any encoder reading GFN2 geometries can extract at most one scalar of metal information — and the tabular ionic radius already supplies that scalar.</a:t>
-            </a:r>
-          </a:p>
-        </p:txBody>
-      </p:sp>
+      </p:pic>
+      <p:pic>
+        <p:nvPicPr>
+          <p:cNvPr id="4" name="Picture 3" descr="f2_targets.png"/>
+          <p:cNvPicPr>
+            <a:picLocks noChangeAspect="1"/>
+          </p:cNvPicPr>
+          <p:nvPr/>
+        </p:nvPicPr>
+        <p:blipFill>
+          <a:blip r:embed="rId3"/>
+          <a:stretch>
+            <a:fillRect/>
+          </a:stretch>
+        </p:blipFill>
+        <p:spPr>
+          <a:xfrm>
+            <a:off x="1340967" y="3977639"/>
+            <a:ext cx="9509760" cy="3268980"/>
+          </a:xfrm>
+          <a:prstGeom prst="rect">
+            <a:avLst/>
+          </a:prstGeom>
+        </p:spPr>
+      </p:pic>
     </p:spTree>
   </p:cSld>
   <p:clrMapOvr>
@@ -4715,8 +5890,8 @@
         </p:nvSpPr>
         <p:spPr>
           <a:xfrm>
-            <a:off x="502920" y="320040"/>
-            <a:ext cx="11155680" cy="822960"/>
+            <a:off x="502920" y="274320"/>
+            <a:ext cx="11247120" cy="868680"/>
           </a:xfrm>
           <a:prstGeom prst="rect">
             <a:avLst/>
@@ -4730,210 +5905,54 @@
           <a:lstStyle/>
           <a:p>
             <a:pPr>
-              <a:defRPr sz="3000" b="1">
+              <a:defRPr sz="2800" b="1">
                 <a:solidFill>
                   <a:srgbClr val="1A2E4A"/>
                 </a:solidFill>
               </a:defRPr>
             </a:pPr>
             <a:r>
-              <a:t>We quantified the damage against experiment</a:t>
+              <a:t>Feature-space structure: why this problem is hard</a:t>
             </a:r>
           </a:p>
           <a:p>
             <a:pPr>
-              <a:defRPr sz="1500">
+              <a:defRPr sz="1400">
                 <a:solidFill>
                   <a:srgbClr val="555A60"/>
                 </a:solidFill>
               </a:defRPr>
             </a:pPr>
             <a:r>
-              <a:t>71 ligands × 15 lanthanides × 2 Hamiltonians — 2,130 optimisations</a:t>
-            </a:r>
-          </a:p>
-        </p:txBody>
-      </p:sp>
-      <p:graphicFrame>
-        <p:nvGraphicFramePr>
-          <p:cNvPr id="3" name="Table 2"/>
-          <p:cNvGraphicFramePr>
-            <a:graphicFrameLocks noGrp="1"/>
-          </p:cNvGraphicFramePr>
+              <a:t>PCA of the standardised 746-column matrix</a:t>
+            </a:r>
+          </a:p>
+        </p:txBody>
+      </p:sp>
+      <p:pic>
+        <p:nvPicPr>
+          <p:cNvPr id="3" name="Picture 2" descr="f3_pca.png"/>
+          <p:cNvPicPr>
+            <a:picLocks noChangeAspect="1"/>
+          </p:cNvPicPr>
           <p:nvPr/>
-        </p:nvGraphicFramePr>
-        <p:xfrm>
-          <a:off x="640080" y="1463040"/>
-          <a:ext cx="10881360" cy="1124712"/>
-        </p:xfrm>
-        <a:graphic>
-          <a:graphicData uri="http://schemas.openxmlformats.org/drawingml/2006/table">
-            <a:tbl>
-              <a:tblPr firstRow="1" bandRow="1">
-                <a:tableStyleId>{5C22544A-7EE6-4342-B048-85BDC9FD1C3A}</a:tableStyleId>
-              </a:tblPr>
-              <a:tblGrid>
-                <a:gridCol w="2377440"/>
-                <a:gridCol w="4206240"/>
-                <a:gridCol w="4297680"/>
-              </a:tblGrid>
-              <a:tr h="374904">
-                <a:tc>
-                  <a:txBody>
-                    <a:bodyPr/>
-                    <a:lstStyle/>
-                    <a:p>
-                      <a:pPr>
-                        <a:defRPr sz="1500" b="1">
-                          <a:solidFill>
-                            <a:srgbClr val="FFFFFF"/>
-                          </a:solidFill>
-                        </a:defRPr>
-                      </a:pPr>
-                      <a:r>
-                        <a:t>method</a:t>
-                      </a:r>
-                    </a:p>
-                  </a:txBody>
-                  <a:tcPr/>
-                </a:tc>
-                <a:tc>
-                  <a:txBody>
-                    <a:bodyPr/>
-                    <a:lstStyle/>
-                    <a:p>
-                      <a:pPr>
-                        <a:defRPr sz="1500" b="1">
-                          <a:solidFill>
-                            <a:srgbClr val="FFFFFF"/>
-                          </a:solidFill>
-                        </a:defRPr>
-                      </a:pPr>
-                      <a:r>
-                        <a:t>contraction slope c_L (1.00 = Shannon 1976)</a:t>
-                      </a:r>
-                    </a:p>
-                  </a:txBody>
-                  <a:tcPr/>
-                </a:tc>
-                <a:tc>
-                  <a:txBody>
-                    <a:bodyPr/>
-                    <a:lstStyle/>
-                    <a:p>
-                      <a:pPr>
-                        <a:defRPr sz="1500" b="1">
-                          <a:solidFill>
-                            <a:srgbClr val="FFFFFF"/>
-                          </a:solidFill>
-                        </a:defRPr>
-                      </a:pPr>
-                      <a:r>
-                        <a:t>verdict</a:t>
-                      </a:r>
-                    </a:p>
-                  </a:txBody>
-                  <a:tcPr/>
-                </a:tc>
-              </a:tr>
-              <a:tr h="374904">
-                <a:tc>
-                  <a:txBody>
-                    <a:bodyPr/>
-                    <a:lstStyle/>
-                    <a:p>
-                      <a:pPr>
-                        <a:defRPr sz="1500"/>
-                      </a:pPr>
-                      <a:r>
-                        <a:t>GFN2-xTB</a:t>
-                      </a:r>
-                    </a:p>
-                  </a:txBody>
-                  <a:tcPr/>
-                </a:tc>
-                <a:tc>
-                  <a:txBody>
-                    <a:bodyPr/>
-                    <a:lstStyle/>
-                    <a:p>
-                      <a:pPr algn="r">
-                        <a:defRPr sz="1500"/>
-                      </a:pPr>
-                      <a:r>
-                        <a:t>0.405 ± 0.145</a:t>
-                      </a:r>
-                    </a:p>
-                  </a:txBody>
-                  <a:tcPr/>
-                </a:tc>
-                <a:tc>
-                  <a:txBody>
-                    <a:bodyPr/>
-                    <a:lstStyle/>
-                    <a:p>
-                      <a:pPr>
-                        <a:defRPr sz="1500"/>
-                      </a:pPr>
-                      <a:r>
-                        <a:t>under-predicts 2.47× ; per-ligand slope mostly noise</a:t>
-                      </a:r>
-                    </a:p>
-                  </a:txBody>
-                  <a:tcPr/>
-                </a:tc>
-              </a:tr>
-              <a:tr h="374904">
-                <a:tc>
-                  <a:txBody>
-                    <a:bodyPr/>
-                    <a:lstStyle/>
-                    <a:p>
-                      <a:pPr>
-                        <a:defRPr sz="1500"/>
-                      </a:pPr>
-                      <a:r>
-                        <a:t>g-xTB (2025)</a:t>
-                      </a:r>
-                    </a:p>
-                  </a:txBody>
-                  <a:tcPr/>
-                </a:tc>
-                <a:tc>
-                  <a:txBody>
-                    <a:bodyPr/>
-                    <a:lstStyle/>
-                    <a:p>
-                      <a:pPr>
-                        <a:defRPr sz="1500"/>
-                      </a:pPr>
-                      <a:r>
-                        <a:t>1.078 ± 0.094</a:t>
-                      </a:r>
-                    </a:p>
-                  </a:txBody>
-                  <a:tcPr/>
-                </a:tc>
-                <a:tc>
-                  <a:txBody>
-                    <a:bodyPr/>
-                    <a:lstStyle/>
-                    <a:p>
-                      <a:pPr>
-                        <a:defRPr sz="1500"/>
-                      </a:pPr>
-                      <a:r>
-                        <a:t>within 8% of experiment</a:t>
-                      </a:r>
-                    </a:p>
-                  </a:txBody>
-                  <a:tcPr/>
-                </a:tc>
-              </a:tr>
-            </a:tbl>
-          </a:graphicData>
-        </a:graphic>
-      </p:graphicFrame>
+        </p:nvPicPr>
+        <p:blipFill>
+          <a:blip r:embed="rId2"/>
+          <a:stretch>
+            <a:fillRect/>
+          </a:stretch>
+        </p:blipFill>
+        <p:spPr>
+          <a:xfrm>
+            <a:off x="792327" y="1371600"/>
+            <a:ext cx="10607040" cy="4275381"/>
+          </a:xfrm>
+          <a:prstGeom prst="rect">
+            <a:avLst/>
+          </a:prstGeom>
+        </p:spPr>
+      </p:pic>
       <p:sp>
         <p:nvSpPr>
           <p:cNvPr id="4" name="TextBox 3"/>
@@ -4942,8 +5961,8 @@
         </p:nvSpPr>
         <p:spPr>
           <a:xfrm>
-            <a:off x="548640" y="3017520"/>
-            <a:ext cx="11064240" cy="3566160"/>
+            <a:off x="548640" y="5806440"/>
+            <a:ext cx="11064240" cy="822960"/>
           </a:xfrm>
           <a:prstGeom prst="rect">
             <a:avLst/>
@@ -4958,61 +5977,16 @@
           <a:p>
             <a:pPr>
               <a:spcAft>
-                <a:spcPts val="700"/>
+                <a:spcPts val="600"/>
               </a:spcAft>
-              <a:defRPr sz="1700" b="0">
-                <a:solidFill>
-                  <a:srgbClr val="22262A"/>
-                </a:solidFill>
-              </a:defRPr>
-            </a:pPr>
-            <a:r>
-              <a:t>g-xTB improves the contraction on 71 of 71 ligands (paired p = 5×10⁻⁵², Wilcoxon p = 2×10⁻¹³). Reproduced in implicit solvent and on an independent pilot set.</a:t>
-            </a:r>
-          </a:p>
-          <a:p>
-            <a:pPr>
-              <a:spcAft>
-                <a:spcPts val="700"/>
-              </a:spcAft>
-              <a:defRPr sz="1700" b="0">
-                <a:solidFill>
-                  <a:srgbClr val="22262A"/>
-                </a:solidFill>
-              </a:defRPr>
-            </a:pPr>
-            <a:r>
-              <a:t>Electronically: g-xTB shows a +1.15 eV half-shell (gadolinium) break and 370× more f-shell structure than GFN2, reproducible across runs at r = +0.97.</a:t>
-            </a:r>
-          </a:p>
-          <a:p>
-            <a:pPr>
-              <a:spcAft>
-                <a:spcPts val="700"/>
-              </a:spcAft>
-              <a:defRPr sz="1700" b="1">
-                <a:solidFill>
-                  <a:srgbClr val="0E7A5F"/>
-                </a:solidFill>
-              </a:defRPr>
-            </a:pPr>
-            <a:r>
-              <a:t>This is, to our knowledge, a new benchmark result: the geometries used across this field barely encode the lanthanide contraction at all.</a:t>
-            </a:r>
-          </a:p>
-          <a:p>
-            <a:pPr>
-              <a:spcAft>
-                <a:spcPts val="700"/>
-              </a:spcAft>
-              <a:defRPr sz="1700" b="1">
+              <a:defRPr sz="1400" b="1">
                 <a:solidFill>
                   <a:srgbClr val="1A2E4A"/>
                 </a:solidFill>
               </a:defRPr>
             </a:pPr>
             <a:r>
-              <a:t>Publishable independently of any machine-learning outcome.</a:t>
+              <a:t>Left: lanthanide identity is invisible in feature space. Right: extractant families dominate. The model must generalise ACROSS the clusters while resolving a signal orthogonal to them.</a:t>
             </a:r>
           </a:p>
         </p:txBody>
@@ -5043,8 +6017,8 @@
         </p:nvSpPr>
         <p:spPr>
           <a:xfrm>
-            <a:off x="502920" y="320040"/>
-            <a:ext cx="11155680" cy="822960"/>
+            <a:off x="502920" y="274320"/>
+            <a:ext cx="11247120" cy="868680"/>
           </a:xfrm>
           <a:prstGeom prst="rect">
             <a:avLst/>
@@ -5058,26 +6032,14 @@
           <a:lstStyle/>
           <a:p>
             <a:pPr>
-              <a:defRPr sz="3000" b="1">
+              <a:defRPr sz="2800" b="1">
                 <a:solidFill>
                   <a:srgbClr val="1A2E4A"/>
                 </a:solidFill>
               </a:defRPr>
             </a:pPr>
             <a:r>
-              <a:t>The decisive negative: fixing the chemistry does not fix the score</a:t>
-            </a:r>
-          </a:p>
-          <a:p>
-            <a:pPr>
-              <a:defRPr sz="1500">
-                <a:solidFill>
-                  <a:srgbClr val="555A60"/>
-                </a:solidFill>
-              </a:defRPr>
-            </a:pPr>
-            <a:r>
-              <a:t>We re-optimised all 956 complexes with g-xTB and re-trained — matched pairs, identical rows</a:t>
+              <a:t>Three model families, one combination</a:t>
             </a:r>
           </a:p>
         </p:txBody>
@@ -5092,7 +6054,7 @@
         </p:nvGraphicFramePr>
         <p:xfrm>
           <a:off x="640080" y="1463040"/>
-          <a:ext cx="10881360" cy="1783079"/>
+          <a:ext cx="10881360" cy="1737360"/>
         </p:xfrm>
         <a:graphic>
           <a:graphicData uri="http://schemas.openxmlformats.org/drawingml/2006/table">
@@ -5101,331 +6063,251 @@
                 <a:tableStyleId>{5C22544A-7EE6-4342-B048-85BDC9FD1C3A}</a:tableStyleId>
               </a:tblPr>
               <a:tblGrid>
-                <a:gridCol w="5852160"/>
-                <a:gridCol w="1737360"/>
-                <a:gridCol w="1737360"/>
-                <a:gridCol w="1554480"/>
+                <a:gridCol w="3017520"/>
+                <a:gridCol w="2651760"/>
+                <a:gridCol w="5212080"/>
               </a:tblGrid>
-              <a:tr h="356615">
-                <a:tc>
-                  <a:txBody>
-                    <a:bodyPr/>
-                    <a:lstStyle/>
-                    <a:p>
-                      <a:pPr>
-                        <a:defRPr sz="1500" b="1">
+              <a:tr h="347472">
+                <a:tc>
+                  <a:txBody>
+                    <a:bodyPr/>
+                    <a:lstStyle/>
+                    <a:p>
+                      <a:pPr>
+                        <a:defRPr sz="1350" b="1">
                           <a:solidFill>
                             <a:srgbClr val="FFFFFF"/>
                           </a:solidFill>
                         </a:defRPr>
                       </a:pPr>
                       <a:r>
-                        <a:t>experiment</a:t>
-                      </a:r>
-                    </a:p>
-                  </a:txBody>
-                  <a:tcPr/>
-                </a:tc>
-                <a:tc>
-                  <a:txBody>
-                    <a:bodyPr/>
-                    <a:lstStyle/>
-                    <a:p>
-                      <a:pPr>
-                        <a:defRPr sz="1500" b="1">
+                        <a:t>arm</a:t>
+                      </a:r>
+                    </a:p>
+                  </a:txBody>
+                  <a:tcPr/>
+                </a:tc>
+                <a:tc>
+                  <a:txBody>
+                    <a:bodyPr/>
+                    <a:lstStyle/>
+                    <a:p>
+                      <a:pPr>
+                        <a:defRPr sz="1350" b="1">
                           <a:solidFill>
                             <a:srgbClr val="FFFFFF"/>
                           </a:solidFill>
                         </a:defRPr>
                       </a:pPr>
                       <a:r>
-                        <a:t>Δ adjacent R²</a:t>
-                      </a:r>
-                    </a:p>
-                  </a:txBody>
-                  <a:tcPr/>
-                </a:tc>
-                <a:tc>
-                  <a:txBody>
-                    <a:bodyPr/>
-                    <a:lstStyle/>
-                    <a:p>
-                      <a:pPr>
-                        <a:defRPr sz="1500" b="1">
+                        <a:t>input</a:t>
+                      </a:r>
+                    </a:p>
+                  </a:txBody>
+                  <a:tcPr/>
+                </a:tc>
+                <a:tc>
+                  <a:txBody>
+                    <a:bodyPr/>
+                    <a:lstStyle/>
+                    <a:p>
+                      <a:pPr>
+                        <a:defRPr sz="1350" b="1">
                           <a:solidFill>
                             <a:srgbClr val="FFFFFF"/>
                           </a:solidFill>
                         </a:defRPr>
                       </a:pPr>
                       <a:r>
-                        <a:t>seeds</a:t>
-                      </a:r>
-                    </a:p>
-                  </a:txBody>
-                  <a:tcPr/>
-                </a:tc>
-                <a:tc>
-                  <a:txBody>
-                    <a:bodyPr/>
-                    <a:lstStyle/>
-                    <a:p>
-                      <a:pPr>
-                        <a:defRPr sz="1500" b="1">
-                          <a:solidFill>
-                            <a:srgbClr val="FFFFFF"/>
-                          </a:solidFill>
-                        </a:defRPr>
-                      </a:pPr>
-                      <a:r>
-                        <a:t>verdict</a:t>
+                        <a:t>notes</a:t>
                       </a:r>
                     </a:p>
                   </a:txBody>
                   <a:tcPr/>
                 </a:tc>
               </a:tr>
-              <a:tr h="356615">
-                <a:tc>
-                  <a:txBody>
-                    <a:bodyPr/>
-                    <a:lstStyle/>
-                    <a:p>
-                      <a:pPr>
-                        <a:defRPr sz="1500"/>
-                      </a:pPr>
-                      <a:r>
-                        <a:t>g-xTB geometries (correct contraction) vs shipped</a:t>
-                      </a:r>
-                    </a:p>
-                  </a:txBody>
-                  <a:tcPr/>
-                </a:tc>
-                <a:tc>
-                  <a:txBody>
-                    <a:bodyPr/>
-                    <a:lstStyle/>
-                    <a:p>
-                      <a:pPr algn="r">
-                        <a:defRPr sz="1500"/>
-                      </a:pPr>
-                      <a:r>
-                        <a:t>+0.004</a:t>
-                      </a:r>
-                    </a:p>
-                  </a:txBody>
-                  <a:tcPr/>
-                </a:tc>
-                <a:tc>
-                  <a:txBody>
-                    <a:bodyPr/>
-                    <a:lstStyle/>
-                    <a:p>
-                      <a:pPr>
-                        <a:defRPr sz="1500"/>
-                      </a:pPr>
-                      <a:r>
-                        <a:t>3/8 up, p = 0.68</a:t>
-                      </a:r>
-                    </a:p>
-                  </a:txBody>
-                  <a:tcPr/>
-                </a:tc>
-                <a:tc>
-                  <a:txBody>
-                    <a:bodyPr/>
-                    <a:lstStyle/>
-                    <a:p>
-                      <a:pPr>
-                        <a:defRPr sz="1500"/>
-                      </a:pPr>
-                      <a:r>
-                        <a:t>null</a:t>
+              <a:tr h="347472">
+                <a:tc>
+                  <a:txBody>
+                    <a:bodyPr/>
+                    <a:lstStyle/>
+                    <a:p>
+                      <a:pPr>
+                        <a:defRPr sz="1350"/>
+                      </a:pPr>
+                      <a:r>
+                        <a:t>gradient boosting (CatBoost)</a:t>
+                      </a:r>
+                    </a:p>
+                  </a:txBody>
+                  <a:tcPr/>
+                </a:tc>
+                <a:tc>
+                  <a:txBody>
+                    <a:bodyPr/>
+                    <a:lstStyle/>
+                    <a:p>
+                      <a:pPr>
+                        <a:defRPr sz="1350"/>
+                      </a:pPr>
+                      <a:r>
+                        <a:t>746 tabular columns</a:t>
+                      </a:r>
+                    </a:p>
+                  </a:txBody>
+                  <a:tcPr/>
+                </a:tc>
+                <a:tc>
+                  <a:txBody>
+                    <a:bodyPr/>
+                    <a:lstStyle/>
+                    <a:p>
+                      <a:pPr>
+                        <a:defRPr sz="1350"/>
+                      </a:pPr>
+                      <a:r>
+                        <a:t>strongest on absolute log D; loss function turned out to be decisive</a:t>
                       </a:r>
                     </a:p>
                   </a:txBody>
                   <a:tcPr/>
                 </a:tc>
               </a:tr>
-              <a:tr h="356615">
-                <a:tc>
-                  <a:txBody>
-                    <a:bodyPr/>
-                    <a:lstStyle/>
-                    <a:p>
-                      <a:pPr>
-                        <a:defRPr sz="1500"/>
-                      </a:pPr>
-                      <a:r>
-                        <a:t>structures rebuilt in correspondence (455× less conformer noise)</a:t>
-                      </a:r>
-                    </a:p>
-                  </a:txBody>
-                  <a:tcPr/>
-                </a:tc>
-                <a:tc>
-                  <a:txBody>
-                    <a:bodyPr/>
-                    <a:lstStyle/>
-                    <a:p>
-                      <a:pPr algn="r">
-                        <a:defRPr sz="1500"/>
-                      </a:pPr>
-                      <a:r>
-                        <a:t>−0.013</a:t>
-                      </a:r>
-                    </a:p>
-                  </a:txBody>
-                  <a:tcPr/>
-                </a:tc>
-                <a:tc>
-                  <a:txBody>
-                    <a:bodyPr/>
-                    <a:lstStyle/>
-                    <a:p>
-                      <a:pPr>
-                        <a:defRPr sz="1500"/>
-                      </a:pPr>
-                      <a:r>
-                        <a:t>2/8 up</a:t>
-                      </a:r>
-                    </a:p>
-                  </a:txBody>
-                  <a:tcPr/>
-                </a:tc>
-                <a:tc>
-                  <a:txBody>
-                    <a:bodyPr/>
-                    <a:lstStyle/>
-                    <a:p>
-                      <a:pPr>
-                        <a:defRPr sz="1500"/>
-                      </a:pPr>
-                      <a:r>
-                        <a:t>negative</a:t>
+              <a:tr h="347472">
+                <a:tc>
+                  <a:txBody>
+                    <a:bodyPr/>
+                    <a:lstStyle/>
+                    <a:p>
+                      <a:pPr>
+                        <a:defRPr sz="1350"/>
+                      </a:pPr>
+                      <a:r>
+                        <a:t>fingerprint network</a:t>
+                      </a:r>
+                    </a:p>
+                  </a:txBody>
+                  <a:tcPr/>
+                </a:tc>
+                <a:tc>
+                  <a:txBody>
+                    <a:bodyPr/>
+                    <a:lstStyle/>
+                    <a:p>
+                      <a:pPr>
+                        <a:defRPr sz="1350"/>
+                      </a:pPr>
+                      <a:r>
+                        <a:t>ECFP + descriptors</a:t>
+                      </a:r>
+                    </a:p>
+                  </a:txBody>
+                  <a:tcPr/>
+                </a:tc>
+                <a:tc>
+                  <a:txBody>
+                    <a:bodyPr/>
+                    <a:lstStyle/>
+                    <a:p>
+                      <a:pPr>
+                        <a:defRPr sz="1350"/>
+                      </a:pPr>
+                      <a:r>
+                        <a:t>scaling repair (quantile → standard) took it from 0.005 to 0.221 on pairs</a:t>
                       </a:r>
                     </a:p>
                   </a:txBody>
                   <a:tcPr/>
                 </a:tc>
               </a:tr>
-              <a:tr h="356615">
-                <a:tc>
-                  <a:txBody>
-                    <a:bodyPr/>
-                    <a:lstStyle/>
-                    <a:p>
-                      <a:pPr>
-                        <a:defRPr sz="1500"/>
-                      </a:pPr>
-                      <a:r>
-                        <a:t>conditions modulating the 3D embedding (FiLM)</a:t>
-                      </a:r>
-                    </a:p>
-                  </a:txBody>
-                  <a:tcPr/>
-                </a:tc>
-                <a:tc>
-                  <a:txBody>
-                    <a:bodyPr/>
-                    <a:lstStyle/>
-                    <a:p>
-                      <a:pPr algn="r">
-                        <a:defRPr sz="1500"/>
-                      </a:pPr>
-                      <a:r>
-                        <a:t>−0.108</a:t>
-                      </a:r>
-                    </a:p>
-                  </a:txBody>
-                  <a:tcPr/>
-                </a:tc>
-                <a:tc>
-                  <a:txBody>
-                    <a:bodyPr/>
-                    <a:lstStyle/>
-                    <a:p>
-                      <a:pPr>
-                        <a:defRPr sz="1500"/>
-                      </a:pPr>
-                      <a:r>
-                        <a:t>0/5 up, p = 0.003</a:t>
-                      </a:r>
-                    </a:p>
-                  </a:txBody>
-                  <a:tcPr/>
-                </a:tc>
-                <a:tc>
-                  <a:txBody>
-                    <a:bodyPr/>
-                    <a:lstStyle/>
-                    <a:p>
-                      <a:pPr>
-                        <a:defRPr sz="1500"/>
-                      </a:pPr>
-                      <a:r>
-                        <a:t>harmful</a:t>
+              <a:tr h="347472">
+                <a:tc>
+                  <a:txBody>
+                    <a:bodyPr/>
+                    <a:lstStyle/>
+                    <a:p>
+                      <a:pPr>
+                        <a:defRPr sz="1350"/>
+                      </a:pPr>
+                      <a:r>
+                        <a:t>3D encoder</a:t>
+                      </a:r>
+                    </a:p>
+                  </a:txBody>
+                  <a:tcPr/>
+                </a:tc>
+                <a:tc>
+                  <a:txBody>
+                    <a:bodyPr/>
+                    <a:lstStyle/>
+                    <a:p>
+                      <a:pPr>
+                        <a:defRPr sz="1350"/>
+                      </a:pPr>
+                      <a:r>
+                        <a:t>Vietoris–Rips complex</a:t>
+                      </a:r>
+                    </a:p>
+                  </a:txBody>
+                  <a:tcPr/>
+                </a:tc>
+                <a:tc>
+                  <a:txBody>
+                    <a:bodyPr/>
+                    <a:lstStyle/>
+                    <a:p>
+                      <a:pPr>
+                        <a:defRPr sz="1350"/>
+                      </a:pPr>
+                      <a:r>
+                        <a:t>3 rounds of message passing over nodes/edges/triangles; metal-centred distance-histogram pooling (without it, the encoder cannot even recover the lanthanide index: R² 0.016)</a:t>
                       </a:r>
                     </a:p>
                   </a:txBody>
                   <a:tcPr/>
                 </a:tc>
               </a:tr>
-              <a:tr h="356619">
-                <a:tc>
-                  <a:txBody>
-                    <a:bodyPr/>
-                    <a:lstStyle/>
-                    <a:p>
-                      <a:pPr>
-                        <a:defRPr sz="1500"/>
-                      </a:pPr>
-                      <a:r>
-                        <a:t>direct pair-difference head + reconciliation</a:t>
-                      </a:r>
-                    </a:p>
-                  </a:txBody>
-                  <a:tcPr/>
-                </a:tc>
-                <a:tc>
-                  <a:txBody>
-                    <a:bodyPr/>
-                    <a:lstStyle/>
-                    <a:p>
-                      <a:pPr algn="r">
-                        <a:defRPr sz="1500"/>
-                      </a:pPr>
-                      <a:r>
-                        <a:t>−1.16</a:t>
-                      </a:r>
-                    </a:p>
-                  </a:txBody>
-                  <a:tcPr/>
-                </a:tc>
-                <a:tc>
-                  <a:txBody>
-                    <a:bodyPr/>
-                    <a:lstStyle/>
-                    <a:p>
-                      <a:pPr>
-                        <a:defRPr sz="1500"/>
-                      </a:pPr>
-                      <a:r>
-                        <a:t>0/6 up</a:t>
-                      </a:r>
-                    </a:p>
-                  </a:txBody>
-                  <a:tcPr/>
-                </a:tc>
-                <a:tc>
-                  <a:txBody>
-                    <a:bodyPr/>
-                    <a:lstStyle/>
-                    <a:p>
-                      <a:pPr>
-                        <a:defRPr sz="1500"/>
-                      </a:pPr>
-                      <a:r>
-                        <a:t>catastrophic</a:t>
+              <a:tr h="347472">
+                <a:tc>
+                  <a:txBody>
+                    <a:bodyPr/>
+                    <a:lstStyle/>
+                    <a:p>
+                      <a:pPr>
+                        <a:defRPr sz="1350"/>
+                      </a:pPr>
+                      <a:r>
+                        <a:t>combination</a:t>
+                      </a:r>
+                    </a:p>
+                  </a:txBody>
+                  <a:tcPr/>
+                </a:tc>
+                <a:tc>
+                  <a:txBody>
+                    <a:bodyPr/>
+                    <a:lstStyle/>
+                    <a:p>
+                      <a:pPr>
+                        <a:defRPr sz="1350"/>
+                      </a:pPr>
+                      <a:r>
+                        <a:t>all three</a:t>
+                      </a:r>
+                    </a:p>
+                  </a:txBody>
+                  <a:tcPr/>
+                </a:tc>
+                <a:tc>
+                  <a:txBody>
+                    <a:bodyPr/>
+                    <a:lstStyle/>
+                    <a:p>
+                      <a:pPr>
+                        <a:defRPr sz="1350"/>
+                      </a:pPr>
+                      <a:r>
+                        <a:t>weights fitted on PAIR vectors, nested per held-out extractant (NNLS)</a:t>
                       </a:r>
                     </a:p>
                   </a:txBody>
@@ -5444,8 +6326,8 @@
         </p:nvSpPr>
         <p:spPr>
           <a:xfrm>
-            <a:off x="548640" y="3429000"/>
-            <a:ext cx="11064240" cy="3154680"/>
+            <a:off x="548640" y="4480560"/>
+            <a:ext cx="11064240" cy="2148839"/>
           </a:xfrm>
           <a:prstGeom prst="rect">
             <a:avLst/>
@@ -5460,46 +6342,16 @@
           <a:p>
             <a:pPr>
               <a:spcAft>
-                <a:spcPts val="700"/>
+                <a:spcPts val="600"/>
               </a:spcAft>
-              <a:defRPr sz="1700" b="1">
-                <a:solidFill>
-                  <a:srgbClr val="1A2E4A"/>
-                </a:solidFill>
-              </a:defRPr>
-            </a:pPr>
-            <a:r>
-              <a:t>Four independent representation-side interventions, all null or harmful, all well powered.</a:t>
-            </a:r>
-          </a:p>
-          <a:p>
-            <a:pPr>
-              <a:spcAft>
-                <a:spcPts val="700"/>
-              </a:spcAft>
-              <a:defRPr sz="1700" b="0">
+              <a:defRPr sz="1600" b="0">
                 <a:solidFill>
                   <a:srgbClr val="22262A"/>
                 </a:solidFill>
               </a:defRPr>
             </a:pPr>
             <a:r>
-              <a:t>One apparent positive (+0.033, p = 0.02, 7/8 seeds) dissolved under a scale-free check: rescaling the OLD geometry by a single constant recovered 237% of the 'gain'. It was prediction shrinkage, not information.</a:t>
-            </a:r>
-          </a:p>
-          <a:p>
-            <a:pPr>
-              <a:spcAft>
-                <a:spcPts val="700"/>
-              </a:spcAft>
-              <a:defRPr sz="1700" b="1">
-                <a:solidFill>
-                  <a:srgbClr val="A8322D"/>
-                </a:solidFill>
-              </a:defRPr>
-            </a:pPr>
-            <a:r>
-              <a:t>Conclusion: geometric fidelity is not the bottleneck for this property. The information the models lack is not in the coordinates.</a:t>
+              <a:t>The pair-fitted combiner matters: fitting stack weights on rows hands 79% of the weight to the model best at levels and worst at pairs; fitting on the scored quantity was worth +0.056.</a:t>
             </a:r>
           </a:p>
         </p:txBody>
@@ -5530,8 +6382,8 @@
         </p:nvSpPr>
         <p:spPr>
           <a:xfrm>
-            <a:off x="502920" y="320040"/>
-            <a:ext cx="11155680" cy="822960"/>
+            <a:off x="502920" y="274320"/>
+            <a:ext cx="11247120" cy="868680"/>
           </a:xfrm>
           <a:prstGeom prst="rect">
             <a:avLst/>
@@ -5545,332 +6397,40 @@
           <a:lstStyle/>
           <a:p>
             <a:pPr>
-              <a:defRPr sz="3000" b="1">
+              <a:defRPr sz="2800" b="1">
                 <a:solidFill>
                   <a:srgbClr val="1A2E4A"/>
                 </a:solidFill>
               </a:defRPr>
             </a:pPr>
             <a:r>
-              <a:t>What actually moves the metric: the objective</a:t>
+              <a:t>Your question: “constantly more accurate — am I right?”</a:t>
             </a:r>
           </a:p>
           <a:p>
             <a:pPr>
-              <a:defRPr sz="1500">
+              <a:defRPr sz="1400">
                 <a:solidFill>
                   <a:srgbClr val="555A60"/>
                 </a:solidFill>
               </a:defRPr>
             </a:pPr>
             <a:r>
-              <a:t>The same loss change transfers across both encoder architectures</a:t>
-            </a:r>
-          </a:p>
-        </p:txBody>
-      </p:sp>
-      <p:graphicFrame>
-        <p:nvGraphicFramePr>
-          <p:cNvPr id="3" name="Table 2"/>
-          <p:cNvGraphicFramePr>
-            <a:graphicFrameLocks noGrp="1"/>
-          </p:cNvGraphicFramePr>
-          <p:nvPr/>
-        </p:nvGraphicFramePr>
-        <p:xfrm>
-          <a:off x="640080" y="1463040"/>
-          <a:ext cx="10881360" cy="1453895"/>
-        </p:xfrm>
-        <a:graphic>
-          <a:graphicData uri="http://schemas.openxmlformats.org/drawingml/2006/table">
-            <a:tbl>
-              <a:tblPr firstRow="1" bandRow="1">
-                <a:tableStyleId>{5C22544A-7EE6-4342-B048-85BDC9FD1C3A}</a:tableStyleId>
-              </a:tblPr>
-              <a:tblGrid>
-                <a:gridCol w="3474720"/>
-                <a:gridCol w="2286000"/>
-                <a:gridCol w="1737360"/>
-                <a:gridCol w="3383280"/>
-              </a:tblGrid>
-              <a:tr h="363473">
-                <a:tc>
-                  <a:txBody>
-                    <a:bodyPr/>
-                    <a:lstStyle/>
-                    <a:p>
-                      <a:pPr>
-                        <a:defRPr sz="1500" b="1">
-                          <a:solidFill>
-                            <a:srgbClr val="FFFFFF"/>
-                          </a:solidFill>
-                        </a:defRPr>
-                      </a:pPr>
-                      <a:r>
-                        <a:t>change</a:t>
-                      </a:r>
-                    </a:p>
-                  </a:txBody>
-                  <a:tcPr/>
-                </a:tc>
-                <a:tc>
-                  <a:txBody>
-                    <a:bodyPr/>
-                    <a:lstStyle/>
-                    <a:p>
-                      <a:pPr>
-                        <a:defRPr sz="1500" b="1">
-                          <a:solidFill>
-                            <a:srgbClr val="FFFFFF"/>
-                          </a:solidFill>
-                        </a:defRPr>
-                      </a:pPr>
-                      <a:r>
-                        <a:t>architecture</a:t>
-                      </a:r>
-                    </a:p>
-                  </a:txBody>
-                  <a:tcPr/>
-                </a:tc>
-                <a:tc>
-                  <a:txBody>
-                    <a:bodyPr/>
-                    <a:lstStyle/>
-                    <a:p>
-                      <a:pPr>
-                        <a:defRPr sz="1500" b="1">
-                          <a:solidFill>
-                            <a:srgbClr val="FFFFFF"/>
-                          </a:solidFill>
-                        </a:defRPr>
-                      </a:pPr>
-                      <a:r>
-                        <a:t>Δ adjacent R²</a:t>
-                      </a:r>
-                    </a:p>
-                  </a:txBody>
-                  <a:tcPr/>
-                </a:tc>
-                <a:tc>
-                  <a:txBody>
-                    <a:bodyPr/>
-                    <a:lstStyle/>
-                    <a:p>
-                      <a:pPr>
-                        <a:defRPr sz="1500" b="1">
-                          <a:solidFill>
-                            <a:srgbClr val="FFFFFF"/>
-                          </a:solidFill>
-                        </a:defRPr>
-                      </a:pPr>
-                      <a:r>
-                        <a:t>evidence</a:t>
-                      </a:r>
-                    </a:p>
-                  </a:txBody>
-                  <a:tcPr/>
-                </a:tc>
-              </a:tr>
-              <a:tr h="363473">
-                <a:tc>
-                  <a:txBody>
-                    <a:bodyPr/>
-                    <a:lstStyle/>
-                    <a:p>
-                      <a:pPr>
-                        <a:defRPr sz="1500"/>
-                      </a:pPr>
-                      <a:r>
-                        <a:t>contrast-loss weight 2 → 4</a:t>
-                      </a:r>
-                    </a:p>
-                  </a:txBody>
-                  <a:tcPr/>
-                </a:tc>
-                <a:tc>
-                  <a:txBody>
-                    <a:bodyPr/>
-                    <a:lstStyle/>
-                    <a:p>
-                      <a:pPr>
-                        <a:defRPr sz="1500"/>
-                      </a:pPr>
-                      <a:r>
-                        <a:t>distance encoder</a:t>
-                      </a:r>
-                    </a:p>
-                  </a:txBody>
-                  <a:tcPr/>
-                </a:tc>
-                <a:tc>
-                  <a:txBody>
-                    <a:bodyPr/>
-                    <a:lstStyle/>
-                    <a:p>
-                      <a:pPr algn="r">
-                        <a:defRPr sz="1500"/>
-                      </a:pPr>
-                      <a:r>
-                        <a:t>+0.0142</a:t>
-                      </a:r>
-                    </a:p>
-                  </a:txBody>
-                  <a:tcPr/>
-                </a:tc>
-                <a:tc>
-                  <a:txBody>
-                    <a:bodyPr/>
-                    <a:lstStyle/>
-                    <a:p>
-                      <a:pPr>
-                        <a:defRPr sz="1500"/>
-                      </a:pPr>
-                      <a:r>
-                        <a:t>40 seeds that never selected it; p = 0.014; 95% CI [+0.003, +0.025]</a:t>
-                      </a:r>
-                    </a:p>
-                  </a:txBody>
-                  <a:tcPr/>
-                </a:tc>
-              </a:tr>
-              <a:tr h="363473">
-                <a:tc>
-                  <a:txBody>
-                    <a:bodyPr/>
-                    <a:lstStyle/>
-                    <a:p>
-                      <a:pPr>
-                        <a:defRPr sz="1500"/>
-                      </a:pPr>
-                      <a:r>
-                        <a:t>contrast-loss weight 2 → 4</a:t>
-                      </a:r>
-                    </a:p>
-                  </a:txBody>
-                  <a:tcPr/>
-                </a:tc>
-                <a:tc>
-                  <a:txBody>
-                    <a:bodyPr/>
-                    <a:lstStyle/>
-                    <a:p>
-                      <a:pPr>
-                        <a:defRPr sz="1500"/>
-                      </a:pPr>
-                      <a:r>
-                        <a:t>simplicial encoder</a:t>
-                      </a:r>
-                    </a:p>
-                  </a:txBody>
-                  <a:tcPr/>
-                </a:tc>
-                <a:tc>
-                  <a:txBody>
-                    <a:bodyPr/>
-                    <a:lstStyle/>
-                    <a:p>
-                      <a:pPr algn="r">
-                        <a:defRPr sz="1500"/>
-                      </a:pPr>
-                      <a:r>
-                        <a:t>+0.0146</a:t>
-                      </a:r>
-                    </a:p>
-                  </a:txBody>
-                  <a:tcPr/>
-                </a:tc>
-                <a:tc>
-                  <a:txBody>
-                    <a:bodyPr/>
-                    <a:lstStyle/>
-                    <a:p>
-                      <a:pPr>
-                        <a:defRPr sz="1500"/>
-                      </a:pPr>
-                      <a:r>
-                        <a:t>24 fresh seeds, p = 0.035 (campaign completing tonight)</a:t>
-                      </a:r>
-                    </a:p>
-                  </a:txBody>
-                  <a:tcPr/>
-                </a:tc>
-              </a:tr>
-              <a:tr h="363476">
-                <a:tc>
-                  <a:txBody>
-                    <a:bodyPr/>
-                    <a:lstStyle/>
-                    <a:p>
-                      <a:pPr>
-                        <a:defRPr sz="1500"/>
-                      </a:pPr>
-                      <a:r>
-                        <a:t>tree loss RMSE → Quantile(0.6) + re-grid</a:t>
-                      </a:r>
-                    </a:p>
-                  </a:txBody>
-                  <a:tcPr/>
-                </a:tc>
-                <a:tc>
-                  <a:txBody>
-                    <a:bodyPr/>
-                    <a:lstStyle/>
-                    <a:p>
-                      <a:pPr>
-                        <a:defRPr sz="1500"/>
-                      </a:pPr>
-                      <a:r>
-                        <a:t>2D gradient boosting</a:t>
-                      </a:r>
-                    </a:p>
-                  </a:txBody>
-                  <a:tcPr/>
-                </a:tc>
-                <a:tc>
-                  <a:txBody>
-                    <a:bodyPr/>
-                    <a:lstStyle/>
-                    <a:p>
-                      <a:pPr algn="r">
-                        <a:defRPr sz="1500"/>
-                      </a:pPr>
-                      <a:r>
-                        <a:t>+0.136 cumulative</a:t>
-                      </a:r>
-                    </a:p>
-                  </a:txBody>
-                  <a:tcPr/>
-                </a:tc>
-                <a:tc>
-                  <a:txBody>
-                    <a:bodyPr/>
-                    <a:lstStyle/>
-                    <a:p>
-                      <a:pPr>
-                        <a:defRPr sz="1500"/>
-                      </a:pPr>
-                      <a:r>
-                        <a:t>held-out third: +0.016, passed pre-declared bar</a:t>
-                      </a:r>
-                    </a:p>
-                  </a:txBody>
-                  <a:tcPr/>
-                </a:tc>
-              </a:tr>
-            </a:tbl>
-          </a:graphicData>
-        </a:graphic>
-      </p:graphicFrame>
-      <p:sp>
-        <p:nvSpPr>
-          <p:cNvPr id="4" name="TextBox 3"/>
+              <a:t>The precise answer, before the numbers</a:t>
+            </a:r>
+          </a:p>
+        </p:txBody>
+      </p:sp>
+      <p:sp>
+        <p:nvSpPr>
+          <p:cNvPr id="3" name="TextBox 2"/>
           <p:cNvSpPr txBox="1"/>
           <p:nvPr/>
         </p:nvSpPr>
         <p:spPr>
           <a:xfrm>
-            <a:off x="548640" y="3291840"/>
-            <a:ext cx="11064240" cy="3291840"/>
+            <a:off x="548640" y="1325880"/>
+            <a:ext cx="11064240" cy="5303520"/>
           </a:xfrm>
           <a:prstGeom prst="rect">
             <a:avLst/>
@@ -5885,31 +6445,76 @@
           <a:p>
             <a:pPr>
               <a:spcAft>
-                <a:spcPts val="700"/>
+                <a:spcPts val="600"/>
               </a:spcAft>
-              <a:defRPr sz="1700" b="1">
-                <a:solidFill>
-                  <a:srgbClr val="0E7A5F"/>
-                </a:solidFill>
-              </a:defRPr>
-            </a:pPr>
-            <a:r>
-              <a:t>+0.0142 and +0.0146 on two different architectures, from disjoint seed sets, is the signature of a genuine objective-level effect — not an encoder artefact.</a:t>
+              <a:defRPr sz="1600" b="1">
+                <a:solidFill>
+                  <a:srgbClr val="A8322D"/>
+                </a:solidFill>
+              </a:defRPr>
+            </a:pPr>
+            <a:r>
+              <a:t>Not constantly more accurate as a single model — that was true in July, and is no longer.</a:t>
+            </a:r>
+          </a:p>
+          <a:p>
+            <a:pPr lvl="1">
+              <a:spcAft>
+                <a:spcPts val="600"/>
+              </a:spcAft>
+              <a:defRPr sz="1400" b="0">
+                <a:solidFill>
+                  <a:srgbClr val="22262A"/>
+                </a:solidFill>
+              </a:defRPr>
+            </a:pPr>
+            <a:r>
+              <a:t>With the right loss, gradient boosting on 2D descriptors now reaches 0.278 — above the 3D encoder alone (0.266) and above July's full combination (0.267).</a:t>
             </a:r>
           </a:p>
           <a:p>
             <a:pPr>
               <a:spcAft>
-                <a:spcPts val="700"/>
+                <a:spcPts val="600"/>
               </a:spcAft>
-              <a:defRPr sz="1700" b="0">
+              <a:defRPr sz="1600" b="1">
+                <a:solidFill>
+                  <a:srgbClr val="0E7A5F"/>
+                </a:solidFill>
+              </a:defRPr>
+            </a:pPr>
+            <a:r>
+              <a:t>But the best system still requires the 3D encoder.</a:t>
+            </a:r>
+          </a:p>
+          <a:p>
+            <a:pPr lvl="1">
+              <a:spcAft>
+                <a:spcPts val="600"/>
+              </a:spcAft>
+              <a:defRPr sz="1400" b="0">
                 <a:solidFill>
                   <a:srgbClr val="22262A"/>
                 </a:solidFill>
               </a:defRPr>
             </a:pPr>
             <a:r>
-              <a:t>Interpretation: the models were optimising absolute log D while being scored on a within-block contrast. Every surviving gain in the project comes from aligning the loss with the contrast.</a:t>
+              <a:t>0.313 with it vs 0.291 without; the pair-fitted combiner gives the 3D arm the LARGEST weight of the three (0.46 vs 0.42 boosting, 0.11 fingerprint).</a:t>
+            </a:r>
+          </a:p>
+          <a:p>
+            <a:pPr>
+              <a:spcAft>
+                <a:spcPts val="600"/>
+              </a:spcAft>
+              <a:defRPr sz="1600" b="1">
+                <a:solidFill>
+                  <a:srgbClr val="1A2E4A"/>
+                </a:solidFill>
+              </a:defRPr>
+            </a:pPr>
+            <a:r>
+              <a:t>The claim I will defend: the 3D encoder contributes by complementarity — it corrects errors the 2D models share — and that contribution is real under the published blocking and shrinks under stricter blocking.</a:t>
             </a:r>
           </a:p>
         </p:txBody>
@@ -5940,8 +6545,8 @@
         </p:nvSpPr>
         <p:spPr>
           <a:xfrm>
-            <a:off x="502920" y="320040"/>
-            <a:ext cx="11155680" cy="822960"/>
+            <a:off x="502920" y="274320"/>
+            <a:ext cx="11247120" cy="868680"/>
           </a:xfrm>
           <a:prstGeom prst="rect">
             <a:avLst/>
@@ -5955,256 +6560,54 @@
           <a:lstStyle/>
           <a:p>
             <a:pPr>
-              <a:defRPr sz="3000" b="1">
+              <a:defRPr sz="2800" b="1">
                 <a:solidFill>
                   <a:srgbClr val="1A2E4A"/>
                 </a:solidFill>
               </a:defRPr>
             </a:pPr>
             <a:r>
-              <a:t>How much headroom remains — the metric is not noise-limited</a:t>
+              <a:t>Results: July → today</a:t>
             </a:r>
           </a:p>
           <a:p>
             <a:pPr>
-              <a:defRPr sz="1500">
+              <a:defRPr sz="1400">
                 <a:solidFill>
                   <a:srgbClr val="555A60"/>
                 </a:solidFill>
               </a:defRPr>
             </a:pPr>
             <a:r>
-              <a:t>Measured from 203 repeated (composition, adjacent-pair) determinations</a:t>
-            </a:r>
-          </a:p>
-        </p:txBody>
-      </p:sp>
-      <p:graphicFrame>
-        <p:nvGraphicFramePr>
-          <p:cNvPr id="3" name="Table 2"/>
-          <p:cNvGraphicFramePr>
-            <a:graphicFrameLocks noGrp="1"/>
-          </p:cNvGraphicFramePr>
+              <a:t>Both improvements are objective-function changes; no architecture changed</a:t>
+            </a:r>
+          </a:p>
+        </p:txBody>
+      </p:sp>
+      <p:pic>
+        <p:nvPicPr>
+          <p:cNvPr id="3" name="Picture 2" descr="f4_ladder.png"/>
+          <p:cNvPicPr>
+            <a:picLocks noChangeAspect="1"/>
+          </p:cNvPicPr>
           <p:nvPr/>
-        </p:nvGraphicFramePr>
-        <p:xfrm>
-          <a:off x="640080" y="1463040"/>
-          <a:ext cx="10881359" cy="2112264"/>
-        </p:xfrm>
-        <a:graphic>
-          <a:graphicData uri="http://schemas.openxmlformats.org/drawingml/2006/table">
-            <a:tbl>
-              <a:tblPr firstRow="1" bandRow="1">
-                <a:tableStyleId>{5C22544A-7EE6-4342-B048-85BDC9FD1C3A}</a:tableStyleId>
-              </a:tblPr>
-              <a:tblGrid>
-                <a:gridCol w="7498079"/>
-                <a:gridCol w="3383280"/>
-              </a:tblGrid>
-              <a:tr h="352044">
-                <a:tc>
-                  <a:txBody>
-                    <a:bodyPr/>
-                    <a:lstStyle/>
-                    <a:p>
-                      <a:pPr>
-                        <a:defRPr sz="1500" b="1">
-                          <a:solidFill>
-                            <a:srgbClr val="FFFFFF"/>
-                          </a:solidFill>
-                        </a:defRPr>
-                      </a:pPr>
-                      <a:r>
-                        <a:t>quantity</a:t>
-                      </a:r>
-                    </a:p>
-                  </a:txBody>
-                  <a:tcPr/>
-                </a:tc>
-                <a:tc>
-                  <a:txBody>
-                    <a:bodyPr/>
-                    <a:lstStyle/>
-                    <a:p>
-                      <a:pPr>
-                        <a:defRPr sz="1500" b="1">
-                          <a:solidFill>
-                            <a:srgbClr val="FFFFFF"/>
-                          </a:solidFill>
-                        </a:defRPr>
-                      </a:pPr>
-                      <a:r>
-                        <a:t>value</a:t>
-                      </a:r>
-                    </a:p>
-                  </a:txBody>
-                  <a:tcPr/>
-                </a:tc>
-              </a:tr>
-              <a:tr h="352044">
-                <a:tc>
-                  <a:txBody>
-                    <a:bodyPr/>
-                    <a:lstStyle/>
-                    <a:p>
-                      <a:pPr>
-                        <a:defRPr sz="1500"/>
-                      </a:pPr>
-                      <a:r>
-                        <a:t>scatter of log D within a (block, metal) group</a:t>
-                      </a:r>
-                    </a:p>
-                  </a:txBody>
-                  <a:tcPr/>
-                </a:tc>
-                <a:tc>
-                  <a:txBody>
-                    <a:bodyPr/>
-                    <a:lstStyle/>
-                    <a:p>
-                      <a:pPr algn="r">
-                        <a:defRPr sz="1500"/>
-                      </a:pPr>
-                      <a:r>
-                        <a:t>0.72 – 0.95</a:t>
-                      </a:r>
-                    </a:p>
-                  </a:txBody>
-                  <a:tcPr/>
-                </a:tc>
-              </a:tr>
-              <a:tr h="352044">
-                <a:tc>
-                  <a:txBody>
-                    <a:bodyPr/>
-                    <a:lstStyle/>
-                    <a:p>
-                      <a:pPr>
-                        <a:defRPr sz="1500"/>
-                      </a:pPr>
-                      <a:r>
-                        <a:t>reproducibility of an adjacent SEPARATION across independent blocks</a:t>
-                      </a:r>
-                    </a:p>
-                  </a:txBody>
-                  <a:tcPr/>
-                </a:tc>
-                <a:tc>
-                  <a:txBody>
-                    <a:bodyPr/>
-                    <a:lstStyle/>
-                    <a:p>
-                      <a:pPr algn="r">
-                        <a:defRPr sz="1500"/>
-                      </a:pPr>
-                      <a:r>
-                        <a:t>0.153</a:t>
-                      </a:r>
-                    </a:p>
-                  </a:txBody>
-                  <a:tcPr/>
-                </a:tc>
-              </a:tr>
-              <a:tr h="352044">
-                <a:tc>
-                  <a:txBody>
-                    <a:bodyPr/>
-                    <a:lstStyle/>
-                    <a:p>
-                      <a:pPr>
-                        <a:defRPr sz="1500"/>
-                      </a:pPr>
-                      <a:r>
-                        <a:t>spread of adjacent separations</a:t>
-                      </a:r>
-                    </a:p>
-                  </a:txBody>
-                  <a:tcPr/>
-                </a:tc>
-                <a:tc>
-                  <a:txBody>
-                    <a:bodyPr/>
-                    <a:lstStyle/>
-                    <a:p>
-                      <a:pPr algn="r">
-                        <a:defRPr sz="1500"/>
-                      </a:pPr>
-                      <a:r>
-                        <a:t>0.224</a:t>
-                      </a:r>
-                    </a:p>
-                  </a:txBody>
-                  <a:tcPr/>
-                </a:tc>
-              </a:tr>
-              <a:tr h="352044">
-                <a:tc>
-                  <a:txBody>
-                    <a:bodyPr/>
-                    <a:lstStyle/>
-                    <a:p>
-                      <a:pPr>
-                        <a:defRPr sz="1500"/>
-                      </a:pPr>
-                      <a:r>
-                        <a:t>implied ceiling on adjacent-pair R²</a:t>
-                      </a:r>
-                    </a:p>
-                  </a:txBody>
-                  <a:tcPr/>
-                </a:tc>
-                <a:tc>
-                  <a:txBody>
-                    <a:bodyPr/>
-                    <a:lstStyle/>
-                    <a:p>
-                      <a:pPr>
-                        <a:defRPr sz="1500"/>
-                      </a:pPr>
-                      <a:r>
-                        <a:t>≈ +0.53</a:t>
-                      </a:r>
-                    </a:p>
-                  </a:txBody>
-                  <a:tcPr/>
-                </a:tc>
-              </a:tr>
-              <a:tr h="352044">
-                <a:tc>
-                  <a:txBody>
-                    <a:bodyPr/>
-                    <a:lstStyle/>
-                    <a:p>
-                      <a:pPr>
-                        <a:defRPr sz="1500"/>
-                      </a:pPr>
-                      <a:r>
-                        <a:t>current best (this work)</a:t>
-                      </a:r>
-                    </a:p>
-                  </a:txBody>
-                  <a:tcPr/>
-                </a:tc>
-                <a:tc>
-                  <a:txBody>
-                    <a:bodyPr/>
-                    <a:lstStyle/>
-                    <a:p>
-                      <a:pPr algn="r">
-                        <a:defRPr sz="1500"/>
-                      </a:pPr>
-                      <a:r>
-                        <a:t>+0.31</a:t>
-                      </a:r>
-                    </a:p>
-                  </a:txBody>
-                  <a:tcPr/>
-                </a:tc>
-              </a:tr>
-            </a:tbl>
-          </a:graphicData>
-        </a:graphic>
-      </p:graphicFrame>
+        </p:nvPicPr>
+        <p:blipFill>
+          <a:blip r:embed="rId2"/>
+          <a:stretch>
+            <a:fillRect/>
+          </a:stretch>
+        </p:blipFill>
+        <p:spPr>
+          <a:xfrm>
+            <a:off x="1615287" y="1371600"/>
+            <a:ext cx="8961120" cy="3751166"/>
+          </a:xfrm>
+          <a:prstGeom prst="rect">
+            <a:avLst/>
+          </a:prstGeom>
+        </p:spPr>
+      </p:pic>
       <p:sp>
         <p:nvSpPr>
           <p:cNvPr id="4" name="TextBox 3"/>
@@ -6213,8 +6616,8 @@
         </p:nvSpPr>
         <p:spPr>
           <a:xfrm>
-            <a:off x="548640" y="3703320"/>
-            <a:ext cx="11064240" cy="2880360"/>
+            <a:off x="548640" y="5029200"/>
+            <a:ext cx="11064240" cy="1600200"/>
           </a:xfrm>
           <a:prstGeom prst="rect">
             <a:avLst/>
@@ -6229,31 +6632,31 @@
           <a:p>
             <a:pPr>
               <a:spcAft>
-                <a:spcPts val="700"/>
+                <a:spcPts val="600"/>
               </a:spcAft>
-              <a:defRPr sz="1700" b="0">
+              <a:defRPr sz="1600" b="0">
                 <a:solidFill>
                   <a:srgbClr val="22262A"/>
                 </a:solidFill>
               </a:defRPr>
             </a:pPr>
             <a:r>
-              <a:t>Condition effects are shared by the two metals of a pair and cancel on differencing — separations reproduce 6× tighter than the levels they are computed from.</a:t>
+              <a:t>Boosting: RMSE → MAE → Quantile(0.6) + hyperparameters re-tuned under that loss (+0.136 cumulative; +0.016 confirmed on a held-out third).</a:t>
             </a:r>
           </a:p>
           <a:p>
             <a:pPr>
               <a:spcAft>
-                <a:spcPts val="700"/>
+                <a:spcPts val="600"/>
               </a:spcAft>
-              <a:defRPr sz="1700" b="1">
-                <a:solidFill>
-                  <a:srgbClr val="1A2E4A"/>
-                </a:solidFill>
-              </a:defRPr>
-            </a:pPr>
-            <a:r>
-              <a:t>We are at ~60% of what the labels permit. The remaining signal is not in geometry (~1% of pair variance under either Hamiltonian); candidates are conditions and direct pair modelling.</a:t>
+              <a:defRPr sz="1600" b="0">
+                <a:solidFill>
+                  <a:srgbClr val="22262A"/>
+                </a:solidFill>
+              </a:defRPr>
+            </a:pPr>
+            <a:r>
+              <a:t>3D encoder: contrast-loss weight 2 → 4 (next slides). Fingerprint network unchanged.</a:t>
             </a:r>
           </a:p>
         </p:txBody>

--- a/docs/vogiatzis_findings_2026-08.pptx
+++ b/docs/vogiatzis_findings_2026-08.pptx
@@ -6,22 +6,24 @@
   </p:sldMasterIdLst>
   <p:sldIdLst>
     <p:sldId id="256" r:id="rId7"/>
-    <p:sldId id="257" r:id="rId8"/>
-    <p:sldId id="258" r:id="rId9"/>
-    <p:sldId id="259" r:id="rId10"/>
-    <p:sldId id="260" r:id="rId11"/>
-    <p:sldId id="261" r:id="rId12"/>
-    <p:sldId id="262" r:id="rId13"/>
-    <p:sldId id="263" r:id="rId14"/>
-    <p:sldId id="264" r:id="rId15"/>
-    <p:sldId id="265" r:id="rId16"/>
-    <p:sldId id="266" r:id="rId17"/>
-    <p:sldId id="267" r:id="rId18"/>
-    <p:sldId id="268" r:id="rId19"/>
-    <p:sldId id="269" r:id="rId20"/>
-    <p:sldId id="270" r:id="rId21"/>
-    <p:sldId id="271" r:id="rId22"/>
-    <p:sldId id="272" r:id="rId23"/>
+    <p:sldId id="257" r:id="rId9"/>
+    <p:sldId id="258" r:id="rId10"/>
+    <p:sldId id="259" r:id="rId11"/>
+    <p:sldId id="260" r:id="rId12"/>
+    <p:sldId id="261" r:id="rId13"/>
+    <p:sldId id="262" r:id="rId14"/>
+    <p:sldId id="263" r:id="rId15"/>
+    <p:sldId id="264" r:id="rId16"/>
+    <p:sldId id="265" r:id="rId17"/>
+    <p:sldId id="266" r:id="rId18"/>
+    <p:sldId id="267" r:id="rId19"/>
+    <p:sldId id="268" r:id="rId20"/>
+    <p:sldId id="269" r:id="rId21"/>
+    <p:sldId id="270" r:id="rId22"/>
+    <p:sldId id="271" r:id="rId23"/>
+    <p:sldId id="272" r:id="rId24"/>
+    <p:sldId id="273" r:id="rId25"/>
+    <p:sldId id="274" r:id="rId26"/>
   </p:sldIdLst>
   <p:sldSz cx="12191695" cy="6858000" type="screen4x3"/>
   <p:notesSz cx="6858000" cy="9144000"/>
@@ -121,6 +123,1686 @@
     </a:lvl9pPr>
   </p:defaultTextStyle>
 </p:presentation>
+</file>
+
+<file path=ppt/notesMasters/notesMaster1.xml><?xml version="1.0" encoding="utf-8"?>
+<p:notesMaster xmlns:a="http://schemas.openxmlformats.org/drawingml/2006/main" xmlns:p="http://schemas.openxmlformats.org/presentationml/2006/main" xmlns:r="http://schemas.openxmlformats.org/officeDocument/2006/relationships">
+  <p:cSld>
+    <p:bg>
+      <p:bgRef idx="1001">
+        <a:schemeClr val="bg1"/>
+      </p:bgRef>
+    </p:bg>
+    <p:spTree>
+      <p:nvGrpSpPr>
+        <p:cNvPr id="1" name=""/>
+        <p:cNvGrpSpPr/>
+        <p:nvPr/>
+      </p:nvGrpSpPr>
+      <p:grpSpPr>
+        <a:xfrm>
+          <a:off x="0" y="0"/>
+          <a:ext cx="0" cy="0"/>
+          <a:chOff x="0" y="0"/>
+          <a:chExt cx="0" cy="0"/>
+        </a:xfrm>
+      </p:grpSpPr>
+      <p:sp>
+        <p:nvSpPr>
+          <p:cNvPr id="2" name="Header Placeholder 1"/>
+          <p:cNvSpPr>
+            <a:spLocks noGrp="1"/>
+          </p:cNvSpPr>
+          <p:nvPr>
+            <p:ph type="hdr" sz="quarter"/>
+          </p:nvPr>
+        </p:nvSpPr>
+        <p:spPr>
+          <a:xfrm>
+            <a:off x="0" y="0"/>
+            <a:ext cx="2971800" cy="457200"/>
+          </a:xfrm>
+          <a:prstGeom prst="rect">
+            <a:avLst/>
+          </a:prstGeom>
+        </p:spPr>
+        <p:txBody>
+          <a:bodyPr vert="horz" lIns="91440" tIns="45720" rIns="91440" bIns="45720" rtlCol="0"/>
+          <a:lstStyle>
+            <a:lvl1pPr algn="l">
+              <a:defRPr sz="1200"/>
+            </a:lvl1pPr>
+          </a:lstStyle>
+          <a:p>
+            <a:endParaRPr lang="en-US"/>
+          </a:p>
+        </p:txBody>
+      </p:sp>
+      <p:sp>
+        <p:nvSpPr>
+          <p:cNvPr id="3" name="Date Placeholder 2"/>
+          <p:cNvSpPr>
+            <a:spLocks noGrp="1"/>
+          </p:cNvSpPr>
+          <p:nvPr>
+            <p:ph type="dt" idx="1"/>
+          </p:nvPr>
+        </p:nvSpPr>
+        <p:spPr>
+          <a:xfrm>
+            <a:off x="3884613" y="0"/>
+            <a:ext cx="2971800" cy="457200"/>
+          </a:xfrm>
+          <a:prstGeom prst="rect">
+            <a:avLst/>
+          </a:prstGeom>
+        </p:spPr>
+        <p:txBody>
+          <a:bodyPr vert="horz" lIns="91440" tIns="45720" rIns="91440" bIns="45720" rtlCol="0"/>
+          <a:lstStyle>
+            <a:lvl1pPr algn="r">
+              <a:defRPr sz="1200"/>
+            </a:lvl1pPr>
+          </a:lstStyle>
+          <a:p>
+            <a:fld id="{0F89C1C7-3DCD-1040-A9CF-14679D8B5DDD}" type="datetimeFigureOut">
+              <a:rPr lang="en-US" smtClean="0"/>
+              <a:t>10/17/16</a:t>
+            </a:fld>
+            <a:endParaRPr lang="en-US"/>
+          </a:p>
+        </p:txBody>
+      </p:sp>
+      <p:sp>
+        <p:nvSpPr>
+          <p:cNvPr id="4" name="Slide Image Placeholder 3"/>
+          <p:cNvSpPr>
+            <a:spLocks noGrp="1" noRot="1" noChangeAspect="1"/>
+          </p:cNvSpPr>
+          <p:nvPr>
+            <p:ph type="sldImg" idx="2"/>
+          </p:nvPr>
+        </p:nvSpPr>
+        <p:spPr>
+          <a:xfrm>
+            <a:off x="1143000" y="685800"/>
+            <a:ext cx="4572000" cy="3429000"/>
+          </a:xfrm>
+          <a:prstGeom prst="rect">
+            <a:avLst/>
+          </a:prstGeom>
+          <a:noFill/>
+          <a:ln w="12700">
+            <a:solidFill>
+              <a:prstClr val="black"/>
+            </a:solidFill>
+          </a:ln>
+        </p:spPr>
+        <p:txBody>
+          <a:bodyPr vert="horz" lIns="91440" tIns="45720" rIns="91440" bIns="45720" rtlCol="0" anchor="ctr"/>
+          <a:lstStyle/>
+          <a:p>
+            <a:endParaRPr lang="en-US"/>
+          </a:p>
+        </p:txBody>
+      </p:sp>
+      <p:sp>
+        <p:nvSpPr>
+          <p:cNvPr id="5" name="Notes Placeholder 4"/>
+          <p:cNvSpPr>
+            <a:spLocks noGrp="1"/>
+          </p:cNvSpPr>
+          <p:nvPr>
+            <p:ph type="body" sz="quarter" idx="3"/>
+          </p:nvPr>
+        </p:nvSpPr>
+        <p:spPr>
+          <a:xfrm>
+            <a:off x="685800" y="4343400"/>
+            <a:ext cx="5486400" cy="4114800"/>
+          </a:xfrm>
+          <a:prstGeom prst="rect">
+            <a:avLst/>
+          </a:prstGeom>
+        </p:spPr>
+        <p:txBody>
+          <a:bodyPr vert="horz" lIns="91440" tIns="45720" rIns="91440" bIns="45720" rtlCol="0"/>
+          <a:lstStyle/>
+          <a:p>
+            <a:pPr lvl="0"/>
+            <a:r>
+              <a:rPr lang="en-US" smtClean="0"/>
+              <a:t>Click to edit Master text styles</a:t>
+            </a:r>
+          </a:p>
+          <a:p>
+            <a:pPr lvl="1"/>
+            <a:r>
+              <a:rPr lang="en-US" smtClean="0"/>
+              <a:t>Second level</a:t>
+            </a:r>
+          </a:p>
+          <a:p>
+            <a:pPr lvl="2"/>
+            <a:r>
+              <a:rPr lang="en-US" smtClean="0"/>
+              <a:t>Third level</a:t>
+            </a:r>
+          </a:p>
+          <a:p>
+            <a:pPr lvl="3"/>
+            <a:r>
+              <a:rPr lang="en-US" smtClean="0"/>
+              <a:t>Fourth level</a:t>
+            </a:r>
+          </a:p>
+          <a:p>
+            <a:pPr lvl="4"/>
+            <a:r>
+              <a:rPr lang="en-US" smtClean="0"/>
+              <a:t>Fifth level</a:t>
+            </a:r>
+            <a:endParaRPr lang="en-US"/>
+          </a:p>
+        </p:txBody>
+      </p:sp>
+      <p:sp>
+        <p:nvSpPr>
+          <p:cNvPr id="6" name="Footer Placeholder 5"/>
+          <p:cNvSpPr>
+            <a:spLocks noGrp="1"/>
+          </p:cNvSpPr>
+          <p:nvPr>
+            <p:ph type="ftr" sz="quarter" idx="4"/>
+          </p:nvPr>
+        </p:nvSpPr>
+        <p:spPr>
+          <a:xfrm>
+            <a:off x="0" y="8685213"/>
+            <a:ext cx="2971800" cy="457200"/>
+          </a:xfrm>
+          <a:prstGeom prst="rect">
+            <a:avLst/>
+          </a:prstGeom>
+        </p:spPr>
+        <p:txBody>
+          <a:bodyPr vert="horz" lIns="91440" tIns="45720" rIns="91440" bIns="45720" rtlCol="0" anchor="b"/>
+          <a:lstStyle>
+            <a:lvl1pPr algn="l">
+              <a:defRPr sz="1200"/>
+            </a:lvl1pPr>
+          </a:lstStyle>
+          <a:p>
+            <a:endParaRPr lang="en-US"/>
+          </a:p>
+        </p:txBody>
+      </p:sp>
+      <p:sp>
+        <p:nvSpPr>
+          <p:cNvPr id="7" name="Slide Number Placeholder 6"/>
+          <p:cNvSpPr>
+            <a:spLocks noGrp="1"/>
+          </p:cNvSpPr>
+          <p:nvPr>
+            <p:ph type="sldNum" sz="quarter" idx="5"/>
+          </p:nvPr>
+        </p:nvSpPr>
+        <p:spPr>
+          <a:xfrm>
+            <a:off x="3884613" y="8685213"/>
+            <a:ext cx="2971800" cy="457200"/>
+          </a:xfrm>
+          <a:prstGeom prst="rect">
+            <a:avLst/>
+          </a:prstGeom>
+        </p:spPr>
+        <p:txBody>
+          <a:bodyPr vert="horz" lIns="91440" tIns="45720" rIns="91440" bIns="45720" rtlCol="0" anchor="b"/>
+          <a:lstStyle>
+            <a:lvl1pPr algn="r">
+              <a:defRPr sz="1200"/>
+            </a:lvl1pPr>
+          </a:lstStyle>
+          <a:p>
+            <a:fld id="{BB5E49A5-4136-284D-997B-48E1D791AD67}" type="slidenum">
+              <a:rPr lang="en-US" smtClean="0"/>
+              <a:t>‹#›</a:t>
+            </a:fld>
+            <a:endParaRPr lang="en-US"/>
+          </a:p>
+        </p:txBody>
+      </p:sp>
+    </p:spTree>
+    <p:extLst>
+      <p:ext uri="{BB962C8B-B14F-4D97-AF65-F5344CB8AC3E}">
+        <p14:creationId xmlns:p14="http://schemas.microsoft.com/office/powerpoint/2010/main" val="2623252185"/>
+      </p:ext>
+    </p:extLst>
+  </p:cSld>
+  <p:clrMap bg1="lt1" tx1="dk1" bg2="lt2" tx2="dk2" accent1="accent1" accent2="accent2" accent3="accent3" accent4="accent4" accent5="accent5" accent6="accent6" hlink="hlink" folHlink="folHlink"/>
+  <p:notesStyle>
+    <a:lvl1pPr marL="0" algn="l" defTabSz="457200" rtl="0" eaLnBrk="1" latinLnBrk="0" hangingPunct="1">
+      <a:defRPr sz="1200" kern="1200">
+        <a:solidFill>
+          <a:schemeClr val="tx1"/>
+        </a:solidFill>
+        <a:latin typeface="+mn-lt"/>
+        <a:ea typeface="+mn-ea"/>
+        <a:cs typeface="+mn-cs"/>
+      </a:defRPr>
+    </a:lvl1pPr>
+    <a:lvl2pPr marL="457200" algn="l" defTabSz="457200" rtl="0" eaLnBrk="1" latinLnBrk="0" hangingPunct="1">
+      <a:defRPr sz="1200" kern="1200">
+        <a:solidFill>
+          <a:schemeClr val="tx1"/>
+        </a:solidFill>
+        <a:latin typeface="+mn-lt"/>
+        <a:ea typeface="+mn-ea"/>
+        <a:cs typeface="+mn-cs"/>
+      </a:defRPr>
+    </a:lvl2pPr>
+    <a:lvl3pPr marL="914400" algn="l" defTabSz="457200" rtl="0" eaLnBrk="1" latinLnBrk="0" hangingPunct="1">
+      <a:defRPr sz="1200" kern="1200">
+        <a:solidFill>
+          <a:schemeClr val="tx1"/>
+        </a:solidFill>
+        <a:latin typeface="+mn-lt"/>
+        <a:ea typeface="+mn-ea"/>
+        <a:cs typeface="+mn-cs"/>
+      </a:defRPr>
+    </a:lvl3pPr>
+    <a:lvl4pPr marL="1371600" algn="l" defTabSz="457200" rtl="0" eaLnBrk="1" latinLnBrk="0" hangingPunct="1">
+      <a:defRPr sz="1200" kern="1200">
+        <a:solidFill>
+          <a:schemeClr val="tx1"/>
+        </a:solidFill>
+        <a:latin typeface="+mn-lt"/>
+        <a:ea typeface="+mn-ea"/>
+        <a:cs typeface="+mn-cs"/>
+      </a:defRPr>
+    </a:lvl4pPr>
+    <a:lvl5pPr marL="1828800" algn="l" defTabSz="457200" rtl="0" eaLnBrk="1" latinLnBrk="0" hangingPunct="1">
+      <a:defRPr sz="1200" kern="1200">
+        <a:solidFill>
+          <a:schemeClr val="tx1"/>
+        </a:solidFill>
+        <a:latin typeface="+mn-lt"/>
+        <a:ea typeface="+mn-ea"/>
+        <a:cs typeface="+mn-cs"/>
+      </a:defRPr>
+    </a:lvl5pPr>
+    <a:lvl6pPr marL="2286000" algn="l" defTabSz="457200" rtl="0" eaLnBrk="1" latinLnBrk="0" hangingPunct="1">
+      <a:defRPr sz="1200" kern="1200">
+        <a:solidFill>
+          <a:schemeClr val="tx1"/>
+        </a:solidFill>
+        <a:latin typeface="+mn-lt"/>
+        <a:ea typeface="+mn-ea"/>
+        <a:cs typeface="+mn-cs"/>
+      </a:defRPr>
+    </a:lvl6pPr>
+    <a:lvl7pPr marL="2743200" algn="l" defTabSz="457200" rtl="0" eaLnBrk="1" latinLnBrk="0" hangingPunct="1">
+      <a:defRPr sz="1200" kern="1200">
+        <a:solidFill>
+          <a:schemeClr val="tx1"/>
+        </a:solidFill>
+        <a:latin typeface="+mn-lt"/>
+        <a:ea typeface="+mn-ea"/>
+        <a:cs typeface="+mn-cs"/>
+      </a:defRPr>
+    </a:lvl7pPr>
+    <a:lvl8pPr marL="3200400" algn="l" defTabSz="457200" rtl="0" eaLnBrk="1" latinLnBrk="0" hangingPunct="1">
+      <a:defRPr sz="1200" kern="1200">
+        <a:solidFill>
+          <a:schemeClr val="tx1"/>
+        </a:solidFill>
+        <a:latin typeface="+mn-lt"/>
+        <a:ea typeface="+mn-ea"/>
+        <a:cs typeface="+mn-cs"/>
+      </a:defRPr>
+    </a:lvl8pPr>
+    <a:lvl9pPr marL="3657600" algn="l" defTabSz="457200" rtl="0" eaLnBrk="1" latinLnBrk="0" hangingPunct="1">
+      <a:defRPr sz="1200" kern="1200">
+        <a:solidFill>
+          <a:schemeClr val="tx1"/>
+        </a:solidFill>
+        <a:latin typeface="+mn-lt"/>
+        <a:ea typeface="+mn-ea"/>
+        <a:cs typeface="+mn-cs"/>
+      </a:defRPr>
+    </a:lvl9pPr>
+  </p:notesStyle>
+</p:notesMaster>
+</file>
+
+<file path=ppt/notesSlides/notesSlide1.xml><?xml version="1.0" encoding="utf-8"?>
+<p:notes xmlns:a="http://schemas.openxmlformats.org/drawingml/2006/main" xmlns:p="http://schemas.openxmlformats.org/presentationml/2006/main" xmlns:r="http://schemas.openxmlformats.org/officeDocument/2006/relationships">
+  <p:cSld>
+    <p:spTree>
+      <p:nvGrpSpPr>
+        <p:cNvPr id="1" name=""/>
+        <p:cNvGrpSpPr/>
+        <p:nvPr/>
+      </p:nvGrpSpPr>
+      <p:grpSpPr>
+        <a:xfrm>
+          <a:off x="0" y="0"/>
+          <a:ext cx="0" cy="0"/>
+          <a:chOff x="0" y="0"/>
+          <a:chExt cx="0" cy="0"/>
+        </a:xfrm>
+      </p:grpSpPr>
+      <p:sp>
+        <p:nvSpPr>
+          <p:cNvPr id="2" name="Slide Image Placeholder 1"/>
+          <p:cNvSpPr>
+            <a:spLocks noGrp="1"/>
+          </p:cNvSpPr>
+          <p:nvPr>
+            <p:ph type="sldImg" idx="2"/>
+          </p:nvPr>
+        </p:nvSpPr>
+        <p:spPr/>
+      </p:sp>
+      <p:sp>
+        <p:nvSpPr>
+          <p:cNvPr id="3" name="Notes Placeholder 2"/>
+          <p:cNvSpPr>
+            <a:spLocks noGrp="1"/>
+          </p:cNvSpPr>
+          <p:nvPr>
+            <p:ph type="body" idx="3" sz="quarter"/>
+          </p:nvPr>
+        </p:nvSpPr>
+        <p:spPr/>
+        <p:txBody>
+          <a:bodyPr/>
+          <a:lstStyle/>
+          <a:p>
+            <a:r>
+              <a:t>30-second framing: this is the project you emailed about. Three parts: the ML result you asked about, a chemistry finding that explains its ceiling, and where the remaining signal is. Everything is leave-extractants-out and out-of-fold.</a:t>
+            </a:r>
+          </a:p>
+        </p:txBody>
+      </p:sp>
+      <p:sp>
+        <p:nvSpPr>
+          <p:cNvPr id="4" name="Slide Number Placeholder 3"/>
+          <p:cNvSpPr>
+            <a:spLocks noGrp="1"/>
+          </p:cNvSpPr>
+          <p:nvPr>
+            <p:ph type="sldNum" idx="5" sz="quarter"/>
+          </p:nvPr>
+        </p:nvSpPr>
+        <p:spPr/>
+      </p:sp>
+    </p:spTree>
+  </p:cSld>
+  <p:clrMapOvr>
+    <a:masterClrMapping/>
+  </p:clrMapOvr>
+</p:notes>
+</file>
+
+<file path=ppt/notesSlides/notesSlide10.xml><?xml version="1.0" encoding="utf-8"?>
+<p:notes xmlns:a="http://schemas.openxmlformats.org/drawingml/2006/main" xmlns:p="http://schemas.openxmlformats.org/presentationml/2006/main" xmlns:r="http://schemas.openxmlformats.org/officeDocument/2006/relationships">
+  <p:cSld>
+    <p:spTree>
+      <p:nvGrpSpPr>
+        <p:cNvPr id="1" name=""/>
+        <p:cNvGrpSpPr/>
+        <p:nvPr/>
+      </p:nvGrpSpPr>
+      <p:grpSpPr>
+        <a:xfrm>
+          <a:off x="0" y="0"/>
+          <a:ext cx="0" cy="0"/>
+          <a:chOff x="0" y="0"/>
+          <a:chExt cx="0" cy="0"/>
+        </a:xfrm>
+      </p:grpSpPr>
+      <p:sp>
+        <p:nvSpPr>
+          <p:cNvPr id="2" name="Slide Image Placeholder 1"/>
+          <p:cNvSpPr>
+            <a:spLocks noGrp="1"/>
+          </p:cNvSpPr>
+          <p:nvPr>
+            <p:ph type="sldImg" idx="2"/>
+          </p:nvPr>
+        </p:nvSpPr>
+        <p:spPr/>
+      </p:sp>
+      <p:sp>
+        <p:nvSpPr>
+          <p:cNvPr id="3" name="Notes Placeholder 2"/>
+          <p:cNvSpPr>
+            <a:spLocks noGrp="1"/>
+          </p:cNvSpPr>
+          <p:nvPr>
+            <p:ph type="body" idx="3" sz="quarter"/>
+          </p:nvPr>
+        </p:nvSpPr>
+        <p:spPr/>
+        <p:txBody>
+          <a:bodyPr/>
+          <a:lstStyle/>
+          <a:p>
+            <a:r>
+              <a:t>CatBoost chain: RMSE-&gt;MAE (+0.107) -&gt; Quantile(0.6) -&gt; hyperparameters re-tuned under the winning loss (+0.021 more; +0.016 of it confirmed on a held-out third). 3D: contrast weight 2-&gt;4. Fingerprint unchanged. If asked why quantile: log D has a heavy left tail; an upper quantile down-weights it.</a:t>
+            </a:r>
+          </a:p>
+        </p:txBody>
+      </p:sp>
+      <p:sp>
+        <p:nvSpPr>
+          <p:cNvPr id="4" name="Slide Number Placeholder 3"/>
+          <p:cNvSpPr>
+            <a:spLocks noGrp="1"/>
+          </p:cNvSpPr>
+          <p:nvPr>
+            <p:ph type="sldNum" idx="5" sz="quarter"/>
+          </p:nvPr>
+        </p:nvSpPr>
+        <p:spPr/>
+      </p:sp>
+    </p:spTree>
+  </p:cSld>
+  <p:clrMapOvr>
+    <a:masterClrMapping/>
+  </p:clrMapOvr>
+</p:notes>
+</file>
+
+<file path=ppt/notesSlides/notesSlide11.xml><?xml version="1.0" encoding="utf-8"?>
+<p:notes xmlns:a="http://schemas.openxmlformats.org/drawingml/2006/main" xmlns:p="http://schemas.openxmlformats.org/presentationml/2006/main" xmlns:r="http://schemas.openxmlformats.org/officeDocument/2006/relationships">
+  <p:cSld>
+    <p:spTree>
+      <p:nvGrpSpPr>
+        <p:cNvPr id="1" name=""/>
+        <p:cNvGrpSpPr/>
+        <p:nvPr/>
+      </p:nvGrpSpPr>
+      <p:grpSpPr>
+        <a:xfrm>
+          <a:off x="0" y="0"/>
+          <a:ext cx="0" cy="0"/>
+          <a:chOff x="0" y="0"/>
+          <a:chExt cx="0" cy="0"/>
+        </a:xfrm>
+      </p:grpSpPr>
+      <p:sp>
+        <p:nvSpPr>
+          <p:cNvPr id="2" name="Slide Image Placeholder 1"/>
+          <p:cNvSpPr>
+            <a:spLocks noGrp="1"/>
+          </p:cNvSpPr>
+          <p:nvPr>
+            <p:ph type="sldImg" idx="2"/>
+          </p:nvPr>
+        </p:nvSpPr>
+        <p:spPr/>
+      </p:sp>
+      <p:sp>
+        <p:nvSpPr>
+          <p:cNvPr id="3" name="Notes Placeholder 2"/>
+          <p:cNvSpPr>
+            <a:spLocks noGrp="1"/>
+          </p:cNvSpPr>
+          <p:nvPr>
+            <p:ph type="body" idx="3" sz="quarter"/>
+          </p:nvPr>
+        </p:nvSpPr>
+        <p:spPr/>
+        <p:txBody>
+          <a:bodyPr/>
+          <a:lstStyle/>
+          <a:p>
+            <a:r>
+              <a:t>Three caveats live HERE, not in backup: (1) contribution shrank 0.038-&gt;0.023 as partners improved — predicted by the error-correlation mechanism; (2) strict key halves it, and the published contribution was already indistinguishable there — some of the 3D gain lives in condition binning; (3) exploratory: both improved components tuned on data inside this population; every clean held-out partition is spent. Next confirmatory step = fresh split.</a:t>
+            </a:r>
+          </a:p>
+        </p:txBody>
+      </p:sp>
+      <p:sp>
+        <p:nvSpPr>
+          <p:cNvPr id="4" name="Slide Number Placeholder 3"/>
+          <p:cNvSpPr>
+            <a:spLocks noGrp="1"/>
+          </p:cNvSpPr>
+          <p:nvPr>
+            <p:ph type="sldNum" idx="5" sz="quarter"/>
+          </p:nvPr>
+        </p:nvSpPr>
+        <p:spPr/>
+      </p:sp>
+    </p:spTree>
+  </p:cSld>
+  <p:clrMapOvr>
+    <a:masterClrMapping/>
+  </p:clrMapOvr>
+</p:notes>
+</file>
+
+<file path=ppt/notesSlides/notesSlide12.xml><?xml version="1.0" encoding="utf-8"?>
+<p:notes xmlns:a="http://schemas.openxmlformats.org/drawingml/2006/main" xmlns:p="http://schemas.openxmlformats.org/presentationml/2006/main" xmlns:r="http://schemas.openxmlformats.org/officeDocument/2006/relationships">
+  <p:cSld>
+    <p:spTree>
+      <p:nvGrpSpPr>
+        <p:cNvPr id="1" name=""/>
+        <p:cNvGrpSpPr/>
+        <p:nvPr/>
+      </p:nvGrpSpPr>
+      <p:grpSpPr>
+        <a:xfrm>
+          <a:off x="0" y="0"/>
+          <a:ext cx="0" cy="0"/>
+          <a:chOff x="0" y="0"/>
+          <a:chExt cx="0" cy="0"/>
+        </a:xfrm>
+      </p:grpSpPr>
+      <p:sp>
+        <p:nvSpPr>
+          <p:cNvPr id="2" name="Slide Image Placeholder 1"/>
+          <p:cNvSpPr>
+            <a:spLocks noGrp="1"/>
+          </p:cNvSpPr>
+          <p:nvPr>
+            <p:ph type="sldImg" idx="2"/>
+          </p:nvPr>
+        </p:nvSpPr>
+        <p:spPr/>
+      </p:sp>
+      <p:sp>
+        <p:nvSpPr>
+          <p:cNvPr id="3" name="Notes Placeholder 2"/>
+          <p:cNvSpPr>
+            <a:spLocks noGrp="1"/>
+          </p:cNvSpPr>
+          <p:nvPr>
+            <p:ph type="body" idx="3" sz="quarter"/>
+          </p:nvPr>
+        </p:nvSpPr>
+        <p:spPr/>
+        <p:txBody>
+          <a:bodyPr/>
+          <a:lstStyle/>
+          <a:p>
+            <a:r>
+              <a:t>The parameter file: every lanthanide parameter Ce(58)-&gt;Lu(71) is linear interpolation between two anchors, residual 5e-7 = printed precision. Authors' documented design (f-in-core), not our discovery — the CONSEQUENCE is ours: one scalar of metal information, already present as the Shannon radius column. Retrodicts encoder interchangeability: 8 encoders, effective rank 1.05; two architectures correlate 0.986 = two seeds of one architecture.</a:t>
+            </a:r>
+          </a:p>
+        </p:txBody>
+      </p:sp>
+      <p:sp>
+        <p:nvSpPr>
+          <p:cNvPr id="4" name="Slide Number Placeholder 3"/>
+          <p:cNvSpPr>
+            <a:spLocks noGrp="1"/>
+          </p:cNvSpPr>
+          <p:nvPr>
+            <p:ph type="sldNum" idx="5" sz="quarter"/>
+          </p:nvPr>
+        </p:nvSpPr>
+        <p:spPr/>
+      </p:sp>
+    </p:spTree>
+  </p:cSld>
+  <p:clrMapOvr>
+    <a:masterClrMapping/>
+  </p:clrMapOvr>
+</p:notes>
+</file>
+
+<file path=ppt/notesSlides/notesSlide13.xml><?xml version="1.0" encoding="utf-8"?>
+<p:notes xmlns:a="http://schemas.openxmlformats.org/drawingml/2006/main" xmlns:p="http://schemas.openxmlformats.org/presentationml/2006/main" xmlns:r="http://schemas.openxmlformats.org/officeDocument/2006/relationships">
+  <p:cSld>
+    <p:spTree>
+      <p:nvGrpSpPr>
+        <p:cNvPr id="1" name=""/>
+        <p:cNvGrpSpPr/>
+        <p:nvPr/>
+      </p:nvGrpSpPr>
+      <p:grpSpPr>
+        <a:xfrm>
+          <a:off x="0" y="0"/>
+          <a:ext cx="0" cy="0"/>
+          <a:chOff x="0" y="0"/>
+          <a:chExt cx="0" cy="0"/>
+        </a:xfrm>
+      </p:grpSpPr>
+      <p:sp>
+        <p:nvSpPr>
+          <p:cNvPr id="2" name="Slide Image Placeholder 1"/>
+          <p:cNvSpPr>
+            <a:spLocks noGrp="1"/>
+          </p:cNvSpPr>
+          <p:nvPr>
+            <p:ph type="sldImg" idx="2"/>
+          </p:nvPr>
+        </p:nvSpPr>
+        <p:spPr/>
+      </p:sp>
+      <p:sp>
+        <p:nvSpPr>
+          <p:cNvPr id="3" name="Notes Placeholder 2"/>
+          <p:cNvSpPr>
+            <a:spLocks noGrp="1"/>
+          </p:cNvSpPr>
+          <p:nvPr>
+            <p:ph type="body" idx="3" sz="quarter"/>
+          </p:nvPr>
+        </p:nvSpPr>
+        <p:spPr/>
+        <p:txBody>
+          <a:bodyPr/>
+          <a:lstStyle/>
+          <a:p>
+            <a:r>
+              <a:t>Construction: take one relaxed anchor per ligand family, substitute all 15 lanthanides, re-relax — series in correspondence, so the slope is clean of conformer noise. c_L = d&lt;M-donor&gt;/d r_Shannon; experiment = 1.00 by construction. GFN2 0.41 (2.47x under), g-xTB 1.08. 71/71 ligands improve, paired p=5e-52. Replicated in implicit solvent and on an independent 6-ligand pilot. GFN2's response is also mostly noise: 23% shared across ligands vs 96%.</a:t>
+            </a:r>
+          </a:p>
+        </p:txBody>
+      </p:sp>
+      <p:sp>
+        <p:nvSpPr>
+          <p:cNvPr id="4" name="Slide Number Placeholder 3"/>
+          <p:cNvSpPr>
+            <a:spLocks noGrp="1"/>
+          </p:cNvSpPr>
+          <p:nvPr>
+            <p:ph type="sldNum" idx="5" sz="quarter"/>
+          </p:nvPr>
+        </p:nvSpPr>
+        <p:spPr/>
+      </p:sp>
+    </p:spTree>
+  </p:cSld>
+  <p:clrMapOvr>
+    <a:masterClrMapping/>
+  </p:clrMapOvr>
+</p:notes>
+</file>
+
+<file path=ppt/notesSlides/notesSlide14.xml><?xml version="1.0" encoding="utf-8"?>
+<p:notes xmlns:a="http://schemas.openxmlformats.org/drawingml/2006/main" xmlns:p="http://schemas.openxmlformats.org/presentationml/2006/main" xmlns:r="http://schemas.openxmlformats.org/officeDocument/2006/relationships">
+  <p:cSld>
+    <p:spTree>
+      <p:nvGrpSpPr>
+        <p:cNvPr id="1" name=""/>
+        <p:cNvGrpSpPr/>
+        <p:nvPr/>
+      </p:nvGrpSpPr>
+      <p:grpSpPr>
+        <a:xfrm>
+          <a:off x="0" y="0"/>
+          <a:ext cx="0" cy="0"/>
+          <a:chOff x="0" y="0"/>
+          <a:chExt cx="0" cy="0"/>
+        </a:xfrm>
+      </p:grpSpPr>
+      <p:sp>
+        <p:nvSpPr>
+          <p:cNvPr id="2" name="Slide Image Placeholder 1"/>
+          <p:cNvSpPr>
+            <a:spLocks noGrp="1"/>
+          </p:cNvSpPr>
+          <p:nvPr>
+            <p:ph type="sldImg" idx="2"/>
+          </p:nvPr>
+        </p:nvSpPr>
+        <p:spPr/>
+      </p:sp>
+      <p:sp>
+        <p:nvSpPr>
+          <p:cNvPr id="3" name="Notes Placeholder 2"/>
+          <p:cNvSpPr>
+            <a:spLocks noGrp="1"/>
+          </p:cNvSpPr>
+          <p:nvPr>
+            <p:ph type="body" idx="3" sz="quarter"/>
+          </p:nvPr>
+        </p:nvSpPr>
+        <p:spPr/>
+        <p:txBody>
+          <a:bodyPr/>
+          <a:lstStyle/>
+          <a:p>
+            <a:r>
+              <a:t>Be precise here; he will know the Grimme literature. Bursch 2017: GFN1, 80 complexes, per-complex RMSD vs CSD — no series trend. Ln-xTB (Zhang, JCC 2026, NEW): GFN2 Ln bond MAD 0.134 A vs DFT — absolute errors, reference is DFT not experiment; I could not access full text yet — obligation to read before submission. g-xTB preprint: ~32k relative ENERGIES, no lanthanide geometry validation at all. So: the DERIVATIVE observable, the experiment reference, the g-xTB geometry validation, and the link to ML rank collapse are ours. Natural follow-up: run the same benchmark on Ln-xTB — also the pre-registered falsifying test.</a:t>
+            </a:r>
+          </a:p>
+        </p:txBody>
+      </p:sp>
+      <p:sp>
+        <p:nvSpPr>
+          <p:cNvPr id="4" name="Slide Number Placeholder 3"/>
+          <p:cNvSpPr>
+            <a:spLocks noGrp="1"/>
+          </p:cNvSpPr>
+          <p:nvPr>
+            <p:ph type="sldNum" idx="5" sz="quarter"/>
+          </p:nvPr>
+        </p:nvSpPr>
+        <p:spPr/>
+      </p:sp>
+    </p:spTree>
+  </p:cSld>
+  <p:clrMapOvr>
+    <a:masterClrMapping/>
+  </p:clrMapOvr>
+</p:notes>
+</file>
+
+<file path=ppt/notesSlides/notesSlide15.xml><?xml version="1.0" encoding="utf-8"?>
+<p:notes xmlns:a="http://schemas.openxmlformats.org/drawingml/2006/main" xmlns:p="http://schemas.openxmlformats.org/presentationml/2006/main" xmlns:r="http://schemas.openxmlformats.org/officeDocument/2006/relationships">
+  <p:cSld>
+    <p:spTree>
+      <p:nvGrpSpPr>
+        <p:cNvPr id="1" name=""/>
+        <p:cNvGrpSpPr/>
+        <p:nvPr/>
+      </p:nvGrpSpPr>
+      <p:grpSpPr>
+        <a:xfrm>
+          <a:off x="0" y="0"/>
+          <a:ext cx="0" cy="0"/>
+          <a:chOff x="0" y="0"/>
+          <a:chExt cx="0" cy="0"/>
+        </a:xfrm>
+      </p:grpSpPr>
+      <p:sp>
+        <p:nvSpPr>
+          <p:cNvPr id="2" name="Slide Image Placeholder 1"/>
+          <p:cNvSpPr>
+            <a:spLocks noGrp="1"/>
+          </p:cNvSpPr>
+          <p:nvPr>
+            <p:ph type="sldImg" idx="2"/>
+          </p:nvPr>
+        </p:nvSpPr>
+        <p:spPr/>
+      </p:sp>
+      <p:sp>
+        <p:nvSpPr>
+          <p:cNvPr id="3" name="Notes Placeholder 2"/>
+          <p:cNvSpPr>
+            <a:spLocks noGrp="1"/>
+          </p:cNvSpPr>
+          <p:nvPr>
+            <p:ph type="body" idx="3" sz="quarter"/>
+          </p:nvPr>
+        </p:nvSpPr>
+        <p:spPr/>
+        <p:txBody>
+          <a:bodyPr/>
+          <a:lstStyle/>
+          <a:p>
+            <a:r>
+              <a:t>The punchline of act 2. Four representation-side interventions, all null/harmful, all powered. Tell the shrinkage story: a +0.033 p=0.02 7/8-seed 'gain' died because rescaling the OLD geometry by one constant recovered 237% of it — R² on a weak baseline rises when predictions shrink. Conclusion: the missing information is not in the coordinates.</a:t>
+            </a:r>
+          </a:p>
+        </p:txBody>
+      </p:sp>
+      <p:sp>
+        <p:nvSpPr>
+          <p:cNvPr id="4" name="Slide Number Placeholder 3"/>
+          <p:cNvSpPr>
+            <a:spLocks noGrp="1"/>
+          </p:cNvSpPr>
+          <p:nvPr>
+            <p:ph type="sldNum" idx="5" sz="quarter"/>
+          </p:nvPr>
+        </p:nvSpPr>
+        <p:spPr/>
+      </p:sp>
+    </p:spTree>
+  </p:cSld>
+  <p:clrMapOvr>
+    <a:masterClrMapping/>
+  </p:clrMapOvr>
+</p:notes>
+</file>
+
+<file path=ppt/notesSlides/notesSlide16.xml><?xml version="1.0" encoding="utf-8"?>
+<p:notes xmlns:a="http://schemas.openxmlformats.org/drawingml/2006/main" xmlns:p="http://schemas.openxmlformats.org/presentationml/2006/main" xmlns:r="http://schemas.openxmlformats.org/officeDocument/2006/relationships">
+  <p:cSld>
+    <p:spTree>
+      <p:nvGrpSpPr>
+        <p:cNvPr id="1" name=""/>
+        <p:cNvGrpSpPr/>
+        <p:nvPr/>
+      </p:nvGrpSpPr>
+      <p:grpSpPr>
+        <a:xfrm>
+          <a:off x="0" y="0"/>
+          <a:ext cx="0" cy="0"/>
+          <a:chOff x="0" y="0"/>
+          <a:chExt cx="0" cy="0"/>
+        </a:xfrm>
+      </p:grpSpPr>
+      <p:sp>
+        <p:nvSpPr>
+          <p:cNvPr id="2" name="Slide Image Placeholder 1"/>
+          <p:cNvSpPr>
+            <a:spLocks noGrp="1"/>
+          </p:cNvSpPr>
+          <p:nvPr>
+            <p:ph type="sldImg" idx="2"/>
+          </p:nvPr>
+        </p:nvSpPr>
+        <p:spPr/>
+      </p:sp>
+      <p:sp>
+        <p:nvSpPr>
+          <p:cNvPr id="3" name="Notes Placeholder 2"/>
+          <p:cNvSpPr>
+            <a:spLocks noGrp="1"/>
+          </p:cNvSpPr>
+          <p:nvPr>
+            <p:ph type="body" idx="3" sz="quarter"/>
+          </p:nvPr>
+        </p:nvSpPr>
+        <p:spPr/>
+        <p:txBody>
+          <a:bodyPr/>
+          <a:lstStyle/>
+          <a:p>
+            <a:r>
+              <a:t>The same single change — contrast-term weight 2-&gt;4 — on both encoders, disjoint seed sets: +0.0142 (40 seeds, p=0.014) and +0.0146 (24 seeds, p=0.035). Objective-level effect, not encoder artefact. Cost: overall log D dips 0.015 — a selectivity setting. History note if asked: an early 8-seed estimate said +0.027; independent seeds halved it — the power lesson of slide 18.</a:t>
+            </a:r>
+          </a:p>
+        </p:txBody>
+      </p:sp>
+      <p:sp>
+        <p:nvSpPr>
+          <p:cNvPr id="4" name="Slide Number Placeholder 3"/>
+          <p:cNvSpPr>
+            <a:spLocks noGrp="1"/>
+          </p:cNvSpPr>
+          <p:nvPr>
+            <p:ph type="sldNum" idx="5" sz="quarter"/>
+          </p:nvPr>
+        </p:nvSpPr>
+        <p:spPr/>
+      </p:sp>
+    </p:spTree>
+  </p:cSld>
+  <p:clrMapOvr>
+    <a:masterClrMapping/>
+  </p:clrMapOvr>
+</p:notes>
+</file>
+
+<file path=ppt/notesSlides/notesSlide17.xml><?xml version="1.0" encoding="utf-8"?>
+<p:notes xmlns:a="http://schemas.openxmlformats.org/drawingml/2006/main" xmlns:p="http://schemas.openxmlformats.org/presentationml/2006/main" xmlns:r="http://schemas.openxmlformats.org/officeDocument/2006/relationships">
+  <p:cSld>
+    <p:spTree>
+      <p:nvGrpSpPr>
+        <p:cNvPr id="1" name=""/>
+        <p:cNvGrpSpPr/>
+        <p:nvPr/>
+      </p:nvGrpSpPr>
+      <p:grpSpPr>
+        <a:xfrm>
+          <a:off x="0" y="0"/>
+          <a:ext cx="0" cy="0"/>
+          <a:chOff x="0" y="0"/>
+          <a:chExt cx="0" cy="0"/>
+        </a:xfrm>
+      </p:grpSpPr>
+      <p:sp>
+        <p:nvSpPr>
+          <p:cNvPr id="2" name="Slide Image Placeholder 1"/>
+          <p:cNvSpPr>
+            <a:spLocks noGrp="1"/>
+          </p:cNvSpPr>
+          <p:nvPr>
+            <p:ph type="sldImg" idx="2"/>
+          </p:nvPr>
+        </p:nvSpPr>
+        <p:spPr/>
+      </p:sp>
+      <p:sp>
+        <p:nvSpPr>
+          <p:cNvPr id="3" name="Notes Placeholder 2"/>
+          <p:cNvSpPr>
+            <a:spLocks noGrp="1"/>
+          </p:cNvSpPr>
+          <p:nvPr>
+            <p:ph type="body" idx="3" sz="quarter"/>
+          </p:nvPr>
+        </p:nvSpPr>
+        <p:spPr/>
+        <p:txBody>
+          <a:bodyPr/>
+          <a:lstStyle/>
+          <a:p>
+            <a:r>
+              <a:t>Naive noise math gives an impossible negative ceiling (within-block scatter 0.72-0.95 &gt; separation spread 0.224) — resolved because condition effects are shared by both metals of a pair and cancel on differencing: repeated separations reproduce to 0.153. Ceiling 1-(0.153/0.224)^2 ~ 0.53, a LOWER bound. We are at ~60%. Remaining signal: conditions, direct pair modelling — not geometry (~1%).</a:t>
+            </a:r>
+          </a:p>
+        </p:txBody>
+      </p:sp>
+      <p:sp>
+        <p:nvSpPr>
+          <p:cNvPr id="4" name="Slide Number Placeholder 3"/>
+          <p:cNvSpPr>
+            <a:spLocks noGrp="1"/>
+          </p:cNvSpPr>
+          <p:nvPr>
+            <p:ph type="sldNum" idx="5" sz="quarter"/>
+          </p:nvPr>
+        </p:nvSpPr>
+        <p:spPr/>
+      </p:sp>
+    </p:spTree>
+  </p:cSld>
+  <p:clrMapOvr>
+    <a:masterClrMapping/>
+  </p:clrMapOvr>
+</p:notes>
+</file>
+
+<file path=ppt/notesSlides/notesSlide18.xml><?xml version="1.0" encoding="utf-8"?>
+<p:notes xmlns:a="http://schemas.openxmlformats.org/drawingml/2006/main" xmlns:p="http://schemas.openxmlformats.org/presentationml/2006/main" xmlns:r="http://schemas.openxmlformats.org/officeDocument/2006/relationships">
+  <p:cSld>
+    <p:spTree>
+      <p:nvGrpSpPr>
+        <p:cNvPr id="1" name=""/>
+        <p:cNvGrpSpPr/>
+        <p:nvPr/>
+      </p:nvGrpSpPr>
+      <p:grpSpPr>
+        <a:xfrm>
+          <a:off x="0" y="0"/>
+          <a:ext cx="0" cy="0"/>
+          <a:chOff x="0" y="0"/>
+          <a:chExt cx="0" cy="0"/>
+        </a:xfrm>
+      </p:grpSpPr>
+      <p:sp>
+        <p:nvSpPr>
+          <p:cNvPr id="2" name="Slide Image Placeholder 1"/>
+          <p:cNvSpPr>
+            <a:spLocks noGrp="1"/>
+          </p:cNvSpPr>
+          <p:nvPr>
+            <p:ph type="sldImg" idx="2"/>
+          </p:nvPr>
+        </p:nvSpPr>
+        <p:spPr/>
+      </p:sp>
+      <p:sp>
+        <p:nvSpPr>
+          <p:cNvPr id="3" name="Notes Placeholder 2"/>
+          <p:cNvSpPr>
+            <a:spLocks noGrp="1"/>
+          </p:cNvSpPr>
+          <p:nvPr>
+            <p:ph type="body" idx="3" sz="quarter"/>
+          </p:nvPr>
+        </p:nvSpPr>
+        <p:spPr/>
+        <p:txBody>
+          <a:bodyPr/>
+          <a:lstStyle/>
+          <a:p>
+            <a:r>
+              <a:t>Each has a one-line story: (1) C8 geometry-only +0.033 -&gt; scale-free check reversed it; (2) a quantile setting +0.017 on 4/4 seeds -&gt; +0.002 at 8; (3) plw4 +0.027 p=0.021 -&gt; +0.014 pooled over 40 independent seeds. Silent no-ops: 5 flags incl. the pair head — accepted, logged as enabled, ignored; untested for the entire study without anyone knowing. Gate now raises.</a:t>
+            </a:r>
+          </a:p>
+        </p:txBody>
+      </p:sp>
+      <p:sp>
+        <p:nvSpPr>
+          <p:cNvPr id="4" name="Slide Number Placeholder 3"/>
+          <p:cNvSpPr>
+            <a:spLocks noGrp="1"/>
+          </p:cNvSpPr>
+          <p:nvPr>
+            <p:ph type="sldNum" idx="5" sz="quarter"/>
+          </p:nvPr>
+        </p:nvSpPr>
+        <p:spPr/>
+      </p:sp>
+    </p:spTree>
+  </p:cSld>
+  <p:clrMapOvr>
+    <a:masterClrMapping/>
+  </p:clrMapOvr>
+</p:notes>
+</file>
+
+<file path=ppt/notesSlides/notesSlide19.xml><?xml version="1.0" encoding="utf-8"?>
+<p:notes xmlns:a="http://schemas.openxmlformats.org/drawingml/2006/main" xmlns:p="http://schemas.openxmlformats.org/presentationml/2006/main" xmlns:r="http://schemas.openxmlformats.org/officeDocument/2006/relationships">
+  <p:cSld>
+    <p:spTree>
+      <p:nvGrpSpPr>
+        <p:cNvPr id="1" name=""/>
+        <p:cNvGrpSpPr/>
+        <p:nvPr/>
+      </p:nvGrpSpPr>
+      <p:grpSpPr>
+        <a:xfrm>
+          <a:off x="0" y="0"/>
+          <a:ext cx="0" cy="0"/>
+          <a:chOff x="0" y="0"/>
+          <a:chExt cx="0" cy="0"/>
+        </a:xfrm>
+      </p:grpSpPr>
+      <p:sp>
+        <p:nvSpPr>
+          <p:cNvPr id="2" name="Slide Image Placeholder 1"/>
+          <p:cNvSpPr>
+            <a:spLocks noGrp="1"/>
+          </p:cNvSpPr>
+          <p:nvPr>
+            <p:ph type="sldImg" idx="2"/>
+          </p:nvPr>
+        </p:nvSpPr>
+        <p:spPr/>
+      </p:sp>
+      <p:sp>
+        <p:nvSpPr>
+          <p:cNvPr id="3" name="Notes Placeholder 2"/>
+          <p:cNvSpPr>
+            <a:spLocks noGrp="1"/>
+          </p:cNvSpPr>
+          <p:nvPr>
+            <p:ph type="body" idx="3" sz="quarter"/>
+          </p:nvPr>
+        </p:nvSpPr>
+        <p:spPr/>
+        <p:txBody>
+          <a:bodyPr/>
+          <a:lstStyle/>
+          <a:p>
+            <a:r>
+              <a:t>Suggested order on the call: answer his question (2 min), best-system numbers (5), contraction benchmark + novelty (10), negatives + what works (5), discussion (rest). If time is short, slides 2, 11, 13, 14 are the talk.</a:t>
+            </a:r>
+          </a:p>
+        </p:txBody>
+      </p:sp>
+      <p:sp>
+        <p:nvSpPr>
+          <p:cNvPr id="4" name="Slide Number Placeholder 3"/>
+          <p:cNvSpPr>
+            <a:spLocks noGrp="1"/>
+          </p:cNvSpPr>
+          <p:nvPr>
+            <p:ph type="sldNum" idx="5" sz="quarter"/>
+          </p:nvPr>
+        </p:nvSpPr>
+        <p:spPr/>
+      </p:sp>
+    </p:spTree>
+  </p:cSld>
+  <p:clrMapOvr>
+    <a:masterClrMapping/>
+  </p:clrMapOvr>
+</p:notes>
+</file>
+
+<file path=ppt/notesSlides/notesSlide2.xml><?xml version="1.0" encoding="utf-8"?>
+<p:notes xmlns:a="http://schemas.openxmlformats.org/drawingml/2006/main" xmlns:p="http://schemas.openxmlformats.org/presentationml/2006/main" xmlns:r="http://schemas.openxmlformats.org/officeDocument/2006/relationships">
+  <p:cSld>
+    <p:spTree>
+      <p:nvGrpSpPr>
+        <p:cNvPr id="1" name=""/>
+        <p:cNvGrpSpPr/>
+        <p:nvPr/>
+      </p:nvGrpSpPr>
+      <p:grpSpPr>
+        <a:xfrm>
+          <a:off x="0" y="0"/>
+          <a:ext cx="0" cy="0"/>
+          <a:chOff x="0" y="0"/>
+          <a:chExt cx="0" cy="0"/>
+        </a:xfrm>
+      </p:grpSpPr>
+      <p:sp>
+        <p:nvSpPr>
+          <p:cNvPr id="2" name="Slide Image Placeholder 1"/>
+          <p:cNvSpPr>
+            <a:spLocks noGrp="1"/>
+          </p:cNvSpPr>
+          <p:nvPr>
+            <p:ph type="sldImg" idx="2"/>
+          </p:nvPr>
+        </p:nvSpPr>
+        <p:spPr/>
+      </p:sp>
+      <p:sp>
+        <p:nvSpPr>
+          <p:cNvPr id="3" name="Notes Placeholder 2"/>
+          <p:cNvSpPr>
+            <a:spLocks noGrp="1"/>
+          </p:cNvSpPr>
+          <p:nvPr>
+            <p:ph type="body" idx="3" sz="quarter"/>
+          </p:nvPr>
+        </p:nvSpPr>
+        <p:spPr/>
+        <p:txBody>
+          <a:bodyPr/>
+          <a:lstStyle/>
+          <a:p>
+            <a:r>
+              <a:t>He is reacting to the July numbers: boosting 0.142, fingerprint 0.221, 3D 0.238, stack 0.267. On those, his reading was fair. Two things changed: the boosting loss (RMSE-&gt;Quantile 0.6, +0.136) and the 3D contrast weight (2-&gt;4, +0.015). Say plainly: single-model superiority is gone; complementarity survived and the best system still needs the 3D arm, largest stack weight 0.46. If he pushes: the strict-key bound is slide 11, don't dodge it.</a:t>
+            </a:r>
+          </a:p>
+        </p:txBody>
+      </p:sp>
+      <p:sp>
+        <p:nvSpPr>
+          <p:cNvPr id="4" name="Slide Number Placeholder 3"/>
+          <p:cNvSpPr>
+            <a:spLocks noGrp="1"/>
+          </p:cNvSpPr>
+          <p:nvPr>
+            <p:ph type="sldNum" idx="5" sz="quarter"/>
+          </p:nvPr>
+        </p:nvSpPr>
+        <p:spPr/>
+      </p:sp>
+    </p:spTree>
+  </p:cSld>
+  <p:clrMapOvr>
+    <a:masterClrMapping/>
+  </p:clrMapOvr>
+</p:notes>
+</file>
+
+<file path=ppt/notesSlides/notesSlide3.xml><?xml version="1.0" encoding="utf-8"?>
+<p:notes xmlns:a="http://schemas.openxmlformats.org/drawingml/2006/main" xmlns:p="http://schemas.openxmlformats.org/presentationml/2006/main" xmlns:r="http://schemas.openxmlformats.org/officeDocument/2006/relationships">
+  <p:cSld>
+    <p:spTree>
+      <p:nvGrpSpPr>
+        <p:cNvPr id="1" name=""/>
+        <p:cNvGrpSpPr/>
+        <p:nvPr/>
+      </p:nvGrpSpPr>
+      <p:grpSpPr>
+        <a:xfrm>
+          <a:off x="0" y="0"/>
+          <a:ext cx="0" cy="0"/>
+          <a:chOff x="0" y="0"/>
+          <a:chExt cx="0" cy="0"/>
+        </a:xfrm>
+      </p:grpSpPr>
+      <p:sp>
+        <p:nvSpPr>
+          <p:cNvPr id="2" name="Slide Image Placeholder 1"/>
+          <p:cNvSpPr>
+            <a:spLocks noGrp="1"/>
+          </p:cNvSpPr>
+          <p:nvPr>
+            <p:ph type="sldImg" idx="2"/>
+          </p:nvPr>
+        </p:nvSpPr>
+        <p:spPr/>
+      </p:sp>
+      <p:sp>
+        <p:nvSpPr>
+          <p:cNvPr id="3" name="Notes Placeholder 2"/>
+          <p:cNvSpPr>
+            <a:spLocks noGrp="1"/>
+          </p:cNvSpPr>
+          <p:nvPr>
+            <p:ph type="body" idx="3" sz="quarter"/>
+          </p:nvPr>
+        </p:nvSpPr>
+        <p:spPr/>
+        <p:txBody>
+          <a:bodyPr/>
+          <a:lstStyle/>
+          <a:p>
+            <a:r>
+              <a:t>Industrial context: solvent extraction is THE separation route; adjacent pairs (Nd/Pr for magnets, Dy/Tb) are the expensive ones. Metric intuition: R^2=0 already means 'predicts the average separation'; sign accuracy ~0.5. The contraction is 0.013 A per step — smaller than thermal vibration amplitudes. That is why this is a needle-in-haystack representation problem.</a:t>
+            </a:r>
+          </a:p>
+        </p:txBody>
+      </p:sp>
+      <p:sp>
+        <p:nvSpPr>
+          <p:cNvPr id="4" name="Slide Number Placeholder 3"/>
+          <p:cNvSpPr>
+            <a:spLocks noGrp="1"/>
+          </p:cNvSpPr>
+          <p:nvPr>
+            <p:ph type="sldNum" idx="5" sz="quarter"/>
+          </p:nvPr>
+        </p:nvSpPr>
+        <p:spPr/>
+      </p:sp>
+    </p:spTree>
+  </p:cSld>
+  <p:clrMapOvr>
+    <a:masterClrMapping/>
+  </p:clrMapOvr>
+</p:notes>
+</file>
+
+<file path=ppt/notesSlides/notesSlide4.xml><?xml version="1.0" encoding="utf-8"?>
+<p:notes xmlns:a="http://schemas.openxmlformats.org/drawingml/2006/main" xmlns:p="http://schemas.openxmlformats.org/presentationml/2006/main" xmlns:r="http://schemas.openxmlformats.org/officeDocument/2006/relationships">
+  <p:cSld>
+    <p:spTree>
+      <p:nvGrpSpPr>
+        <p:cNvPr id="1" name=""/>
+        <p:cNvGrpSpPr/>
+        <p:nvPr/>
+      </p:nvGrpSpPr>
+      <p:grpSpPr>
+        <a:xfrm>
+          <a:off x="0" y="0"/>
+          <a:ext cx="0" cy="0"/>
+          <a:chOff x="0" y="0"/>
+          <a:chExt cx="0" cy="0"/>
+        </a:xfrm>
+      </p:grpSpPr>
+      <p:sp>
+        <p:nvSpPr>
+          <p:cNvPr id="2" name="Slide Image Placeholder 1"/>
+          <p:cNvSpPr>
+            <a:spLocks noGrp="1"/>
+          </p:cNvSpPr>
+          <p:nvPr>
+            <p:ph type="sldImg" idx="2"/>
+          </p:nvPr>
+        </p:nvSpPr>
+        <p:spPr/>
+      </p:sp>
+      <p:sp>
+        <p:nvSpPr>
+          <p:cNvPr id="3" name="Notes Placeholder 2"/>
+          <p:cNvSpPr>
+            <a:spLocks noGrp="1"/>
+          </p:cNvSpPr>
+          <p:nvPr>
+            <p:ph type="body" idx="3" sz="quarter"/>
+          </p:nvPr>
+        </p:nvSpPr>
+        <p:spPr/>
+        <p:txBody>
+          <a:bodyPr/>
+          <a:lstStyle/>
+          <a:p>
+            <a:r>
+              <a:t>Provenance matters to him. SAFE is literature-curated; every row carries its DOI and full conditions. 181 distinct publications. The replicate structure (same system, different labs) is what later gives us the label-noise floor and the ceiling estimate. The modelled subset is the trivalent lanthanides with buildable complexes.</a:t>
+            </a:r>
+          </a:p>
+        </p:txBody>
+      </p:sp>
+      <p:sp>
+        <p:nvSpPr>
+          <p:cNvPr id="4" name="Slide Number Placeholder 3"/>
+          <p:cNvSpPr>
+            <a:spLocks noGrp="1"/>
+          </p:cNvSpPr>
+          <p:nvPr>
+            <p:ph type="sldNum" idx="5" sz="quarter"/>
+          </p:nvPr>
+        </p:nvSpPr>
+        <p:spPr/>
+      </p:sp>
+    </p:spTree>
+  </p:cSld>
+  <p:clrMapOvr>
+    <a:masterClrMapping/>
+  </p:clrMapOvr>
+</p:notes>
+</file>
+
+<file path=ppt/notesSlides/notesSlide5.xml><?xml version="1.0" encoding="utf-8"?>
+<p:notes xmlns:a="http://schemas.openxmlformats.org/drawingml/2006/main" xmlns:p="http://schemas.openxmlformats.org/presentationml/2006/main" xmlns:r="http://schemas.openxmlformats.org/officeDocument/2006/relationships">
+  <p:cSld>
+    <p:spTree>
+      <p:nvGrpSpPr>
+        <p:cNvPr id="1" name=""/>
+        <p:cNvGrpSpPr/>
+        <p:nvPr/>
+      </p:nvGrpSpPr>
+      <p:grpSpPr>
+        <a:xfrm>
+          <a:off x="0" y="0"/>
+          <a:ext cx="0" cy="0"/>
+          <a:chOff x="0" y="0"/>
+          <a:chExt cx="0" cy="0"/>
+        </a:xfrm>
+      </p:grpSpPr>
+      <p:sp>
+        <p:nvSpPr>
+          <p:cNvPr id="2" name="Slide Image Placeholder 1"/>
+          <p:cNvSpPr>
+            <a:spLocks noGrp="1"/>
+          </p:cNvSpPr>
+          <p:nvPr>
+            <p:ph type="sldImg" idx="2"/>
+          </p:nvPr>
+        </p:nvSpPr>
+        <p:spPr/>
+      </p:sp>
+      <p:sp>
+        <p:nvSpPr>
+          <p:cNvPr id="3" name="Notes Placeholder 2"/>
+          <p:cNvSpPr>
+            <a:spLocks noGrp="1"/>
+          </p:cNvSpPr>
+          <p:nvPr>
+            <p:ph type="body" idx="3" sz="quarter"/>
+          </p:nvPr>
+        </p:nvSpPr>
+        <p:spPr/>
+        <p:txBody>
+          <a:bodyPr/>
+          <a:lstStyle/>
+          <a:p>
+            <a:r>
+              <a:t>Walk the table once. Emphasise: no raw coordinates enter the network — charges, flags, metal distances on a fixed topological object. 956 unique complexes; convergence independently force-checked. VR at 3.5 A keeps triangles: that IS the simplicial structure.</a:t>
+            </a:r>
+          </a:p>
+        </p:txBody>
+      </p:sp>
+      <p:sp>
+        <p:nvSpPr>
+          <p:cNvPr id="4" name="Slide Number Placeholder 3"/>
+          <p:cNvSpPr>
+            <a:spLocks noGrp="1"/>
+          </p:cNvSpPr>
+          <p:nvPr>
+            <p:ph type="sldNum" idx="5" sz="quarter"/>
+          </p:nvPr>
+        </p:nvSpPr>
+        <p:spPr/>
+      </p:sp>
+    </p:spTree>
+  </p:cSld>
+  <p:clrMapOvr>
+    <a:masterClrMapping/>
+  </p:clrMapOvr>
+</p:notes>
+</file>
+
+<file path=ppt/notesSlides/notesSlide6.xml><?xml version="1.0" encoding="utf-8"?>
+<p:notes xmlns:a="http://schemas.openxmlformats.org/drawingml/2006/main" xmlns:p="http://schemas.openxmlformats.org/presentationml/2006/main" xmlns:r="http://schemas.openxmlformats.org/officeDocument/2006/relationships">
+  <p:cSld>
+    <p:spTree>
+      <p:nvGrpSpPr>
+        <p:cNvPr id="1" name=""/>
+        <p:cNvGrpSpPr/>
+        <p:nvPr/>
+      </p:nvGrpSpPr>
+      <p:grpSpPr>
+        <a:xfrm>
+          <a:off x="0" y="0"/>
+          <a:ext cx="0" cy="0"/>
+          <a:chOff x="0" y="0"/>
+          <a:chExt cx="0" cy="0"/>
+        </a:xfrm>
+      </p:grpSpPr>
+      <p:sp>
+        <p:nvSpPr>
+          <p:cNvPr id="2" name="Slide Image Placeholder 1"/>
+          <p:cNvSpPr>
+            <a:spLocks noGrp="1"/>
+          </p:cNvSpPr>
+          <p:nvPr>
+            <p:ph type="sldImg" idx="2"/>
+          </p:nvPr>
+        </p:nvSpPr>
+        <p:spPr/>
+      </p:sp>
+      <p:sp>
+        <p:nvSpPr>
+          <p:cNvPr id="3" name="Notes Placeholder 2"/>
+          <p:cNvSpPr>
+            <a:spLocks noGrp="1"/>
+          </p:cNvSpPr>
+          <p:nvPr>
+            <p:ph type="body" idx="3" sz="quarter"/>
+          </p:nvPr>
+        </p:nvSpPr>
+        <p:spPr/>
+        <p:txBody>
+          <a:bodyPr/>
+          <a:lstStyle/>
+          <a:p>
+            <a:r>
+              <a:t>Top: coverage is uneven (Eu, Am-adjacent studies dominate); minimum ~120 rows per lanthanide. Bottom right is the quantity actually scored: heavy-tailed, sd 0.27, mean |sep| 0.18 log units.</a:t>
+            </a:r>
+          </a:p>
+        </p:txBody>
+      </p:sp>
+      <p:sp>
+        <p:nvSpPr>
+          <p:cNvPr id="4" name="Slide Number Placeholder 3"/>
+          <p:cNvSpPr>
+            <a:spLocks noGrp="1"/>
+          </p:cNvSpPr>
+          <p:nvPr>
+            <p:ph type="sldNum" idx="5" sz="quarter"/>
+          </p:nvPr>
+        </p:nvSpPr>
+        <p:spPr/>
+      </p:sp>
+    </p:spTree>
+  </p:cSld>
+  <p:clrMapOvr>
+    <a:masterClrMapping/>
+  </p:clrMapOvr>
+</p:notes>
+</file>
+
+<file path=ppt/notesSlides/notesSlide7.xml><?xml version="1.0" encoding="utf-8"?>
+<p:notes xmlns:a="http://schemas.openxmlformats.org/drawingml/2006/main" xmlns:p="http://schemas.openxmlformats.org/presentationml/2006/main" xmlns:r="http://schemas.openxmlformats.org/officeDocument/2006/relationships">
+  <p:cSld>
+    <p:spTree>
+      <p:nvGrpSpPr>
+        <p:cNvPr id="1" name=""/>
+        <p:cNvGrpSpPr/>
+        <p:nvPr/>
+      </p:nvGrpSpPr>
+      <p:grpSpPr>
+        <a:xfrm>
+          <a:off x="0" y="0"/>
+          <a:ext cx="0" cy="0"/>
+          <a:chOff x="0" y="0"/>
+          <a:chExt cx="0" cy="0"/>
+        </a:xfrm>
+      </p:grpSpPr>
+      <p:sp>
+        <p:nvSpPr>
+          <p:cNvPr id="2" name="Slide Image Placeholder 1"/>
+          <p:cNvSpPr>
+            <a:spLocks noGrp="1"/>
+          </p:cNvSpPr>
+          <p:nvPr>
+            <p:ph type="sldImg" idx="2"/>
+          </p:nvPr>
+        </p:nvSpPr>
+        <p:spPr/>
+      </p:sp>
+      <p:sp>
+        <p:nvSpPr>
+          <p:cNvPr id="3" name="Notes Placeholder 2"/>
+          <p:cNvSpPr>
+            <a:spLocks noGrp="1"/>
+          </p:cNvSpPr>
+          <p:nvPr>
+            <p:ph type="body" idx="3" sz="quarter"/>
+          </p:nvPr>
+        </p:nvSpPr>
+        <p:spPr/>
+        <p:txBody>
+          <a:bodyPr/>
+          <a:lstStyle/>
+          <a:p>
+            <a:r>
+              <a:t>The one-figure argument for the whole difficulty. Left: metal colouring is invisible — lanthanide identity is a vanishing direction. Right: extractant families are tight clusters; TODGA alone is 1,553 rows. Generalisation must cross clusters while resolving a signal orthogonal to them. If asked: 19%+8% variance on PC1/2 after winsorisation; before it, a few outlier rows dominated.</a:t>
+            </a:r>
+          </a:p>
+        </p:txBody>
+      </p:sp>
+      <p:sp>
+        <p:nvSpPr>
+          <p:cNvPr id="4" name="Slide Number Placeholder 3"/>
+          <p:cNvSpPr>
+            <a:spLocks noGrp="1"/>
+          </p:cNvSpPr>
+          <p:nvPr>
+            <p:ph type="sldNum" idx="5" sz="quarter"/>
+          </p:nvPr>
+        </p:nvSpPr>
+        <p:spPr/>
+      </p:sp>
+    </p:spTree>
+  </p:cSld>
+  <p:clrMapOvr>
+    <a:masterClrMapping/>
+  </p:clrMapOvr>
+</p:notes>
+</file>
+
+<file path=ppt/notesSlides/notesSlide8.xml><?xml version="1.0" encoding="utf-8"?>
+<p:notes xmlns:a="http://schemas.openxmlformats.org/drawingml/2006/main" xmlns:p="http://schemas.openxmlformats.org/presentationml/2006/main" xmlns:r="http://schemas.openxmlformats.org/officeDocument/2006/relationships">
+  <p:cSld>
+    <p:spTree>
+      <p:nvGrpSpPr>
+        <p:cNvPr id="1" name=""/>
+        <p:cNvGrpSpPr/>
+        <p:nvPr/>
+      </p:nvGrpSpPr>
+      <p:grpSpPr>
+        <a:xfrm>
+          <a:off x="0" y="0"/>
+          <a:ext cx="0" cy="0"/>
+          <a:chOff x="0" y="0"/>
+          <a:chExt cx="0" cy="0"/>
+        </a:xfrm>
+      </p:grpSpPr>
+      <p:sp>
+        <p:nvSpPr>
+          <p:cNvPr id="2" name="Slide Image Placeholder 1"/>
+          <p:cNvSpPr>
+            <a:spLocks noGrp="1"/>
+          </p:cNvSpPr>
+          <p:nvPr>
+            <p:ph type="sldImg" idx="2"/>
+          </p:nvPr>
+        </p:nvSpPr>
+        <p:spPr/>
+      </p:sp>
+      <p:sp>
+        <p:nvSpPr>
+          <p:cNvPr id="3" name="Notes Placeholder 2"/>
+          <p:cNvSpPr>
+            <a:spLocks noGrp="1"/>
+          </p:cNvSpPr>
+          <p:nvPr>
+            <p:ph type="body" idx="3" sz="quarter"/>
+          </p:nvPr>
+        </p:nvSpPr>
+        <p:spPr/>
+        <p:txBody>
+          <a:bodyPr/>
+          <a:lstStyle/>
+          <a:p>
+            <a:r>
+              <a:t>The three defences: grouped CV so no ligand leaks; replicate averaging inside blocks so a 10x-measured metal doesn't dominate; seed ensembles scored OOF. Per-seed sd of a paired delta is 0.0285 — this number drives every design decision in act 3. 8 seeds resolve 0.028; the true effects are 0.01-0.02; hence 24-32 seeds for anything confirmatory.</a:t>
+            </a:r>
+          </a:p>
+        </p:txBody>
+      </p:sp>
+      <p:sp>
+        <p:nvSpPr>
+          <p:cNvPr id="4" name="Slide Number Placeholder 3"/>
+          <p:cNvSpPr>
+            <a:spLocks noGrp="1"/>
+          </p:cNvSpPr>
+          <p:nvPr>
+            <p:ph type="sldNum" idx="5" sz="quarter"/>
+          </p:nvPr>
+        </p:nvSpPr>
+        <p:spPr/>
+      </p:sp>
+    </p:spTree>
+  </p:cSld>
+  <p:clrMapOvr>
+    <a:masterClrMapping/>
+  </p:clrMapOvr>
+</p:notes>
+</file>
+
+<file path=ppt/notesSlides/notesSlide9.xml><?xml version="1.0" encoding="utf-8"?>
+<p:notes xmlns:a="http://schemas.openxmlformats.org/drawingml/2006/main" xmlns:p="http://schemas.openxmlformats.org/presentationml/2006/main" xmlns:r="http://schemas.openxmlformats.org/officeDocument/2006/relationships">
+  <p:cSld>
+    <p:spTree>
+      <p:nvGrpSpPr>
+        <p:cNvPr id="1" name=""/>
+        <p:cNvGrpSpPr/>
+        <p:nvPr/>
+      </p:nvGrpSpPr>
+      <p:grpSpPr>
+        <a:xfrm>
+          <a:off x="0" y="0"/>
+          <a:ext cx="0" cy="0"/>
+          <a:chOff x="0" y="0"/>
+          <a:chExt cx="0" cy="0"/>
+        </a:xfrm>
+      </p:grpSpPr>
+      <p:sp>
+        <p:nvSpPr>
+          <p:cNvPr id="2" name="Slide Image Placeholder 1"/>
+          <p:cNvSpPr>
+            <a:spLocks noGrp="1"/>
+          </p:cNvSpPr>
+          <p:nvPr>
+            <p:ph type="sldImg" idx="2"/>
+          </p:nvPr>
+        </p:nvSpPr>
+        <p:spPr/>
+      </p:sp>
+      <p:sp>
+        <p:nvSpPr>
+          <p:cNvPr id="3" name="Notes Placeholder 2"/>
+          <p:cNvSpPr>
+            <a:spLocks noGrp="1"/>
+          </p:cNvSpPr>
+          <p:nvPr>
+            <p:ph type="body" idx="3" sz="quarter"/>
+          </p:nvPr>
+        </p:nvSpPr>
+        <p:spPr/>
+        <p:txBody>
+          <a:bodyPr/>
+          <a:lstStyle/>
+          <a:p>
+            <a:r>
+              <a:t>The stacking detail is load-bearing: fit weights on rows and 79% goes to the model best at levels and worst at pairs. Fitting on pair vectors, nested per held-out extractant, was worth +0.056. The metal-centred histogram pooling: without it the 3D encoder cannot even recover the lanthanide index (R^2 0.016) because mean-pooling 100 atoms erases 0.01-A shell shifts.</a:t>
+            </a:r>
+          </a:p>
+        </p:txBody>
+      </p:sp>
+      <p:sp>
+        <p:nvSpPr>
+          <p:cNvPr id="4" name="Slide Number Placeholder 3"/>
+          <p:cNvSpPr>
+            <a:spLocks noGrp="1"/>
+          </p:cNvSpPr>
+          <p:nvPr>
+            <p:ph type="sldNum" idx="5" sz="quarter"/>
+          </p:nvPr>
+        </p:nvSpPr>
+        <p:spPr/>
+      </p:sp>
+    </p:spTree>
+  </p:cSld>
+  <p:clrMapOvr>
+    <a:masterClrMapping/>
+  </p:clrMapOvr>
+</p:notes>
 </file>
 
 <file path=ppt/slideLayouts/slideLayout1.xml><?xml version="1.0" encoding="utf-8"?>
@@ -3146,7 +4828,7 @@
               </a:defRPr>
             </a:pPr>
             <a:r>
-              <a:t>Dataset, models, and complete findings — including where 3D helps and where it provably cannot</a:t>
+              <a:t>Dataset, models, complete findings — and a new benchmark on the chemistry underneath</a:t>
             </a:r>
           </a:p>
           <a:p>
@@ -3167,7 +4849,7 @@
               </a:defRPr>
             </a:pPr>
             <a:r>
-              <a:t>Bogdan Mironov · prepared for discussion with Prof. K. Vogiatzis · August 2026</a:t>
+              <a:t>Bogdan Mironov · discussion with Prof. K. Vogiatzis · August 2026</a:t>
             </a:r>
           </a:p>
         </p:txBody>
@@ -3213,14 +4895,141 @@
           <a:lstStyle/>
           <a:p>
             <a:pPr>
-              <a:defRPr sz="2800" b="1">
+              <a:defRPr sz="2700" b="1">
                 <a:solidFill>
                   <a:srgbClr val="1A2E4A"/>
                 </a:solidFill>
               </a:defRPr>
             </a:pPr>
             <a:r>
-              <a:t>The current best result, and its honest boundary</a:t>
+              <a:t>Results: July → today</a:t>
+            </a:r>
+          </a:p>
+          <a:p>
+            <a:pPr>
+              <a:defRPr sz="1400">
+                <a:solidFill>
+                  <a:srgbClr val="555A60"/>
+                </a:solidFill>
+              </a:defRPr>
+            </a:pPr>
+            <a:r>
+              <a:t>Both improvements are objective-function changes — no architecture changed</a:t>
+            </a:r>
+          </a:p>
+        </p:txBody>
+      </p:sp>
+      <p:pic>
+        <p:nvPicPr>
+          <p:cNvPr id="3" name="Picture 2" descr="f4_ladder.png"/>
+          <p:cNvPicPr>
+            <a:picLocks noChangeAspect="1"/>
+          </p:cNvPicPr>
+          <p:nvPr/>
+        </p:nvPicPr>
+        <p:blipFill>
+          <a:blip r:embed="rId3"/>
+          <a:stretch>
+            <a:fillRect/>
+          </a:stretch>
+        </p:blipFill>
+        <p:spPr>
+          <a:xfrm>
+            <a:off x="1706727" y="1371600"/>
+            <a:ext cx="8778240" cy="3674612"/>
+          </a:xfrm>
+          <a:prstGeom prst="rect">
+            <a:avLst/>
+          </a:prstGeom>
+        </p:spPr>
+      </p:pic>
+      <p:sp>
+        <p:nvSpPr>
+          <p:cNvPr id="4" name="TextBox 3"/>
+          <p:cNvSpPr txBox="1"/>
+          <p:nvPr/>
+        </p:nvSpPr>
+        <p:spPr>
+          <a:xfrm>
+            <a:off x="548640" y="5029200"/>
+            <a:ext cx="11064240" cy="1600200"/>
+          </a:xfrm>
+          <a:prstGeom prst="rect">
+            <a:avLst/>
+          </a:prstGeom>
+          <a:noFill/>
+        </p:spPr>
+        <p:txBody>
+          <a:bodyPr wrap="square">
+            <a:spAutoFit/>
+          </a:bodyPr>
+          <a:lstStyle/>
+          <a:p>
+            <a:pPr>
+              <a:spcAft>
+                <a:spcPts val="600"/>
+              </a:spcAft>
+              <a:defRPr sz="1600" b="0">
+                <a:solidFill>
+                  <a:srgbClr val="22262A"/>
+                </a:solidFill>
+              </a:defRPr>
+            </a:pPr>
+            <a:r>
+              <a:t>The tabular gain came stepwise: RMSE → MAE (+0.107) → Quantile(0.6) → re-tuned depth/rsm under that loss. The 3D gain is the contrast-weight change (slide 16).</a:t>
+            </a:r>
+          </a:p>
+        </p:txBody>
+      </p:sp>
+    </p:spTree>
+  </p:cSld>
+  <p:clrMapOvr>
+    <a:masterClrMapping/>
+  </p:clrMapOvr>
+</p:sld>
+</file>
+
+<file path=ppt/slides/slide11.xml><?xml version="1.0" encoding="utf-8"?>
+<p:sld xmlns:a="http://schemas.openxmlformats.org/drawingml/2006/main" xmlns:p="http://schemas.openxmlformats.org/presentationml/2006/main" xmlns:r="http://schemas.openxmlformats.org/officeDocument/2006/relationships">
+  <p:cSld>
+    <p:spTree>
+      <p:nvGrpSpPr>
+        <p:cNvPr id="1" name=""/>
+        <p:cNvGrpSpPr/>
+        <p:nvPr/>
+      </p:nvGrpSpPr>
+      <p:grpSpPr/>
+      <p:sp>
+        <p:nvSpPr>
+          <p:cNvPr id="2" name="TextBox 1"/>
+          <p:cNvSpPr txBox="1"/>
+          <p:nvPr/>
+        </p:nvSpPr>
+        <p:spPr>
+          <a:xfrm>
+            <a:off x="502920" y="274320"/>
+            <a:ext cx="11247120" cy="868680"/>
+          </a:xfrm>
+          <a:prstGeom prst="rect">
+            <a:avLst/>
+          </a:prstGeom>
+          <a:noFill/>
+        </p:spPr>
+        <p:txBody>
+          <a:bodyPr wrap="none">
+            <a:spAutoFit/>
+          </a:bodyPr>
+          <a:lstStyle/>
+          <a:p>
+            <a:pPr>
+              <a:defRPr sz="2700" b="1">
+                <a:solidFill>
+                  <a:srgbClr val="1A2E4A"/>
+                </a:solidFill>
+              </a:defRPr>
+            </a:pPr>
+            <a:r>
+              <a:t>The best system, and its honest boundary</a:t>
             </a:r>
           </a:p>
         </p:txBody>
@@ -3317,7 +5126,7 @@
                         <a:defRPr sz="1400"/>
                       </a:pPr>
                       <a:r>
-                        <a:t>best 2D single model (tuned boosting)</a:t>
+                        <a:t>best 2D single (tuned boosting)</a:t>
                       </a:r>
                     </a:p>
                   </a:txBody>
@@ -3364,7 +5173,7 @@
                         <a:defRPr sz="1400"/>
                       </a:pPr>
                       <a:r>
-                        <a:t>2D stack (boosting + fingerprint net)</a:t>
+                        <a:t>2D stack (boosting + fingerprint)</a:t>
                       </a:r>
                     </a:p>
                   </a:txBody>
@@ -3505,7 +5314,7 @@
                         <a:defRPr sz="1400"/>
                       </a:pPr>
                       <a:r>
-                        <a:t>published July stack (for reference)</a:t>
+                        <a:t>published July stack, for reference</a:t>
                       </a:r>
                     </a:p>
                   </a:txBody>
@@ -3554,8 +5363,8 @@
         </p:nvSpPr>
         <p:spPr>
           <a:xfrm>
-            <a:off x="548640" y="3794760"/>
-            <a:ext cx="11064240" cy="2834639"/>
+            <a:off x="548640" y="3886200"/>
+            <a:ext cx="11064240" cy="2743200"/>
           </a:xfrm>
           <a:prstGeom prst="rect">
             <a:avLst/>
@@ -3579,7 +5388,7 @@
               </a:defRPr>
             </a:pPr>
             <a:r>
-              <a:t>The 3D contribution SHRANK as partners improved (+0.038 → +0.023): complementarity means a stronger partner leaves less to correct. This was predicted by the error-correlation mechanism before it was observed.</a:t>
+              <a:t>The 3D contribution shrank as partners improved — complementarity means a stronger partner leaves less to correct.</a:t>
             </a:r>
           </a:p>
           <a:p>
@@ -3594,7 +5403,7 @@
               </a:defRPr>
             </a:pPr>
             <a:r>
-              <a:t>Strict key = only the lanthanide varies within a block. The published +0.038 was already indistinguishable there; the honest statement is that the 3D gain lives partly in condition-binning.</a:t>
+              <a:t>Strict key = only the lanthanide varies inside a block. The honest statement: part of the 3D gain lives in condition binning.</a:t>
             </a:r>
           </a:p>
           <a:p>
@@ -3609,155 +5418,7 @@
               </a:defRPr>
             </a:pPr>
             <a:r>
-              <a:t>Status: exploratory — both improved components were tuned on data inside this population, and every clean held-out partition is now spent. A fresh split is the next confirmatory step.</a:t>
-            </a:r>
-          </a:p>
-        </p:txBody>
-      </p:sp>
-    </p:spTree>
-  </p:cSld>
-  <p:clrMapOvr>
-    <a:masterClrMapping/>
-  </p:clrMapOvr>
-</p:sld>
-</file>
-
-<file path=ppt/slides/slide11.xml><?xml version="1.0" encoding="utf-8"?>
-<p:sld xmlns:a="http://schemas.openxmlformats.org/drawingml/2006/main" xmlns:p="http://schemas.openxmlformats.org/presentationml/2006/main" xmlns:r="http://schemas.openxmlformats.org/officeDocument/2006/relationships">
-  <p:cSld>
-    <p:spTree>
-      <p:nvGrpSpPr>
-        <p:cNvPr id="1" name=""/>
-        <p:cNvGrpSpPr/>
-        <p:nvPr/>
-      </p:nvGrpSpPr>
-      <p:grpSpPr/>
-      <p:sp>
-        <p:nvSpPr>
-          <p:cNvPr id="2" name="TextBox 1"/>
-          <p:cNvSpPr txBox="1"/>
-          <p:nvPr/>
-        </p:nvSpPr>
-        <p:spPr>
-          <a:xfrm>
-            <a:off x="502920" y="274320"/>
-            <a:ext cx="11247120" cy="868680"/>
-          </a:xfrm>
-          <a:prstGeom prst="rect">
-            <a:avLst/>
-          </a:prstGeom>
-          <a:noFill/>
-        </p:spPr>
-        <p:txBody>
-          <a:bodyPr wrap="none">
-            <a:spAutoFit/>
-          </a:bodyPr>
-          <a:lstStyle/>
-          <a:p>
-            <a:pPr>
-              <a:defRPr sz="2800" b="1">
-                <a:solidFill>
-                  <a:srgbClr val="1A2E4A"/>
-                </a:solidFill>
-              </a:defRPr>
-            </a:pPr>
-            <a:r>
-              <a:t>Why 3D contributes so little: the Hamiltonian, not the encoders</a:t>
-            </a:r>
-          </a:p>
-          <a:p>
-            <a:pPr>
-              <a:defRPr sz="1400">
-                <a:solidFill>
-                  <a:srgbClr val="555A60"/>
-                </a:solidFill>
-              </a:defRPr>
-            </a:pPr>
-            <a:r>
-              <a:t>A property of GFN2-xTB's parameterisation</a:t>
-            </a:r>
-          </a:p>
-        </p:txBody>
-      </p:sp>
-      <p:sp>
-        <p:nvSpPr>
-          <p:cNvPr id="3" name="TextBox 2"/>
-          <p:cNvSpPr txBox="1"/>
-          <p:nvPr/>
-        </p:nvSpPr>
-        <p:spPr>
-          <a:xfrm>
-            <a:off x="548640" y="1325880"/>
-            <a:ext cx="11064240" cy="5303520"/>
-          </a:xfrm>
-          <a:prstGeom prst="rect">
-            <a:avLst/>
-          </a:prstGeom>
-          <a:noFill/>
-        </p:spPr>
-        <p:txBody>
-          <a:bodyPr wrap="square">
-            <a:spAutoFit/>
-          </a:bodyPr>
-          <a:lstStyle/>
-          <a:p>
-            <a:pPr>
-              <a:spcAft>
-                <a:spcPts val="600"/>
-              </a:spcAft>
-              <a:defRPr sz="1600" b="1">
-                <a:solidFill>
-                  <a:srgbClr val="1A2E4A"/>
-                </a:solidFill>
-              </a:defRPr>
-            </a:pPr>
-            <a:r>
-              <a:t>Every GFN2-xTB lanthanide parameter from Ce(58) to Lu(71) is linear interpolation between two fitted anchors (max residual 5×10⁻⁷ — the file's printed precision; documented by the method's authors).</a:t>
-            </a:r>
-          </a:p>
-          <a:p>
-            <a:pPr>
-              <a:spcAft>
-                <a:spcPts val="600"/>
-              </a:spcAft>
-              <a:defRPr sz="1600" b="0">
-                <a:solidFill>
-                  <a:srgbClr val="22262A"/>
-                </a:solidFill>
-              </a:defRPr>
-            </a:pPr>
-            <a:r>
-              <a:t>Metal identity therefore enters every geometry as ONE scalar, linear in Z: no f-shell, no crystal field, no gadolinium break, no tetrad effect — by construction.</a:t>
-            </a:r>
-          </a:p>
-          <a:p>
-            <a:pPr>
-              <a:spcAft>
-                <a:spcPts val="600"/>
-              </a:spcAft>
-              <a:defRPr sz="1600" b="0">
-                <a:solidFill>
-                  <a:srgbClr val="22262A"/>
-                </a:solidFill>
-              </a:defRPr>
-            </a:pPr>
-            <a:r>
-              <a:t>This retrodicts our strangest observation: eight different 3D encoders are mutually interchangeable — two architectures correlate at 0.986, the same as two seed-ensembles of one architecture (effective rank 1.05 of 8).</a:t>
-            </a:r>
-          </a:p>
-          <a:p>
-            <a:pPr>
-              <a:spcAft>
-                <a:spcPts val="600"/>
-              </a:spcAft>
-              <a:defRPr sz="1600" b="1">
-                <a:solidFill>
-                  <a:srgbClr val="0E7A5F"/>
-                </a:solidFill>
-              </a:defRPr>
-            </a:pPr>
-            <a:r>
-              <a:t>And that one scalar is already in the tabular block as the Shannon ionic radius — so any encoder reading these geometries is re-deriving a feature the models already have.</a:t>
+              <a:t>Status: exploratory. Both improved components were tuned inside this population; a fresh held-out split is the next step.</a:t>
             </a:r>
           </a:p>
         </p:txBody>
@@ -3803,64 +5464,28 @@
           <a:lstStyle/>
           <a:p>
             <a:pPr>
-              <a:defRPr sz="2800" b="1">
+              <a:defRPr sz="2700" b="1">
                 <a:solidFill>
                   <a:srgbClr val="1A2E4A"/>
                 </a:solidFill>
               </a:defRPr>
             </a:pPr>
             <a:r>
-              <a:t>Quantified against experiment: GFN2 under-predicts the contraction 2.5×</a:t>
-            </a:r>
-          </a:p>
-          <a:p>
-            <a:pPr>
-              <a:defRPr sz="1400">
-                <a:solidFill>
-                  <a:srgbClr val="555A60"/>
-                </a:solidFill>
-              </a:defRPr>
-            </a:pPr>
-            <a:r>
-              <a:t>g-xTB (Grimme 2025, f-electrons in valence) reproduces it — 71/71 ligands, p = 5×10⁻⁵²</a:t>
-            </a:r>
-          </a:p>
-        </p:txBody>
-      </p:sp>
-      <p:pic>
-        <p:nvPicPr>
-          <p:cNvPr id="3" name="Picture 2" descr="f5_contraction.png"/>
-          <p:cNvPicPr>
-            <a:picLocks noChangeAspect="1"/>
-          </p:cNvPicPr>
+              <a:t>Act 2 — why doesn't 3D do more? The Hamiltonian is rank-1 in the metal</a:t>
+            </a:r>
+          </a:p>
+        </p:txBody>
+      </p:sp>
+      <p:sp>
+        <p:nvSpPr>
+          <p:cNvPr id="3" name="TextBox 2"/>
+          <p:cNvSpPr txBox="1"/>
           <p:nvPr/>
-        </p:nvPicPr>
-        <p:blipFill>
-          <a:blip r:embed="rId2"/>
-          <a:stretch>
-            <a:fillRect/>
-          </a:stretch>
-        </p:blipFill>
+        </p:nvSpPr>
         <p:spPr>
           <a:xfrm>
-            <a:off x="1889607" y="1325880"/>
-            <a:ext cx="8412480" cy="3900844"/>
-          </a:xfrm>
-          <a:prstGeom prst="rect">
-            <a:avLst/>
-          </a:prstGeom>
-        </p:spPr>
-      </p:pic>
-      <p:sp>
-        <p:nvSpPr>
-          <p:cNvPr id="4" name="TextBox 3"/>
-          <p:cNvSpPr txBox="1"/>
-          <p:nvPr/>
-        </p:nvSpPr>
-        <p:spPr>
-          <a:xfrm>
-            <a:off x="548640" y="5074920"/>
-            <a:ext cx="11064240" cy="1554480"/>
+            <a:off x="548640" y="1325880"/>
+            <a:ext cx="11064240" cy="5303520"/>
           </a:xfrm>
           <a:prstGeom prst="rect">
             <a:avLst/>
@@ -3872,6 +5497,21 @@
             <a:spAutoFit/>
           </a:bodyPr>
           <a:lstStyle/>
+          <a:p>
+            <a:pPr>
+              <a:spcAft>
+                <a:spcPts val="600"/>
+              </a:spcAft>
+              <a:defRPr sz="1600" b="1">
+                <a:solidFill>
+                  <a:srgbClr val="1A2E4A"/>
+                </a:solidFill>
+              </a:defRPr>
+            </a:pPr>
+            <a:r>
+              <a:t>GFN2-xTB treats f-electrons in-core; every lanthanide parameter from Ce to Lu is linear interpolation between two fitted anchors (residual 5×10⁻⁷ — the file's printed precision).</a:t>
+            </a:r>
+          </a:p>
           <a:p>
             <a:pPr>
               <a:spcAft>
@@ -3884,7 +5524,22 @@
               </a:defRPr>
             </a:pPr>
             <a:r>
-              <a:t>GFN2's per-ligand slope is also mostly noise: only 23% of its non-linear response is shared across ligands, vs 96% for g-xTB. Reproduced in implicit solvent and on an independent pilot.</a:t>
+              <a:t>Consequence: metal identity enters every geometry as ONE scalar, linear in Z. No f-shell, no gadolinium break, no tetrad effect — by construction.</a:t>
+            </a:r>
+          </a:p>
+          <a:p>
+            <a:pPr>
+              <a:spcAft>
+                <a:spcPts val="600"/>
+              </a:spcAft>
+              <a:defRPr sz="1600" b="0">
+                <a:solidFill>
+                  <a:srgbClr val="22262A"/>
+                </a:solidFill>
+              </a:defRPr>
+            </a:pPr>
+            <a:r>
+              <a:t>Retrodiction confirmed: eight different 3D encoders are mutually interchangeable — effective rank 1.05 of 8; two architectures correlate at 0.986, same as two seed-ensembles of one.</a:t>
             </a:r>
           </a:p>
           <a:p>
@@ -3899,7 +5554,7 @@
               </a:defRPr>
             </a:pPr>
             <a:r>
-              <a:t>To our knowledge a new benchmark result, publishable independently of any ML outcome.</a:t>
+              <a:t>And that one scalar is already a tabular column (Shannon ionic radius) — an encoder reading these geometries re-derives a feature the models already have.</a:t>
             </a:r>
           </a:p>
         </p:txBody>
@@ -3945,14 +5600,14 @@
           <a:lstStyle/>
           <a:p>
             <a:pPr>
-              <a:defRPr sz="2800" b="1">
+              <a:defRPr sz="2700" b="1">
                 <a:solidFill>
                   <a:srgbClr val="1A2E4A"/>
                 </a:solidFill>
               </a:defRPr>
             </a:pPr>
             <a:r>
-              <a:t>The decisive negative: fixing the chemistry does not fix the score</a:t>
+              <a:t>Measuring the damage against experiment</a:t>
             </a:r>
           </a:p>
           <a:p>
@@ -3964,7 +5619,467 @@
               </a:defRPr>
             </a:pPr>
             <a:r>
-              <a:t>All 956 complexes re-optimised with g-xTB; matched-pair training, identical rows</a:t>
+              <a:t>Per-ligand contraction slope, fixed ligand environment, 71 ligands · 15 Ln · 2,130 optimisations</a:t>
+            </a:r>
+          </a:p>
+        </p:txBody>
+      </p:sp>
+      <p:pic>
+        <p:nvPicPr>
+          <p:cNvPr id="3" name="Picture 2" descr="f5_contraction.png"/>
+          <p:cNvPicPr>
+            <a:picLocks noChangeAspect="1"/>
+          </p:cNvPicPr>
+          <p:nvPr/>
+        </p:nvPicPr>
+        <p:blipFill>
+          <a:blip r:embed="rId3"/>
+          <a:stretch>
+            <a:fillRect/>
+          </a:stretch>
+        </p:blipFill>
+        <p:spPr>
+          <a:xfrm>
+            <a:off x="1981047" y="1371600"/>
+            <a:ext cx="8229600" cy="3816043"/>
+          </a:xfrm>
+          <a:prstGeom prst="rect">
+            <a:avLst/>
+          </a:prstGeom>
+        </p:spPr>
+      </p:pic>
+      <p:sp>
+        <p:nvSpPr>
+          <p:cNvPr id="4" name="TextBox 3"/>
+          <p:cNvSpPr txBox="1"/>
+          <p:nvPr/>
+        </p:nvSpPr>
+        <p:spPr>
+          <a:xfrm>
+            <a:off x="548640" y="5120640"/>
+            <a:ext cx="11064240" cy="1508760"/>
+          </a:xfrm>
+          <a:prstGeom prst="rect">
+            <a:avLst/>
+          </a:prstGeom>
+          <a:noFill/>
+        </p:spPr>
+        <p:txBody>
+          <a:bodyPr wrap="square">
+            <a:spAutoFit/>
+          </a:bodyPr>
+          <a:lstStyle/>
+          <a:p>
+            <a:pPr>
+              <a:spcAft>
+                <a:spcPts val="600"/>
+              </a:spcAft>
+              <a:defRPr sz="1600" b="0">
+                <a:solidFill>
+                  <a:srgbClr val="22262A"/>
+                </a:solidFill>
+              </a:defRPr>
+            </a:pPr>
+            <a:r>
+              <a:t>g-xTB (Grimme 2025, f-electrons in valence) improves the contraction response on 71 of 71 ligands, p = 5×10⁻⁵². GFN2's per-ligand slope is mostly noise: 23 % cross-ligand reproducibility vs 96 %.</a:t>
+            </a:r>
+          </a:p>
+        </p:txBody>
+      </p:sp>
+    </p:spTree>
+  </p:cSld>
+  <p:clrMapOvr>
+    <a:masterClrMapping/>
+  </p:clrMapOvr>
+</p:sld>
+</file>
+
+<file path=ppt/slides/slide14.xml><?xml version="1.0" encoding="utf-8"?>
+<p:sld xmlns:a="http://schemas.openxmlformats.org/drawingml/2006/main" xmlns:p="http://schemas.openxmlformats.org/presentationml/2006/main" xmlns:r="http://schemas.openxmlformats.org/officeDocument/2006/relationships">
+  <p:cSld>
+    <p:spTree>
+      <p:nvGrpSpPr>
+        <p:cNvPr id="1" name=""/>
+        <p:cNvGrpSpPr/>
+        <p:nvPr/>
+      </p:nvGrpSpPr>
+      <p:grpSpPr/>
+      <p:sp>
+        <p:nvSpPr>
+          <p:cNvPr id="2" name="TextBox 1"/>
+          <p:cNvSpPr txBox="1"/>
+          <p:nvPr/>
+        </p:nvSpPr>
+        <p:spPr>
+          <a:xfrm>
+            <a:off x="502920" y="274320"/>
+            <a:ext cx="11247120" cy="868680"/>
+          </a:xfrm>
+          <a:prstGeom prst="rect">
+            <a:avLst/>
+          </a:prstGeom>
+          <a:noFill/>
+        </p:spPr>
+        <p:txBody>
+          <a:bodyPr wrap="none">
+            <a:spAutoFit/>
+          </a:bodyPr>
+          <a:lstStyle/>
+          <a:p>
+            <a:pPr>
+              <a:defRPr sz="2700" b="1">
+                <a:solidFill>
+                  <a:srgbClr val="1A2E4A"/>
+                </a:solidFill>
+              </a:defRPr>
+            </a:pPr>
+            <a:r>
+              <a:t>Is this new? — what the literature already knows (web check, Aug 2026)</a:t>
+            </a:r>
+          </a:p>
+        </p:txBody>
+      </p:sp>
+      <p:graphicFrame>
+        <p:nvGraphicFramePr>
+          <p:cNvPr id="3" name="Table 2"/>
+          <p:cNvGraphicFramePr>
+            <a:graphicFrameLocks noGrp="1"/>
+          </p:cNvGraphicFramePr>
+          <p:nvPr/>
+        </p:nvGraphicFramePr>
+        <p:xfrm>
+          <a:off x="640080" y="1463040"/>
+          <a:ext cx="10881360" cy="1408176"/>
+        </p:xfrm>
+        <a:graphic>
+          <a:graphicData uri="http://schemas.openxmlformats.org/drawingml/2006/table">
+            <a:tbl>
+              <a:tblPr firstRow="1" bandRow="1">
+                <a:tableStyleId>{5C22544A-7EE6-4342-B048-85BDC9FD1C3A}</a:tableStyleId>
+              </a:tblPr>
+              <a:tblGrid>
+                <a:gridCol w="3017520"/>
+                <a:gridCol w="4480560"/>
+                <a:gridCol w="3383280"/>
+              </a:tblGrid>
+              <a:tr h="352044">
+                <a:tc>
+                  <a:txBody>
+                    <a:bodyPr/>
+                    <a:lstStyle/>
+                    <a:p>
+                      <a:pPr>
+                        <a:defRPr sz="1300" b="1">
+                          <a:solidFill>
+                            <a:srgbClr val="FFFFFF"/>
+                          </a:solidFill>
+                        </a:defRPr>
+                      </a:pPr>
+                      <a:r>
+                        <a:t>prior work</a:t>
+                      </a:r>
+                    </a:p>
+                  </a:txBody>
+                  <a:tcPr/>
+                </a:tc>
+                <a:tc>
+                  <a:txBody>
+                    <a:bodyPr/>
+                    <a:lstStyle/>
+                    <a:p>
+                      <a:pPr>
+                        <a:defRPr sz="1300" b="1">
+                          <a:solidFill>
+                            <a:srgbClr val="FFFFFF"/>
+                          </a:solidFill>
+                        </a:defRPr>
+                      </a:pPr>
+                      <a:r>
+                        <a:t>what it established</a:t>
+                      </a:r>
+                    </a:p>
+                  </a:txBody>
+                  <a:tcPr/>
+                </a:tc>
+                <a:tc>
+                  <a:txBody>
+                    <a:bodyPr/>
+                    <a:lstStyle/>
+                    <a:p>
+                      <a:pPr>
+                        <a:defRPr sz="1300" b="1">
+                          <a:solidFill>
+                            <a:srgbClr val="FFFFFF"/>
+                          </a:solidFill>
+                        </a:defRPr>
+                      </a:pPr>
+                      <a:r>
+                        <a:t>what it did not do</a:t>
+                      </a:r>
+                    </a:p>
+                  </a:txBody>
+                  <a:tcPr/>
+                </a:tc>
+              </a:tr>
+              <a:tr h="352044">
+                <a:tc>
+                  <a:txBody>
+                    <a:bodyPr/>
+                    <a:lstStyle/>
+                    <a:p>
+                      <a:pPr>
+                        <a:defRPr sz="1300"/>
+                      </a:pPr>
+                      <a:r>
+                        <a:t>Bursch/Hansen/Grimme 2017</a:t>
+                      </a:r>
+                    </a:p>
+                  </a:txBody>
+                  <a:tcPr/>
+                </a:tc>
+                <a:tc>
+                  <a:txBody>
+                    <a:bodyPr/>
+                    <a:lstStyle/>
+                    <a:p>
+                      <a:pPr>
+                        <a:defRPr sz="1300"/>
+                      </a:pPr>
+                      <a:r>
+                        <a:t>GFN1 usable for Ln geometries: 80 complexes, RMSD 0.65 Å vs X-ray</a:t>
+                      </a:r>
+                    </a:p>
+                  </a:txBody>
+                  <a:tcPr/>
+                </a:tc>
+                <a:tc>
+                  <a:txBody>
+                    <a:bodyPr/>
+                    <a:lstStyle/>
+                    <a:p>
+                      <a:pPr>
+                        <a:defRPr sz="1300"/>
+                      </a:pPr>
+                      <a:r>
+                        <a:t>no cross-series trend analysis</a:t>
+                      </a:r>
+                    </a:p>
+                  </a:txBody>
+                  <a:tcPr/>
+                </a:tc>
+              </a:tr>
+              <a:tr h="352044">
+                <a:tc>
+                  <a:txBody>
+                    <a:bodyPr/>
+                    <a:lstStyle/>
+                    <a:p>
+                      <a:pPr>
+                        <a:defRPr sz="1300"/>
+                      </a:pPr>
+                      <a:r>
+                        <a:t>Zhang et al., JCC 2026 (Ln-xTB)</a:t>
+                      </a:r>
+                    </a:p>
+                  </a:txBody>
+                  <a:tcPr/>
+                </a:tc>
+                <a:tc>
+                  <a:txBody>
+                    <a:bodyPr/>
+                    <a:lstStyle/>
+                    <a:p>
+                      <a:pPr>
+                        <a:defRPr sz="1300"/>
+                      </a:pPr>
+                      <a:r>
+                        <a:t>GFN2 Ln bond MAD 0.134 Å vs DFT; new params reach 0.037 Å</a:t>
+                      </a:r>
+                    </a:p>
+                  </a:txBody>
+                  <a:tcPr/>
+                </a:tc>
+                <a:tc>
+                  <a:txBody>
+                    <a:bodyPr/>
+                    <a:lstStyle/>
+                    <a:p>
+                      <a:pPr>
+                        <a:defRPr sz="1300"/>
+                      </a:pPr>
+                      <a:r>
+                        <a:t>absolute errors vs DFT, not the contraction slope vs experiment</a:t>
+                      </a:r>
+                    </a:p>
+                  </a:txBody>
+                  <a:tcPr/>
+                </a:tc>
+              </a:tr>
+              <a:tr h="352044">
+                <a:tc>
+                  <a:txBody>
+                    <a:bodyPr/>
+                    <a:lstStyle/>
+                    <a:p>
+                      <a:pPr>
+                        <a:defRPr sz="1300"/>
+                      </a:pPr>
+                      <a:r>
+                        <a:t>g-xTB preprint (2025)</a:t>
+                      </a:r>
+                    </a:p>
+                  </a:txBody>
+                  <a:tcPr/>
+                </a:tc>
+                <a:tc>
+                  <a:txBody>
+                    <a:bodyPr/>
+                    <a:lstStyle/>
+                    <a:p>
+                      <a:pPr>
+                        <a:defRPr sz="1300"/>
+                      </a:pPr>
+                      <a:r>
+                        <a:t>~32k relative energies incl. actinides; f-populations as fit targets</a:t>
+                      </a:r>
+                    </a:p>
+                  </a:txBody>
+                  <a:tcPr/>
+                </a:tc>
+                <a:tc>
+                  <a:txBody>
+                    <a:bodyPr/>
+                    <a:lstStyle/>
+                    <a:p>
+                      <a:pPr>
+                        <a:defRPr sz="1300"/>
+                      </a:pPr>
+                      <a:r>
+                        <a:t>no lanthanide geometry validation</a:t>
+                      </a:r>
+                    </a:p>
+                  </a:txBody>
+                  <a:tcPr/>
+                </a:tc>
+              </a:tr>
+            </a:tbl>
+          </a:graphicData>
+        </a:graphic>
+      </p:graphicFrame>
+      <p:sp>
+        <p:nvSpPr>
+          <p:cNvPr id="4" name="TextBox 3"/>
+          <p:cNvSpPr txBox="1"/>
+          <p:nvPr/>
+        </p:nvSpPr>
+        <p:spPr>
+          <a:xfrm>
+            <a:off x="548640" y="3520440"/>
+            <a:ext cx="11064240" cy="3108960"/>
+          </a:xfrm>
+          <a:prstGeom prst="rect">
+            <a:avLst/>
+          </a:prstGeom>
+          <a:noFill/>
+        </p:spPr>
+        <p:txBody>
+          <a:bodyPr wrap="square">
+            <a:spAutoFit/>
+          </a:bodyPr>
+          <a:lstStyle/>
+          <a:p>
+            <a:pPr>
+              <a:spcAft>
+                <a:spcPts val="600"/>
+              </a:spcAft>
+              <a:defRPr sz="1600" b="1">
+                <a:solidFill>
+                  <a:srgbClr val="0E7A5F"/>
+                </a:solidFill>
+              </a:defRPr>
+            </a:pPr>
+            <a:r>
+              <a:t>New here: the contraction SLOPE as the observable (per-ligand, fixed environment, vs Shannon experiment); the 2.47× correlated trend error that per-complex MAD cannot see; the first lanthanide-geometry validation of g-xTB; and the chain to ML encoder rank collapse.</a:t>
+            </a:r>
+          </a:p>
+          <a:p>
+            <a:pPr>
+              <a:spcAft>
+                <a:spcPts val="600"/>
+              </a:spcAft>
+              <a:defRPr sz="1600" b="0">
+                <a:solidFill>
+                  <a:srgbClr val="22262A"/>
+                </a:solidFill>
+              </a:defRPr>
+            </a:pPr>
+            <a:r>
+              <a:t>Before submission: obtain the Ln-xTB full text (closest prior art, this year) — and run the same benchmark on Ln-xTB, which is also our pre-registered falsifying test.</a:t>
+            </a:r>
+          </a:p>
+        </p:txBody>
+      </p:sp>
+    </p:spTree>
+  </p:cSld>
+  <p:clrMapOvr>
+    <a:masterClrMapping/>
+  </p:clrMapOvr>
+</p:sld>
+</file>
+
+<file path=ppt/slides/slide15.xml><?xml version="1.0" encoding="utf-8"?>
+<p:sld xmlns:a="http://schemas.openxmlformats.org/drawingml/2006/main" xmlns:p="http://schemas.openxmlformats.org/presentationml/2006/main" xmlns:r="http://schemas.openxmlformats.org/officeDocument/2006/relationships">
+  <p:cSld>
+    <p:spTree>
+      <p:nvGrpSpPr>
+        <p:cNvPr id="1" name=""/>
+        <p:cNvGrpSpPr/>
+        <p:nvPr/>
+      </p:nvGrpSpPr>
+      <p:grpSpPr/>
+      <p:sp>
+        <p:nvSpPr>
+          <p:cNvPr id="2" name="TextBox 1"/>
+          <p:cNvSpPr txBox="1"/>
+          <p:nvPr/>
+        </p:nvSpPr>
+        <p:spPr>
+          <a:xfrm>
+            <a:off x="502920" y="274320"/>
+            <a:ext cx="11247120" cy="868680"/>
+          </a:xfrm>
+          <a:prstGeom prst="rect">
+            <a:avLst/>
+          </a:prstGeom>
+          <a:noFill/>
+        </p:spPr>
+        <p:txBody>
+          <a:bodyPr wrap="none">
+            <a:spAutoFit/>
+          </a:bodyPr>
+          <a:lstStyle/>
+          <a:p>
+            <a:pPr>
+              <a:defRPr sz="2700" b="1">
+                <a:solidFill>
+                  <a:srgbClr val="1A2E4A"/>
+                </a:solidFill>
+              </a:defRPr>
+            </a:pPr>
+            <a:r>
+              <a:t>Fixing the chemistry does not fix the score</a:t>
+            </a:r>
+          </a:p>
+          <a:p>
+            <a:pPr>
+              <a:defRPr sz="1400">
+                <a:solidFill>
+                  <a:srgbClr val="555A60"/>
+                </a:solidFill>
+              </a:defRPr>
+            </a:pPr>
+            <a:r>
+              <a:t>All 956 complexes re-optimised with g-xTB; matched pairs, identical rows</a:t>
             </a:r>
           </a:p>
         </p:txBody>
@@ -3988,8 +6103,8 @@
                 <a:tableStyleId>{5C22544A-7EE6-4342-B048-85BDC9FD1C3A}</a:tableStyleId>
               </a:tblPr>
               <a:tblGrid>
-                <a:gridCol w="6400800"/>
-                <a:gridCol w="2377440"/>
+                <a:gridCol w="6217920"/>
+                <a:gridCol w="2560320"/>
                 <a:gridCol w="2103120"/>
               </a:tblGrid>
               <a:tr h="347472">
@@ -4061,7 +6176,7 @@
                         <a:defRPr sz="1400"/>
                       </a:pPr>
                       <a:r>
-                        <a:t>g-xTB geometries (correct contraction) vs shipped</a:t>
+                        <a:t>g-xTB geometries (correct contraction)</a:t>
                       </a:r>
                     </a:p>
                   </a:txBody>
@@ -4108,7 +6223,7 @@
                         <a:defRPr sz="1400"/>
                       </a:pPr>
                       <a:r>
-                        <a:t>structures rebuilt in correspondence (455× less conformer noise)</a:t>
+                        <a:t>structures in correspondence (455× less conformer noise)</a:t>
                       </a:r>
                     </a:p>
                   </a:txBody>
@@ -4251,8 +6366,8 @@
         </p:nvSpPr>
         <p:spPr>
           <a:xfrm>
-            <a:off x="548640" y="3429000"/>
-            <a:ext cx="11064240" cy="3200400"/>
+            <a:off x="548640" y="3566160"/>
+            <a:ext cx="11064240" cy="3063240"/>
           </a:xfrm>
           <a:prstGeom prst="rect">
             <a:avLst/>
@@ -4276,7 +6391,7 @@
               </a:defRPr>
             </a:pPr>
             <a:r>
-              <a:t>One apparent positive (+0.033, p = 0.02, 7/8 seeds) was exposed as prediction shrinkage: rescaling the OLD geometry by one constant recovered 237% of the 'gain'. R²-on-a-weak-baseline needs a scale-free check.</a:t>
+              <a:t>One apparent positive (+0.033, p = 0.02, 7/8 seeds) was calibration: one rescaling constant on the OLD geometry recovered 237 % of it.</a:t>
             </a:r>
           </a:p>
           <a:p>
@@ -4291,291 +6406,7 @@
               </a:defRPr>
             </a:pPr>
             <a:r>
-              <a:t>Conclusion: the information the models lack is not in the coordinates. Geometric fidelity is not the bottleneck for this property.</a:t>
-            </a:r>
-          </a:p>
-        </p:txBody>
-      </p:sp>
-    </p:spTree>
-  </p:cSld>
-  <p:clrMapOvr>
-    <a:masterClrMapping/>
-  </p:clrMapOvr>
-</p:sld>
-</file>
-
-<file path=ppt/slides/slide14.xml><?xml version="1.0" encoding="utf-8"?>
-<p:sld xmlns:a="http://schemas.openxmlformats.org/drawingml/2006/main" xmlns:p="http://schemas.openxmlformats.org/presentationml/2006/main" xmlns:r="http://schemas.openxmlformats.org/officeDocument/2006/relationships">
-  <p:cSld>
-    <p:spTree>
-      <p:nvGrpSpPr>
-        <p:cNvPr id="1" name=""/>
-        <p:cNvGrpSpPr/>
-        <p:nvPr/>
-      </p:nvGrpSpPr>
-      <p:grpSpPr/>
-      <p:sp>
-        <p:nvSpPr>
-          <p:cNvPr id="2" name="TextBox 1"/>
-          <p:cNvSpPr txBox="1"/>
-          <p:nvPr/>
-        </p:nvSpPr>
-        <p:spPr>
-          <a:xfrm>
-            <a:off x="502920" y="274320"/>
-            <a:ext cx="11247120" cy="868680"/>
-          </a:xfrm>
-          <a:prstGeom prst="rect">
-            <a:avLst/>
-          </a:prstGeom>
-          <a:noFill/>
-        </p:spPr>
-        <p:txBody>
-          <a:bodyPr wrap="none">
-            <a:spAutoFit/>
-          </a:bodyPr>
-          <a:lstStyle/>
-          <a:p>
-            <a:pPr>
-              <a:defRPr sz="2800" b="1">
-                <a:solidFill>
-                  <a:srgbClr val="1A2E4A"/>
-                </a:solidFill>
-              </a:defRPr>
-            </a:pPr>
-            <a:r>
-              <a:t>What does move the metric: aligning the loss with the scored contrast</a:t>
-            </a:r>
-          </a:p>
-          <a:p>
-            <a:pPr>
-              <a:defRPr sz="1400">
-                <a:solidFill>
-                  <a:srgbClr val="555A60"/>
-                </a:solidFill>
-              </a:defRPr>
-            </a:pPr>
-            <a:r>
-              <a:t>The same change, two architectures, disjoint seed sets</a:t>
-            </a:r>
-          </a:p>
-        </p:txBody>
-      </p:sp>
-      <p:pic>
-        <p:nvPicPr>
-          <p:cNvPr id="3" name="Picture 2" descr="f6_transfer.png"/>
-          <p:cNvPicPr>
-            <a:picLocks noChangeAspect="1"/>
-          </p:cNvPicPr>
-          <p:nvPr/>
-        </p:nvPicPr>
-        <p:blipFill>
-          <a:blip r:embed="rId2"/>
-          <a:stretch>
-            <a:fillRect/>
-          </a:stretch>
-        </p:blipFill>
-        <p:spPr>
-          <a:xfrm>
-            <a:off x="1981047" y="1325880"/>
-            <a:ext cx="8229600" cy="3615199"/>
-          </a:xfrm>
-          <a:prstGeom prst="rect">
-            <a:avLst/>
-          </a:prstGeom>
-        </p:spPr>
-      </p:pic>
-      <p:sp>
-        <p:nvSpPr>
-          <p:cNvPr id="4" name="TextBox 3"/>
-          <p:cNvSpPr txBox="1"/>
-          <p:nvPr/>
-        </p:nvSpPr>
-        <p:spPr>
-          <a:xfrm>
-            <a:off x="548640" y="4983480"/>
-            <a:ext cx="11064240" cy="1645919"/>
-          </a:xfrm>
-          <a:prstGeom prst="rect">
-            <a:avLst/>
-          </a:prstGeom>
-          <a:noFill/>
-        </p:spPr>
-        <p:txBody>
-          <a:bodyPr wrap="square">
-            <a:spAutoFit/>
-          </a:bodyPr>
-          <a:lstStyle/>
-          <a:p>
-            <a:pPr>
-              <a:spcAft>
-                <a:spcPts val="600"/>
-              </a:spcAft>
-              <a:defRPr sz="1600" b="0">
-                <a:solidFill>
-                  <a:srgbClr val="22262A"/>
-                </a:solidFill>
-              </a:defRPr>
-            </a:pPr>
-            <a:r>
-              <a:t>Up-weighting the within-block contrast term (weight 2 → 4): +0.0142 on the distance encoder (40 seeds, p = 0.014) and +0.0146 on the simplicial encoder (24 seeds, p = 0.035) — the signature of an objective-level effect, not an encoder artefact.</a:t>
-            </a:r>
-          </a:p>
-          <a:p>
-            <a:pPr>
-              <a:spcAft>
-                <a:spcPts val="600"/>
-              </a:spcAft>
-              <a:defRPr sz="1600" b="0">
-                <a:solidFill>
-                  <a:srgbClr val="22262A"/>
-                </a:solidFill>
-              </a:defRPr>
-            </a:pPr>
-            <a:r>
-              <a:t>Cost: overall log D R² dips slightly (−0.015). This is a selectivity setting, not a free win.</a:t>
-            </a:r>
-          </a:p>
-        </p:txBody>
-      </p:sp>
-    </p:spTree>
-  </p:cSld>
-  <p:clrMapOvr>
-    <a:masterClrMapping/>
-  </p:clrMapOvr>
-</p:sld>
-</file>
-
-<file path=ppt/slides/slide15.xml><?xml version="1.0" encoding="utf-8"?>
-<p:sld xmlns:a="http://schemas.openxmlformats.org/drawingml/2006/main" xmlns:p="http://schemas.openxmlformats.org/presentationml/2006/main" xmlns:r="http://schemas.openxmlformats.org/officeDocument/2006/relationships">
-  <p:cSld>
-    <p:spTree>
-      <p:nvGrpSpPr>
-        <p:cNvPr id="1" name=""/>
-        <p:cNvGrpSpPr/>
-        <p:nvPr/>
-      </p:nvGrpSpPr>
-      <p:grpSpPr/>
-      <p:sp>
-        <p:nvSpPr>
-          <p:cNvPr id="2" name="TextBox 1"/>
-          <p:cNvSpPr txBox="1"/>
-          <p:nvPr/>
-        </p:nvSpPr>
-        <p:spPr>
-          <a:xfrm>
-            <a:off x="502920" y="274320"/>
-            <a:ext cx="11247120" cy="868680"/>
-          </a:xfrm>
-          <a:prstGeom prst="rect">
-            <a:avLst/>
-          </a:prstGeom>
-          <a:noFill/>
-        </p:spPr>
-        <p:txBody>
-          <a:bodyPr wrap="none">
-            <a:spAutoFit/>
-          </a:bodyPr>
-          <a:lstStyle/>
-          <a:p>
-            <a:pPr>
-              <a:defRPr sz="2800" b="1">
-                <a:solidFill>
-                  <a:srgbClr val="1A2E4A"/>
-                </a:solidFill>
-              </a:defRPr>
-            </a:pPr>
-            <a:r>
-              <a:t>Headroom: the labels support roughly +0.53</a:t>
-            </a:r>
-          </a:p>
-          <a:p>
-            <a:pPr>
-              <a:defRPr sz="1400">
-                <a:solidFill>
-                  <a:srgbClr val="555A60"/>
-                </a:solidFill>
-              </a:defRPr>
-            </a:pPr>
-            <a:r>
-              <a:t>Condition effects cancel on differencing — separations reproduce 6× tighter than levels</a:t>
-            </a:r>
-          </a:p>
-        </p:txBody>
-      </p:sp>
-      <p:pic>
-        <p:nvPicPr>
-          <p:cNvPr id="3" name="Picture 2" descr="f7_ceiling.png"/>
-          <p:cNvPicPr>
-            <a:picLocks noChangeAspect="1"/>
-          </p:cNvPicPr>
-          <p:nvPr/>
-        </p:nvPicPr>
-        <p:blipFill>
-          <a:blip r:embed="rId2"/>
-          <a:stretch>
-            <a:fillRect/>
-          </a:stretch>
-        </p:blipFill>
-        <p:spPr>
-          <a:xfrm>
-            <a:off x="1615287" y="1371600"/>
-            <a:ext cx="8961120" cy="3360420"/>
-          </a:xfrm>
-          <a:prstGeom prst="rect">
-            <a:avLst/>
-          </a:prstGeom>
-        </p:spPr>
-      </p:pic>
-      <p:sp>
-        <p:nvSpPr>
-          <p:cNvPr id="4" name="TextBox 3"/>
-          <p:cNvSpPr txBox="1"/>
-          <p:nvPr/>
-        </p:nvSpPr>
-        <p:spPr>
-          <a:xfrm>
-            <a:off x="548640" y="4709160"/>
-            <a:ext cx="11064240" cy="1920239"/>
-          </a:xfrm>
-          <a:prstGeom prst="rect">
-            <a:avLst/>
-          </a:prstGeom>
-          <a:noFill/>
-        </p:spPr>
-        <p:txBody>
-          <a:bodyPr wrap="square">
-            <a:spAutoFit/>
-          </a:bodyPr>
-          <a:lstStyle/>
-          <a:p>
-            <a:pPr>
-              <a:spcAft>
-                <a:spcPts val="600"/>
-              </a:spcAft>
-              <a:defRPr sz="1600" b="0">
-                <a:solidFill>
-                  <a:srgbClr val="22262A"/>
-                </a:solidFill>
-              </a:defRPr>
-            </a:pPr>
-            <a:r>
-              <a:t>Raw log D scatter within a (block, metal) group is 0.72–0.95, but the same adjacent separation measured in independent blocks reproduces to 0.153 on a spread of 0.224 → ceiling ≈ +0.53.</a:t>
-            </a:r>
-          </a:p>
-          <a:p>
-            <a:pPr>
-              <a:spcAft>
-                <a:spcPts val="600"/>
-              </a:spcAft>
-              <a:defRPr sz="1600" b="1">
-                <a:solidFill>
-                  <a:srgbClr val="1A2E4A"/>
-                </a:solidFill>
-              </a:defRPr>
-            </a:pPr>
-            <a:r>
-              <a:t>We are at ~60% of the ceiling. Geometry explains ~1% of pair variance under either Hamiltonian; the remaining signal points at conditions and direct pair modelling.</a:t>
+              <a:t>The information the models lack is not in the coordinates. Geometric fidelity is not the bottleneck for this property.</a:t>
             </a:r>
           </a:p>
         </p:txBody>
@@ -4621,40 +6452,52 @@
           <a:lstStyle/>
           <a:p>
             <a:pPr>
-              <a:defRPr sz="2800" b="1">
+              <a:defRPr sz="2700" b="1">
                 <a:solidFill>
                   <a:srgbClr val="1A2E4A"/>
                 </a:solidFill>
               </a:defRPr>
             </a:pPr>
             <a:r>
-              <a:t>Methodological findings — the transferable part</a:t>
-            </a:r>
-          </a:p>
-          <a:p>
-            <a:pPr>
-              <a:defRPr sz="1400">
-                <a:solidFill>
-                  <a:srgbClr val="555A60"/>
-                </a:solidFill>
-              </a:defRPr>
-            </a:pPr>
-            <a:r>
-              <a:t>Three false positives were caught and killed in one week, each by a specific check</a:t>
-            </a:r>
-          </a:p>
-        </p:txBody>
-      </p:sp>
-      <p:sp>
-        <p:nvSpPr>
-          <p:cNvPr id="3" name="TextBox 2"/>
+              <a:t>What does move the metric: aligning the loss with the scored contrast</a:t>
+            </a:r>
+          </a:p>
+        </p:txBody>
+      </p:sp>
+      <p:pic>
+        <p:nvPicPr>
+          <p:cNvPr id="3" name="Picture 2" descr="f6_transfer.png"/>
+          <p:cNvPicPr>
+            <a:picLocks noChangeAspect="1"/>
+          </p:cNvPicPr>
+          <p:nvPr/>
+        </p:nvPicPr>
+        <p:blipFill>
+          <a:blip r:embed="rId3"/>
+          <a:stretch>
+            <a:fillRect/>
+          </a:stretch>
+        </p:blipFill>
+        <p:spPr>
+          <a:xfrm>
+            <a:off x="2072487" y="1325880"/>
+            <a:ext cx="8046720" cy="3534861"/>
+          </a:xfrm>
+          <a:prstGeom prst="rect">
+            <a:avLst/>
+          </a:prstGeom>
+        </p:spPr>
+      </p:pic>
+      <p:sp>
+        <p:nvSpPr>
+          <p:cNvPr id="4" name="TextBox 3"/>
           <p:cNvSpPr txBox="1"/>
           <p:nvPr/>
         </p:nvSpPr>
         <p:spPr>
           <a:xfrm>
-            <a:off x="548640" y="1325880"/>
-            <a:ext cx="11064240" cy="5303520"/>
+            <a:off x="548640" y="4937760"/>
+            <a:ext cx="11064240" cy="1691639"/>
           </a:xfrm>
           <a:prstGeom prst="rect">
             <a:avLst/>
@@ -4678,52 +6521,7 @@
               </a:defRPr>
             </a:pPr>
             <a:r>
-              <a:t>Power: the per-seed sd of a paired Δ is 0.0285 — an 8-seed comparison resolves only ~0.028, while the true effects here are 0.01–0.02. All confirmatory runs now use 24–32 seeds; three n≤8 'significant' gains dissolved on independent seeds.</a:t>
-            </a:r>
-          </a:p>
-          <a:p>
-            <a:pPr>
-              <a:spcAft>
-                <a:spcPts val="600"/>
-              </a:spcAft>
-              <a:defRPr sz="1600" b="0">
-                <a:solidFill>
-                  <a:srgbClr val="22262A"/>
-                </a:solidFill>
-              </a:defRPr>
-            </a:pPr>
-            <a:r>
-              <a:t>Scale-free check: on a weak baseline, R² rises when predictions shrink toward the mean. Requiring Pearson² to agree in sign killed a p = 0.02 artefact.</a:t>
-            </a:r>
-          </a:p>
-          <a:p>
-            <a:pPr>
-              <a:spcAft>
-                <a:spcPts val="600"/>
-              </a:spcAft>
-              <a:defRPr sz="1600" b="0">
-                <a:solidFill>
-                  <a:srgbClr val="22262A"/>
-                </a:solidFill>
-              </a:defRPr>
-            </a:pPr>
-            <a:r>
-              <a:t>Silent no-ops: five CLI flags were accepted, recorded as enabled, and ignored by an architecture that lacked them — including the pair head, untested for the entire study without anyone knowing. A capability gate now raises instead.</a:t>
-            </a:r>
-          </a:p>
-          <a:p>
-            <a:pPr>
-              <a:spcAft>
-                <a:spcPts val="600"/>
-              </a:spcAft>
-              <a:defRPr sz="1600" b="0">
-                <a:solidFill>
-                  <a:srgbClr val="22262A"/>
-                </a:solidFill>
-              </a:defRPr>
-            </a:pPr>
-            <a:r>
-              <a:t>Selection hygiene: every axis that cleared +0.02 on screening data (four of them) failed held-out. Pre-registration with the bar and the null-consequence committed before the data exists is now standard for every confirmatory claim.</a:t>
+              <a:t>Up-weighting the within-block contrast term: +0.0142 (distance encoder, 40 independent seeds) and +0.0146 (simplicial, 24 seeds) — the same effect on two architectures. Cost: overall log D R² −0.015.</a:t>
             </a:r>
           </a:p>
         </p:txBody>
@@ -4769,14 +6567,129 @@
           <a:lstStyle/>
           <a:p>
             <a:pPr>
-              <a:defRPr sz="2800" b="1">
+              <a:defRPr sz="2700" b="1">
                 <a:solidFill>
                   <a:srgbClr val="1A2E4A"/>
                 </a:solidFill>
               </a:defRPr>
             </a:pPr>
             <a:r>
-              <a:t>Summary — three claims, and what I'd like to discuss</a:t>
+              <a:t>Headroom: the labels support ≈ +0.53</a:t>
+            </a:r>
+          </a:p>
+        </p:txBody>
+      </p:sp>
+      <p:pic>
+        <p:nvPicPr>
+          <p:cNvPr id="3" name="Picture 2" descr="f7_ceiling.png"/>
+          <p:cNvPicPr>
+            <a:picLocks noChangeAspect="1"/>
+          </p:cNvPicPr>
+          <p:nvPr/>
+        </p:nvPicPr>
+        <p:blipFill>
+          <a:blip r:embed="rId3"/>
+          <a:stretch>
+            <a:fillRect/>
+          </a:stretch>
+        </p:blipFill>
+        <p:spPr>
+          <a:xfrm>
+            <a:off x="1706727" y="1371600"/>
+            <a:ext cx="8778240" cy="3291840"/>
+          </a:xfrm>
+          <a:prstGeom prst="rect">
+            <a:avLst/>
+          </a:prstGeom>
+        </p:spPr>
+      </p:pic>
+      <p:sp>
+        <p:nvSpPr>
+          <p:cNvPr id="4" name="TextBox 3"/>
+          <p:cNvSpPr txBox="1"/>
+          <p:nvPr/>
+        </p:nvSpPr>
+        <p:spPr>
+          <a:xfrm>
+            <a:off x="548640" y="4754880"/>
+            <a:ext cx="11064240" cy="1874519"/>
+          </a:xfrm>
+          <a:prstGeom prst="rect">
+            <a:avLst/>
+          </a:prstGeom>
+          <a:noFill/>
+        </p:spPr>
+        <p:txBody>
+          <a:bodyPr wrap="square">
+            <a:spAutoFit/>
+          </a:bodyPr>
+          <a:lstStyle/>
+          <a:p>
+            <a:pPr>
+              <a:spcAft>
+                <a:spcPts val="600"/>
+              </a:spcAft>
+              <a:defRPr sz="1600" b="0">
+                <a:solidFill>
+                  <a:srgbClr val="22262A"/>
+                </a:solidFill>
+              </a:defRPr>
+            </a:pPr>
+            <a:r>
+              <a:t>The same adjacent separation measured in independent blocks reproduces to 0.153 on a spread of 0.224 — condition effects cancel on differencing. We are at ~60 % of the ceiling; geometry explains ~1 % of pair variance under either Hamiltonian.</a:t>
+            </a:r>
+          </a:p>
+        </p:txBody>
+      </p:sp>
+    </p:spTree>
+  </p:cSld>
+  <p:clrMapOvr>
+    <a:masterClrMapping/>
+  </p:clrMapOvr>
+</p:sld>
+</file>
+
+<file path=ppt/slides/slide18.xml><?xml version="1.0" encoding="utf-8"?>
+<p:sld xmlns:a="http://schemas.openxmlformats.org/drawingml/2006/main" xmlns:p="http://schemas.openxmlformats.org/presentationml/2006/main" xmlns:r="http://schemas.openxmlformats.org/officeDocument/2006/relationships">
+  <p:cSld>
+    <p:spTree>
+      <p:nvGrpSpPr>
+        <p:cNvPr id="1" name=""/>
+        <p:cNvGrpSpPr/>
+        <p:nvPr/>
+      </p:nvGrpSpPr>
+      <p:grpSpPr/>
+      <p:sp>
+        <p:nvSpPr>
+          <p:cNvPr id="2" name="TextBox 1"/>
+          <p:cNvSpPr txBox="1"/>
+          <p:nvPr/>
+        </p:nvSpPr>
+        <p:spPr>
+          <a:xfrm>
+            <a:off x="502920" y="274320"/>
+            <a:ext cx="11247120" cy="868680"/>
+          </a:xfrm>
+          <a:prstGeom prst="rect">
+            <a:avLst/>
+          </a:prstGeom>
+          <a:noFill/>
+        </p:spPr>
+        <p:txBody>
+          <a:bodyPr wrap="none">
+            <a:spAutoFit/>
+          </a:bodyPr>
+          <a:lstStyle/>
+          <a:p>
+            <a:pPr>
+              <a:defRPr sz="2700" b="1">
+                <a:solidFill>
+                  <a:srgbClr val="1A2E4A"/>
+                </a:solidFill>
+              </a:defRPr>
+            </a:pPr>
+            <a:r>
+              <a:t>Methodology: three false positives were caught in one week</a:t>
             </a:r>
           </a:p>
         </p:txBody>
@@ -4807,16 +6720,137 @@
               <a:spcAft>
                 <a:spcPts val="600"/>
               </a:spcAft>
-              <a:defRPr sz="1600" b="1">
+              <a:defRPr sz="1600" b="0">
+                <a:solidFill>
+                  <a:srgbClr val="22262A"/>
+                </a:solidFill>
+              </a:defRPr>
+            </a:pPr>
+            <a:r>
+              <a:t>Power: per-seed sd 0.0285 → n = 8 resolves ~0.028 while true effects are 0.01–0.02. Three n ≤ 8 'significant' gains dissolved on independent seeds; confirmatory runs now use 24–32.</a:t>
+            </a:r>
+          </a:p>
+          <a:p>
+            <a:pPr>
+              <a:spcAft>
+                <a:spcPts val="600"/>
+              </a:spcAft>
+              <a:defRPr sz="1600" b="0">
+                <a:solidFill>
+                  <a:srgbClr val="22262A"/>
+                </a:solidFill>
+              </a:defRPr>
+            </a:pPr>
+            <a:r>
+              <a:t>Scale-free check: on a weak baseline R² rises when predictions shrink toward the mean; requiring Pearson² sign agreement killed a p = 0.02 artefact.</a:t>
+            </a:r>
+          </a:p>
+          <a:p>
+            <a:pPr>
+              <a:spcAft>
+                <a:spcPts val="600"/>
+              </a:spcAft>
+              <a:defRPr sz="1600" b="0">
+                <a:solidFill>
+                  <a:srgbClr val="22262A"/>
+                </a:solidFill>
+              </a:defRPr>
+            </a:pPr>
+            <a:r>
+              <a:t>Silent no-ops: five CLI flags were accepted, recorded as enabled, and ignored by architectures lacking them — including the pair head, untested for the whole study. A capability gate now raises instead.</a:t>
+            </a:r>
+          </a:p>
+          <a:p>
+            <a:pPr>
+              <a:spcAft>
+                <a:spcPts val="600"/>
+              </a:spcAft>
+              <a:defRPr sz="1600" b="0">
+                <a:solidFill>
+                  <a:srgbClr val="22262A"/>
+                </a:solidFill>
+              </a:defRPr>
+            </a:pPr>
+            <a:r>
+              <a:t>Selection hygiene: every axis clearing +0.02 on screening data (four) failed held-out. Pre-registration with the bar and null-consequence committed before data exists is now standard.</a:t>
+            </a:r>
+          </a:p>
+        </p:txBody>
+      </p:sp>
+    </p:spTree>
+  </p:cSld>
+  <p:clrMapOvr>
+    <a:masterClrMapping/>
+  </p:clrMapOvr>
+</p:sld>
+</file>
+
+<file path=ppt/slides/slide19.xml><?xml version="1.0" encoding="utf-8"?>
+<p:sld xmlns:a="http://schemas.openxmlformats.org/drawingml/2006/main" xmlns:p="http://schemas.openxmlformats.org/presentationml/2006/main" xmlns:r="http://schemas.openxmlformats.org/officeDocument/2006/relationships">
+  <p:cSld>
+    <p:spTree>
+      <p:nvGrpSpPr>
+        <p:cNvPr id="1" name=""/>
+        <p:cNvGrpSpPr/>
+        <p:nvPr/>
+      </p:nvGrpSpPr>
+      <p:grpSpPr/>
+      <p:sp>
+        <p:nvSpPr>
+          <p:cNvPr id="2" name="TextBox 1"/>
+          <p:cNvSpPr txBox="1"/>
+          <p:nvPr/>
+        </p:nvSpPr>
+        <p:spPr>
+          <a:xfrm>
+            <a:off x="502920" y="274320"/>
+            <a:ext cx="11247120" cy="868680"/>
+          </a:xfrm>
+          <a:prstGeom prst="rect">
+            <a:avLst/>
+          </a:prstGeom>
+          <a:noFill/>
+        </p:spPr>
+        <p:txBody>
+          <a:bodyPr wrap="none">
+            <a:spAutoFit/>
+          </a:bodyPr>
+          <a:lstStyle/>
+          <a:p>
+            <a:pPr>
+              <a:defRPr sz="2700" b="1">
                 <a:solidFill>
                   <a:srgbClr val="1A2E4A"/>
                 </a:solidFill>
               </a:defRPr>
             </a:pPr>
             <a:r>
-              <a:t>1.  The 3D encoder is necessary for the best result via complementarity (0.313 vs 0.291, largest stack weight) — but it is no longer the strongest single model, and its marginal value shrinks as 2D partners improve and under strict blocking.</a:t>
-            </a:r>
-          </a:p>
+              <a:t>Summary — three claims, four things to discuss</a:t>
+            </a:r>
+          </a:p>
+        </p:txBody>
+      </p:sp>
+      <p:sp>
+        <p:nvSpPr>
+          <p:cNvPr id="3" name="TextBox 2"/>
+          <p:cNvSpPr txBox="1"/>
+          <p:nvPr/>
+        </p:nvSpPr>
+        <p:spPr>
+          <a:xfrm>
+            <a:off x="548640" y="1325880"/>
+            <a:ext cx="11064240" cy="5303520"/>
+          </a:xfrm>
+          <a:prstGeom prst="rect">
+            <a:avLst/>
+          </a:prstGeom>
+          <a:noFill/>
+        </p:spPr>
+        <p:txBody>
+          <a:bodyPr wrap="square">
+            <a:spAutoFit/>
+          </a:bodyPr>
+          <a:lstStyle/>
           <a:p>
             <a:pPr>
               <a:spcAft>
@@ -4829,7 +6863,7 @@
               </a:defRPr>
             </a:pPr>
             <a:r>
-              <a:t>2.  The 3D ceiling is a property of GFN2-xTB: lanthanide parameters linear in Z, contraction under-predicted 2.47×; fixing the chemistry (g-xTB, 8% of experiment, 71/71 ligands) does NOT move the score. The chemistry benchmark stands alone.</a:t>
+              <a:t>1.  The 3D encoder is necessary for the best result via complementarity (0.313 vs 0.291, largest weight) — no longer the strongest single model; contribution shrinks under strict blocking.</a:t>
             </a:r>
           </a:p>
           <a:p>
@@ -4844,7 +6878,22 @@
               </a:defRPr>
             </a:pPr>
             <a:r>
-              <a:t>3.  The lever for selectivity is the objective, not the representation: every surviving gain came from aligning the loss with the scored contrast, and the effect transfers across architectures.</a:t>
+              <a:t>2.  The 3D ceiling is the Hamiltonian's: GFN2 is rank-1 in the metal and under-predicts the contraction 2.47×; g-xTB fixes the chemistry (8 % of experiment, 71/71 ligands) and the score does not move. The benchmark is new — validated against the literature — and stands alone.</a:t>
+            </a:r>
+          </a:p>
+          <a:p>
+            <a:pPr>
+              <a:spcAft>
+                <a:spcPts val="600"/>
+              </a:spcAft>
+              <a:defRPr sz="1600" b="1">
+                <a:solidFill>
+                  <a:srgbClr val="1A2E4A"/>
+                </a:solidFill>
+              </a:defRPr>
+            </a:pPr>
+            <a:r>
+              <a:t>3.  The lever for selectivity is the objective: every surviving gain came from aligning the loss with the scored contrast, transferring across architectures.</a:t>
             </a:r>
           </a:p>
           <a:p>
@@ -4871,7 +6920,7 @@
               </a:defRPr>
             </a:pPr>
             <a:r>
-              <a:t>To discuss:  (a) a fresh held-out split for confirmatory numbers;  (b) the g-xTB contraction benchmark as a standalone paper;  (c) direct pair modelling toward the +0.53 ceiling;  (d) whether VR-encoder complementarity merits a methods note given the strict-key bound.</a:t>
+              <a:t>Discuss:  (a) fresh held-out split for confirmation;  (b) the contraction benchmark as a standalone paper — incl. running it on Ln-xTB (Zhang 2026, closest prior art);  (c) direct pair modelling toward +0.53;  (d) whether VR complementarity merits a methods note given the strict-key bound.</a:t>
             </a:r>
           </a:p>
         </p:txBody>
@@ -4917,14 +6966,14 @@
           <a:lstStyle/>
           <a:p>
             <a:pPr>
-              <a:defRPr sz="2800" b="1">
+              <a:defRPr sz="2700" b="1">
                 <a:solidFill>
                   <a:srgbClr val="1A2E4A"/>
                 </a:solidFill>
               </a:defRPr>
             </a:pPr>
             <a:r>
-              <a:t>Background: why adjacent lanthanides</a:t>
+              <a:t>Your question first: “constantly more accurate — am I right?”</a:t>
             </a:r>
           </a:p>
           <a:p>
@@ -4936,7 +6985,7 @@
               </a:defRPr>
             </a:pPr>
             <a:r>
-              <a:t>The industrially hard case in rare-earth separations</a:t>
+              <a:t>The precise answer before the evidence</a:t>
             </a:r>
           </a:p>
         </p:txBody>
@@ -4967,14 +7016,29 @@
               <a:spcAft>
                 <a:spcPts val="600"/>
               </a:spcAft>
-              <a:defRPr sz="1600" b="0">
+              <a:defRPr sz="1600" b="1">
+                <a:solidFill>
+                  <a:srgbClr val="A8322D"/>
+                </a:solidFill>
+              </a:defRPr>
+            </a:pPr>
+            <a:r>
+              <a:t>As a single model — no longer.</a:t>
+            </a:r>
+          </a:p>
+          <a:p>
+            <a:pPr lvl="1">
+              <a:spcAft>
+                <a:spcPts val="600"/>
+              </a:spcAft>
+              <a:defRPr sz="1400" b="0">
                 <a:solidFill>
                   <a:srgbClr val="22262A"/>
                 </a:solidFill>
               </a:defRPr>
             </a:pPr>
             <a:r>
-              <a:t>Separating neighbouring lanthanides (Nd/Pr, Dy/Tb, …) is the bottleneck of rare-earth processing: liquid–liquid extraction with designed organic extractants is the industrial route.</a:t>
+              <a:t>With the right loss, gradient boosting on 2D descriptors reaches 0.278 — above the 3D encoder alone (0.266) and above July's full combination (0.267).</a:t>
             </a:r>
           </a:p>
           <a:p>
@@ -4982,14 +7046,29 @@
               <a:spcAft>
                 <a:spcPts val="600"/>
               </a:spcAft>
-              <a:defRPr sz="1600" b="0">
+              <a:defRPr sz="1600" b="1">
+                <a:solidFill>
+                  <a:srgbClr val="0E7A5F"/>
+                </a:solidFill>
+              </a:defRPr>
+            </a:pPr>
+            <a:r>
+              <a:t>As part of the best system — yes, and it is the largest component.</a:t>
+            </a:r>
+          </a:p>
+          <a:p>
+            <a:pPr lvl="1">
+              <a:spcAft>
+                <a:spcPts val="600"/>
+              </a:spcAft>
+              <a:defRPr sz="1400" b="0">
                 <a:solidFill>
                   <a:srgbClr val="22262A"/>
                 </a:solidFill>
               </a:defRPr>
             </a:pPr>
             <a:r>
-              <a:t>The physics is unforgiving: adjacent trivalent ions differ by ~0.013 Å in ionic radius — the lanthanide contraction — and by essentially nothing else a classical descriptor sees.</a:t>
+              <a:t>0.313 with the 3D encoder vs 0.291 without; pair-fitted weights: 3D 0.46, boosting 0.42, fingerprint 0.11.</a:t>
             </a:r>
           </a:p>
           <a:p>
@@ -5004,37 +7083,7 @@
               </a:defRPr>
             </a:pPr>
             <a:r>
-              <a:t>A model that predicts the DIFFERENCE in log D between two adjacent lanthanides under identical conditions would allow in-silico screening of extractants for a target pair.</a:t>
-            </a:r>
-          </a:p>
-          <a:p>
-            <a:pPr>
-              <a:spcAft>
-                <a:spcPts val="600"/>
-              </a:spcAft>
-              <a:defRPr sz="1600" b="0">
-                <a:solidFill>
-                  <a:srgbClr val="22262A"/>
-                </a:solidFill>
-              </a:defRPr>
-            </a:pPr>
-            <a:r>
-              <a:t>Metric used throughout: R² of the predicted adjacent-pair log separation factor (905 pairs). Zero = no better than predicting the average separation for every pair.</a:t>
-            </a:r>
-          </a:p>
-          <a:p>
-            <a:pPr>
-              <a:spcAft>
-                <a:spcPts val="600"/>
-              </a:spcAft>
-              <a:defRPr sz="1600" b="0">
-                <a:solidFill>
-                  <a:srgbClr val="22262A"/>
-                </a:solidFill>
-              </a:defRPr>
-            </a:pPr>
-            <a:r>
-              <a:t>Hypothesis under test since the project began: quantum-chemistry-derived 3D structure (Architector + GFN2-xTB), read by a topological encoder, carries selectivity information that 2D descriptors miss.</a:t>
+              <a:t>The defensible claim is complementarity: the 3D encoder corrects errors the 2D models share. It has never been that the encoder outranks them.</a:t>
             </a:r>
           </a:p>
         </p:txBody>
@@ -5080,7 +7129,143 @@
           <a:lstStyle/>
           <a:p>
             <a:pPr>
-              <a:defRPr sz="2800" b="1">
+              <a:defRPr sz="2700" b="1">
+                <a:solidFill>
+                  <a:srgbClr val="1A2E4A"/>
+                </a:solidFill>
+              </a:defRPr>
+            </a:pPr>
+            <a:r>
+              <a:t>Adjacent lanthanides are the hard case of rare-earth separation</a:t>
+            </a:r>
+          </a:p>
+        </p:txBody>
+      </p:sp>
+      <p:sp>
+        <p:nvSpPr>
+          <p:cNvPr id="3" name="TextBox 2"/>
+          <p:cNvSpPr txBox="1"/>
+          <p:nvPr/>
+        </p:nvSpPr>
+        <p:spPr>
+          <a:xfrm>
+            <a:off x="548640" y="1325880"/>
+            <a:ext cx="11064240" cy="5303520"/>
+          </a:xfrm>
+          <a:prstGeom prst="rect">
+            <a:avLst/>
+          </a:prstGeom>
+          <a:noFill/>
+        </p:spPr>
+        <p:txBody>
+          <a:bodyPr wrap="square">
+            <a:spAutoFit/>
+          </a:bodyPr>
+          <a:lstStyle/>
+          <a:p>
+            <a:pPr>
+              <a:spcAft>
+                <a:spcPts val="600"/>
+              </a:spcAft>
+              <a:defRPr sz="1600" b="0">
+                <a:solidFill>
+                  <a:srgbClr val="22262A"/>
+                </a:solidFill>
+              </a:defRPr>
+            </a:pPr>
+            <a:r>
+              <a:t>Liquid–liquid extraction with designed organic extractants is the industrial route to rare-earth separation; neighbouring pairs (Nd/Pr, Dy/Tb) are the bottleneck.</a:t>
+            </a:r>
+          </a:p>
+          <a:p>
+            <a:pPr>
+              <a:spcAft>
+                <a:spcPts val="600"/>
+              </a:spcAft>
+              <a:defRPr sz="1600" b="0">
+                <a:solidFill>
+                  <a:srgbClr val="22262A"/>
+                </a:solidFill>
+              </a:defRPr>
+            </a:pPr>
+            <a:r>
+              <a:t>Adjacent trivalent ions differ by ~0.013 Å in ionic radius — the lanthanide contraction — and by essentially nothing else a classical descriptor sees.</a:t>
+            </a:r>
+          </a:p>
+          <a:p>
+            <a:pPr>
+              <a:spcAft>
+                <a:spcPts val="600"/>
+              </a:spcAft>
+              <a:defRPr sz="1600" b="1">
+                <a:solidFill>
+                  <a:srgbClr val="1A2E4A"/>
+                </a:solidFill>
+              </a:defRPr>
+            </a:pPr>
+            <a:r>
+              <a:t>Target capability: predict the DIFFERENCE in log D between adjacent lanthanides with the same extractant under the same conditions → in-silico screening for a target pair.</a:t>
+            </a:r>
+          </a:p>
+          <a:p>
+            <a:pPr>
+              <a:spcAft>
+                <a:spcPts val="600"/>
+              </a:spcAft>
+              <a:defRPr sz="1600" b="0">
+                <a:solidFill>
+                  <a:srgbClr val="22262A"/>
+                </a:solidFill>
+              </a:defRPr>
+            </a:pPr>
+            <a:r>
+              <a:t>Metric throughout: R² of the predicted adjacent-pair log separation factor (905 pairs). Zero = no better than the average separation for every pair.</a:t>
+            </a:r>
+          </a:p>
+        </p:txBody>
+      </p:sp>
+    </p:spTree>
+  </p:cSld>
+  <p:clrMapOvr>
+    <a:masterClrMapping/>
+  </p:clrMapOvr>
+</p:sld>
+</file>
+
+<file path=ppt/slides/slide4.xml><?xml version="1.0" encoding="utf-8"?>
+<p:sld xmlns:a="http://schemas.openxmlformats.org/drawingml/2006/main" xmlns:p="http://schemas.openxmlformats.org/presentationml/2006/main" xmlns:r="http://schemas.openxmlformats.org/officeDocument/2006/relationships">
+  <p:cSld>
+    <p:spTree>
+      <p:nvGrpSpPr>
+        <p:cNvPr id="1" name=""/>
+        <p:cNvGrpSpPr/>
+        <p:nvPr/>
+      </p:nvGrpSpPr>
+      <p:grpSpPr/>
+      <p:sp>
+        <p:nvSpPr>
+          <p:cNvPr id="2" name="TextBox 1"/>
+          <p:cNvSpPr txBox="1"/>
+          <p:nvPr/>
+        </p:nvSpPr>
+        <p:spPr>
+          <a:xfrm>
+            <a:off x="502920" y="274320"/>
+            <a:ext cx="11247120" cy="868680"/>
+          </a:xfrm>
+          <a:prstGeom prst="rect">
+            <a:avLst/>
+          </a:prstGeom>
+          <a:noFill/>
+        </p:spPr>
+        <p:txBody>
+          <a:bodyPr wrap="none">
+            <a:spAutoFit/>
+          </a:bodyPr>
+          <a:lstStyle/>
+          <a:p>
+            <a:pPr>
+              <a:defRPr sz="2700" b="1">
                 <a:solidFill>
                   <a:srgbClr val="1A2E4A"/>
                 </a:solidFill>
@@ -5099,7 +7284,7 @@
               </a:defRPr>
             </a:pPr>
             <a:r>
-              <a:t>Literature-curated, DOI-linked distribution-ratio measurements</a:t>
+              <a:t>DOI-linked, condition-resolved literature measurements</a:t>
             </a:r>
           </a:p>
         </p:txBody>
@@ -5191,7 +7376,7 @@
                         <a:defRPr sz="1400"/>
                       </a:pPr>
                       <a:r>
-                        <a:t>SAFE database: 48,138 curated measurements, 31 elements, 181 distinct publications (each row DOI-linked, with conditions)</a:t>
+                        <a:t>SAFE database: 48,138 curated measurements · 31 elements · 181 publications, each row DOI-linked</a:t>
                       </a:r>
                     </a:p>
                   </a:txBody>
@@ -5223,7 +7408,7 @@
                         <a:defRPr sz="1400"/>
                       </a:pPr>
                       <a:r>
-                        <a:t>extractant SMILES + concentration, acid + concentration, diluent, metal + oxidation state, temperature, phase modifiers</a:t>
+                        <a:t>extractant SMILES + conc., acid + conc., diluent, metal + oxidation state, temperature, modifiers</a:t>
                       </a:r>
                     </a:p>
                   </a:txBody>
@@ -5255,7 +7440,7 @@
                         <a:defRPr sz="1400"/>
                       </a:pPr>
                       <a:r>
-                        <a:t>trivalent lanthanides with resolvable structures: 4,746 measurements · 162 extractants · 14 lanthanides (Pm absent in nature)</a:t>
+                        <a:t>4,746 measurements · 162 extractants · 14 lanthanides (Pm absent in nature) · target: log D</a:t>
                       </a:r>
                     </a:p>
                   </a:txBody>
@@ -5272,7 +7457,7 @@
                         <a:defRPr sz="1400"/>
                       </a:pPr>
                       <a:r>
-                        <a:t>target</a:t>
+                        <a:t>blocking</a:t>
                       </a:r>
                     </a:p>
                   </a:txBody>
@@ -5287,7 +7472,7 @@
                         <a:defRPr sz="1400"/>
                       </a:pPr>
                       <a:r>
-                        <a:t>log D (distribution ratio, organic/aqueous)</a:t>
+                        <a:t>composition block = one extractant × one binned condition set; pairs differenced within blocks only</a:t>
                       </a:r>
                     </a:p>
                   </a:txBody>
@@ -5298,59 +7483,6 @@
           </a:graphicData>
         </a:graphic>
       </p:graphicFrame>
-      <p:sp>
-        <p:nvSpPr>
-          <p:cNvPr id="4" name="TextBox 3"/>
-          <p:cNvSpPr txBox="1"/>
-          <p:nvPr/>
-        </p:nvSpPr>
-        <p:spPr>
-          <a:xfrm>
-            <a:off x="548640" y="3977639"/>
-            <a:ext cx="11064240" cy="2651760"/>
-          </a:xfrm>
-          <a:prstGeom prst="rect">
-            <a:avLst/>
-          </a:prstGeom>
-          <a:noFill/>
-        </p:spPr>
-        <p:txBody>
-          <a:bodyPr wrap="square">
-            <a:spAutoFit/>
-          </a:bodyPr>
-          <a:lstStyle/>
-          <a:p>
-            <a:pPr>
-              <a:spcAft>
-                <a:spcPts val="600"/>
-              </a:spcAft>
-              <a:defRPr sz="1600" b="0">
-                <a:solidFill>
-                  <a:srgbClr val="22262A"/>
-                </a:solidFill>
-              </a:defRPr>
-            </a:pPr>
-            <a:r>
-              <a:t>Replicates are real replicates: the same (extractant, conditions, metal) measured in different labs/papers — later used to measure the label noise floor.</a:t>
-            </a:r>
-          </a:p>
-          <a:p>
-            <a:pPr>
-              <a:spcAft>
-                <a:spcPts val="600"/>
-              </a:spcAft>
-              <a:defRPr sz="1600" b="0">
-                <a:solidFill>
-                  <a:srgbClr val="22262A"/>
-                </a:solidFill>
-              </a:defRPr>
-            </a:pPr>
-            <a:r>
-              <a:t>Grouping key for selectivity: a composition block = one extractant under one binned condition set; adjacent pairs are differenced within blocks only.</a:t>
-            </a:r>
-          </a:p>
-        </p:txBody>
-      </p:sp>
     </p:spTree>
   </p:cSld>
   <p:clrMapOvr>
@@ -5359,7 +7491,7 @@
 </p:sld>
 </file>
 
-<file path=ppt/slides/slide4.xml><?xml version="1.0" encoding="utf-8"?>
+<file path=ppt/slides/slide5.xml><?xml version="1.0" encoding="utf-8"?>
 <p:sld xmlns:a="http://schemas.openxmlformats.org/drawingml/2006/main" xmlns:p="http://schemas.openxmlformats.org/presentationml/2006/main" xmlns:r="http://schemas.openxmlformats.org/officeDocument/2006/relationships">
   <p:cSld>
     <p:spTree>
@@ -5392,14 +7524,14 @@
           <a:lstStyle/>
           <a:p>
             <a:pPr>
-              <a:defRPr sz="2800" b="1">
+              <a:defRPr sz="2700" b="1">
                 <a:solidFill>
                   <a:srgbClr val="1A2E4A"/>
                 </a:solidFill>
               </a:defRPr>
             </a:pPr>
             <a:r>
-              <a:t>From SMILES to structure: the 3D compilation pipeline</a:t>
+              <a:t>From SMILES to simplicial complex</a:t>
             </a:r>
           </a:p>
         </p:txBody>
@@ -5423,9 +7555,9 @@
                 <a:tableStyleId>{5C22544A-7EE6-4342-B048-85BDC9FD1C3A}</a:tableStyleId>
               </a:tblPr>
               <a:tblGrid>
-                <a:gridCol w="2194560"/>
                 <a:gridCol w="2377440"/>
-                <a:gridCol w="6309360"/>
+                <a:gridCol w="2560320"/>
+                <a:gridCol w="5943600"/>
               </a:tblGrid>
               <a:tr h="344424">
                 <a:tc>
@@ -5434,7 +7566,7 @@
                     <a:lstStyle/>
                     <a:p>
                       <a:pPr>
-                        <a:defRPr sz="1300" b="1">
+                        <a:defRPr sz="1400" b="1">
                           <a:solidFill>
                             <a:srgbClr val="FFFFFF"/>
                           </a:solidFill>
@@ -5453,7 +7585,7 @@
                     <a:lstStyle/>
                     <a:p>
                       <a:pPr>
-                        <a:defRPr sz="1300" b="1">
+                        <a:defRPr sz="1400" b="1">
                           <a:solidFill>
                             <a:srgbClr val="FFFFFF"/>
                           </a:solidFill>
@@ -5472,7 +7604,7 @@
                     <a:lstStyle/>
                     <a:p>
                       <a:pPr>
-                        <a:defRPr sz="1300" b="1">
+                        <a:defRPr sz="1400" b="1">
                           <a:solidFill>
                             <a:srgbClr val="FFFFFF"/>
                           </a:solidFill>
@@ -5493,10 +7625,10 @@
                     <a:lstStyle/>
                     <a:p>
                       <a:pPr>
-                        <a:defRPr sz="1300"/>
+                        <a:defRPr sz="1400"/>
                       </a:pPr>
                       <a:r>
-                        <a:t>1. complex assembly</a:t>
+                        <a:t>complex assembly</a:t>
                       </a:r>
                     </a:p>
                   </a:txBody>
@@ -5508,7 +7640,7 @@
                     <a:lstStyle/>
                     <a:p>
                       <a:pPr>
-                        <a:defRPr sz="1300"/>
+                        <a:defRPr sz="1400"/>
                       </a:pPr>
                       <a:r>
                         <a:t>Architector</a:t>
@@ -5523,10 +7655,10 @@
                     <a:lstStyle/>
                     <a:p>
                       <a:pPr>
-                        <a:defRPr sz="1300"/>
+                        <a:defRPr sz="1400"/>
                       </a:pPr>
                       <a:r>
-                        <a:t>3D guess for each (extractant, Ln, anion/water fill) at chemically sensible coordination numbers (CN 8–9)</a:t>
+                        <a:t>3D guess per (extractant, Ln, anion/water fill), CN 8–9</a:t>
                       </a:r>
                     </a:p>
                   </a:txBody>
@@ -5540,10 +7672,10 @@
                     <a:lstStyle/>
                     <a:p>
                       <a:pPr>
-                        <a:defRPr sz="1300"/>
+                        <a:defRPr sz="1400"/>
                       </a:pPr>
                       <a:r>
-                        <a:t>2. relaxation</a:t>
+                        <a:t>relaxation</a:t>
                       </a:r>
                     </a:p>
                   </a:txBody>
@@ -5555,10 +7687,10 @@
                     <a:lstStyle/>
                     <a:p>
                       <a:pPr>
-                        <a:defRPr sz="1300"/>
+                        <a:defRPr sz="1400"/>
                       </a:pPr>
                       <a:r>
-                        <a:t>GFN2-xTB (ALPB water)</a:t>
+                        <a:t>GFN2-xTB, ALPB water</a:t>
                       </a:r>
                     </a:p>
                   </a:txBody>
@@ -5570,10 +7702,10 @@
                     <a:lstStyle/>
                     <a:p>
                       <a:pPr>
-                        <a:defRPr sz="1300"/>
+                        <a:defRPr sz="1400"/>
                       </a:pPr>
                       <a:r>
-                        <a:t>956 unique optimised complexes; convergence force-checked independently</a:t>
+                        <a:t>956 unique optimised complexes, force-checked</a:t>
                       </a:r>
                     </a:p>
                   </a:txBody>
@@ -5587,10 +7719,10 @@
                     <a:lstStyle/>
                     <a:p>
                       <a:pPr>
-                        <a:defRPr sz="1300"/>
+                        <a:defRPr sz="1400"/>
                       </a:pPr>
                       <a:r>
-                        <a:t>3. atom features</a:t>
+                        <a:t>atom features</a:t>
                       </a:r>
                     </a:p>
                   </a:txBody>
@@ -5602,7 +7734,7 @@
                     <a:lstStyle/>
                     <a:p>
                       <a:pPr>
-                        <a:defRPr sz="1300"/>
+                        <a:defRPr sz="1400"/>
                       </a:pPr>
                       <a:r>
                         <a:t>xTB Mulliken charges</a:t>
@@ -5617,10 +7749,10 @@
                     <a:lstStyle/>
                     <a:p>
                       <a:pPr>
-                        <a:defRPr sz="1300"/>
+                        <a:defRPr sz="1400"/>
                       </a:pPr>
                       <a:r>
-                        <a:t>per-atom partial charges; metal &amp; donor-atom flags; distances to metal</a:t>
+                        <a:t>per-atom charges; metal/donor flags; distances to metal</a:t>
                       </a:r>
                     </a:p>
                   </a:txBody>
@@ -5634,10 +7766,10 @@
                     <a:lstStyle/>
                     <a:p>
                       <a:pPr>
-                        <a:defRPr sz="1300"/>
+                        <a:defRPr sz="1400"/>
                       </a:pPr>
                       <a:r>
-                        <a:t>4. topological object</a:t>
+                        <a:t>topological object</a:t>
                       </a:r>
                     </a:p>
                   </a:txBody>
@@ -5649,10 +7781,10 @@
                     <a:lstStyle/>
                     <a:p>
                       <a:pPr>
-                        <a:defRPr sz="1300"/>
+                        <a:defRPr sz="1400"/>
                       </a:pPr>
                       <a:r>
-                        <a:t>Vietoris–Rips at 3.5 Å</a:t>
+                        <a:t>Vietoris–Rips @ 3.5 Å</a:t>
                       </a:r>
                     </a:p>
                   </a:txBody>
@@ -5664,10 +7796,10 @@
                     <a:lstStyle/>
                     <a:p>
                       <a:pPr>
-                        <a:defRPr sz="1300"/>
+                        <a:defRPr sz="1400"/>
                       </a:pPr>
                       <a:r>
-                        <a:t>nodes + edges + 2-simplices (triangles) per complex — the 3D encoder's input; no raw coordinates enter the network</a:t>
+                        <a:t>nodes + edges + triangles per complex — the 3D encoder input</a:t>
                       </a:r>
                     </a:p>
                   </a:txBody>
@@ -5681,10 +7813,10 @@
                     <a:lstStyle/>
                     <a:p>
                       <a:pPr>
-                        <a:defRPr sz="1300"/>
+                        <a:defRPr sz="1400"/>
                       </a:pPr>
                       <a:r>
-                        <a:t>5. tabular features</a:t>
+                        <a:t>tabular features</a:t>
                       </a:r>
                     </a:p>
                   </a:txBody>
@@ -5696,7 +7828,7 @@
                     <a:lstStyle/>
                     <a:p>
                       <a:pPr>
-                        <a:defRPr sz="1300"/>
+                        <a:defRPr sz="1400"/>
                       </a:pPr>
                       <a:r>
                         <a:t>RDKit · ECFP · conditions</a:t>
@@ -5711,10 +7843,10 @@
                     <a:lstStyle/>
                     <a:p>
                       <a:pPr>
-                        <a:defRPr sz="1300"/>
+                        <a:defRPr sz="1400"/>
                       </a:pPr>
                       <a:r>
-                        <a:t>746 columns: 2D descriptors, fingerprints, metal constants, 64 condition columns</a:t>
+                        <a:t>746 columns incl. 64 condition columns</a:t>
                       </a:r>
                     </a:p>
                   </a:txBody>
@@ -5725,145 +7857,6 @@
           </a:graphicData>
         </a:graphic>
       </p:graphicFrame>
-      <p:sp>
-        <p:nvSpPr>
-          <p:cNvPr id="4" name="TextBox 3"/>
-          <p:cNvSpPr txBox="1"/>
-          <p:nvPr/>
-        </p:nvSpPr>
-        <p:spPr>
-          <a:xfrm>
-            <a:off x="548640" y="4572000"/>
-            <a:ext cx="11064240" cy="2057400"/>
-          </a:xfrm>
-          <a:prstGeom prst="rect">
-            <a:avLst/>
-          </a:prstGeom>
-          <a:noFill/>
-        </p:spPr>
-        <p:txBody>
-          <a:bodyPr wrap="square">
-            <a:spAutoFit/>
-          </a:bodyPr>
-          <a:lstStyle/>
-          <a:p>
-            <a:pPr>
-              <a:spcAft>
-                <a:spcPts val="600"/>
-              </a:spcAft>
-              <a:defRPr sz="1600" b="1">
-                <a:solidFill>
-                  <a:srgbClr val="1A2E4A"/>
-                </a:solidFill>
-              </a:defRPr>
-            </a:pPr>
-            <a:r>
-              <a:t>Every result is leave-extractants-out CV (5 folds × 3 repeats): no ligand appears in both train and test. Ensembles of 16–32 seeds, scored out-of-fold.</a:t>
-            </a:r>
-          </a:p>
-        </p:txBody>
-      </p:sp>
-    </p:spTree>
-  </p:cSld>
-  <p:clrMapOvr>
-    <a:masterClrMapping/>
-  </p:clrMapOvr>
-</p:sld>
-</file>
-
-<file path=ppt/slides/slide5.xml><?xml version="1.0" encoding="utf-8"?>
-<p:sld xmlns:a="http://schemas.openxmlformats.org/drawingml/2006/main" xmlns:p="http://schemas.openxmlformats.org/presentationml/2006/main" xmlns:r="http://schemas.openxmlformats.org/officeDocument/2006/relationships">
-  <p:cSld>
-    <p:spTree>
-      <p:nvGrpSpPr>
-        <p:cNvPr id="1" name=""/>
-        <p:cNvGrpSpPr/>
-        <p:nvPr/>
-      </p:nvGrpSpPr>
-      <p:grpSpPr/>
-      <p:sp>
-        <p:nvSpPr>
-          <p:cNvPr id="2" name="TextBox 1"/>
-          <p:cNvSpPr txBox="1"/>
-          <p:nvPr/>
-        </p:nvSpPr>
-        <p:spPr>
-          <a:xfrm>
-            <a:off x="502920" y="274320"/>
-            <a:ext cx="11247120" cy="868680"/>
-          </a:xfrm>
-          <a:prstGeom prst="rect">
-            <a:avLst/>
-          </a:prstGeom>
-          <a:noFill/>
-        </p:spPr>
-        <p:txBody>
-          <a:bodyPr wrap="none">
-            <a:spAutoFit/>
-          </a:bodyPr>
-          <a:lstStyle/>
-          <a:p>
-            <a:pPr>
-              <a:defRPr sz="2800" b="1">
-                <a:solidFill>
-                  <a:srgbClr val="1A2E4A"/>
-                </a:solidFill>
-              </a:defRPr>
-            </a:pPr>
-            <a:r>
-              <a:t>The data at a glance</a:t>
-            </a:r>
-          </a:p>
-        </p:txBody>
-      </p:sp>
-      <p:pic>
-        <p:nvPicPr>
-          <p:cNvPr id="3" name="Picture 2" descr="f1_composition.png"/>
-          <p:cNvPicPr>
-            <a:picLocks noChangeAspect="1"/>
-          </p:cNvPicPr>
-          <p:nvPr/>
-        </p:nvPicPr>
-        <p:blipFill>
-          <a:blip r:embed="rId2"/>
-          <a:stretch>
-            <a:fillRect/>
-          </a:stretch>
-        </p:blipFill>
-        <p:spPr>
-          <a:xfrm>
-            <a:off x="2163927" y="1234440"/>
-            <a:ext cx="7863840" cy="3518033"/>
-          </a:xfrm>
-          <a:prstGeom prst="rect">
-            <a:avLst/>
-          </a:prstGeom>
-        </p:spPr>
-      </p:pic>
-      <p:pic>
-        <p:nvPicPr>
-          <p:cNvPr id="4" name="Picture 3" descr="f2_targets.png"/>
-          <p:cNvPicPr>
-            <a:picLocks noChangeAspect="1"/>
-          </p:cNvPicPr>
-          <p:nvPr/>
-        </p:nvPicPr>
-        <p:blipFill>
-          <a:blip r:embed="rId3"/>
-          <a:stretch>
-            <a:fillRect/>
-          </a:stretch>
-        </p:blipFill>
-        <p:spPr>
-          <a:xfrm>
-            <a:off x="1340967" y="3977639"/>
-            <a:ext cx="9509760" cy="3268980"/>
-          </a:xfrm>
-          <a:prstGeom prst="rect">
-            <a:avLst/>
-          </a:prstGeom>
-        </p:spPr>
-      </p:pic>
     </p:spTree>
   </p:cSld>
   <p:clrMapOvr>
@@ -5905,92 +7898,66 @@
           <a:lstStyle/>
           <a:p>
             <a:pPr>
-              <a:defRPr sz="2800" b="1">
+              <a:defRPr sz="2700" b="1">
                 <a:solidFill>
                   <a:srgbClr val="1A2E4A"/>
                 </a:solidFill>
               </a:defRPr>
             </a:pPr>
             <a:r>
-              <a:t>Feature-space structure: why this problem is hard</a:t>
-            </a:r>
-          </a:p>
-          <a:p>
-            <a:pPr>
-              <a:defRPr sz="1400">
-                <a:solidFill>
-                  <a:srgbClr val="555A60"/>
-                </a:solidFill>
-              </a:defRPr>
-            </a:pPr>
-            <a:r>
-              <a:t>PCA of the standardised 746-column matrix</a:t>
+              <a:t>The data at a glance</a:t>
             </a:r>
           </a:p>
         </p:txBody>
       </p:sp>
       <p:pic>
         <p:nvPicPr>
-          <p:cNvPr id="3" name="Picture 2" descr="f3_pca.png"/>
+          <p:cNvPr id="3" name="Picture 2" descr="f1_composition.png"/>
           <p:cNvPicPr>
             <a:picLocks noChangeAspect="1"/>
           </p:cNvPicPr>
           <p:nvPr/>
         </p:nvPicPr>
         <p:blipFill>
-          <a:blip r:embed="rId2"/>
+          <a:blip r:embed="rId3"/>
           <a:stretch>
             <a:fillRect/>
           </a:stretch>
         </p:blipFill>
         <p:spPr>
           <a:xfrm>
-            <a:off x="792327" y="1371600"/>
-            <a:ext cx="10607040" cy="4275381"/>
+            <a:off x="2255367" y="1234440"/>
+            <a:ext cx="7680960" cy="3436218"/>
           </a:xfrm>
           <a:prstGeom prst="rect">
             <a:avLst/>
           </a:prstGeom>
         </p:spPr>
       </p:pic>
-      <p:sp>
-        <p:nvSpPr>
-          <p:cNvPr id="4" name="TextBox 3"/>
-          <p:cNvSpPr txBox="1"/>
+      <p:pic>
+        <p:nvPicPr>
+          <p:cNvPr id="4" name="Picture 3" descr="f2_targets.png"/>
+          <p:cNvPicPr>
+            <a:picLocks noChangeAspect="1"/>
+          </p:cNvPicPr>
           <p:nvPr/>
-        </p:nvSpPr>
+        </p:nvPicPr>
+        <p:blipFill>
+          <a:blip r:embed="rId4"/>
+          <a:stretch>
+            <a:fillRect/>
+          </a:stretch>
+        </p:blipFill>
         <p:spPr>
           <a:xfrm>
-            <a:off x="548640" y="5806440"/>
-            <a:ext cx="11064240" cy="822960"/>
+            <a:off x="1432407" y="3977639"/>
+            <a:ext cx="9326880" cy="3206114"/>
           </a:xfrm>
           <a:prstGeom prst="rect">
             <a:avLst/>
           </a:prstGeom>
-          <a:noFill/>
         </p:spPr>
-        <p:txBody>
-          <a:bodyPr wrap="square">
-            <a:spAutoFit/>
-          </a:bodyPr>
-          <a:lstStyle/>
-          <a:p>
-            <a:pPr>
-              <a:spcAft>
-                <a:spcPts val="600"/>
-              </a:spcAft>
-              <a:defRPr sz="1400" b="1">
-                <a:solidFill>
-                  <a:srgbClr val="1A2E4A"/>
-                </a:solidFill>
-              </a:defRPr>
-            </a:pPr>
-            <a:r>
-              <a:t>Left: lanthanide identity is invisible in feature space. Right: extractant families dominate. The model must generalise ACROSS the clusters while resolving a signal orthogonal to them.</a:t>
-            </a:r>
-          </a:p>
-        </p:txBody>
-      </p:sp>
+      </p:pic>
     </p:spTree>
   </p:cSld>
   <p:clrMapOvr>
@@ -6032,14 +7999,239 @@
           <a:lstStyle/>
           <a:p>
             <a:pPr>
-              <a:defRPr sz="2800" b="1">
+              <a:defRPr sz="2700" b="1">
                 <a:solidFill>
                   <a:srgbClr val="1A2E4A"/>
                 </a:solidFill>
               </a:defRPr>
             </a:pPr>
             <a:r>
-              <a:t>Three model families, one combination</a:t>
+              <a:t>Why leave-extractants-out is the hard split</a:t>
+            </a:r>
+          </a:p>
+          <a:p>
+            <a:pPr>
+              <a:defRPr sz="1400">
+                <a:solidFill>
+                  <a:srgbClr val="555A60"/>
+                </a:solidFill>
+              </a:defRPr>
+            </a:pPr>
+            <a:r>
+              <a:t>PCA of the standardised 746-column matrix (winsorised at ±4σ)</a:t>
+            </a:r>
+          </a:p>
+        </p:txBody>
+      </p:sp>
+      <p:pic>
+        <p:nvPicPr>
+          <p:cNvPr id="3" name="Picture 2" descr="f3_pca.png"/>
+          <p:cNvPicPr>
+            <a:picLocks noChangeAspect="1"/>
+          </p:cNvPicPr>
+          <p:nvPr/>
+        </p:nvPicPr>
+        <p:blipFill>
+          <a:blip r:embed="rId3"/>
+          <a:stretch>
+            <a:fillRect/>
+          </a:stretch>
+        </p:blipFill>
+        <p:spPr>
+          <a:xfrm>
+            <a:off x="883767" y="1417320"/>
+            <a:ext cx="10424160" cy="4201668"/>
+          </a:xfrm>
+          <a:prstGeom prst="rect">
+            <a:avLst/>
+          </a:prstGeom>
+        </p:spPr>
+      </p:pic>
+    </p:spTree>
+  </p:cSld>
+  <p:clrMapOvr>
+    <a:masterClrMapping/>
+  </p:clrMapOvr>
+</p:sld>
+</file>
+
+<file path=ppt/slides/slide8.xml><?xml version="1.0" encoding="utf-8"?>
+<p:sld xmlns:a="http://schemas.openxmlformats.org/drawingml/2006/main" xmlns:p="http://schemas.openxmlformats.org/presentationml/2006/main" xmlns:r="http://schemas.openxmlformats.org/officeDocument/2006/relationships">
+  <p:cSld>
+    <p:spTree>
+      <p:nvGrpSpPr>
+        <p:cNvPr id="1" name=""/>
+        <p:cNvGrpSpPr/>
+        <p:nvPr/>
+      </p:nvGrpSpPr>
+      <p:grpSpPr/>
+      <p:sp>
+        <p:nvSpPr>
+          <p:cNvPr id="2" name="TextBox 1"/>
+          <p:cNvSpPr txBox="1"/>
+          <p:nvPr/>
+        </p:nvSpPr>
+        <p:spPr>
+          <a:xfrm>
+            <a:off x="502920" y="274320"/>
+            <a:ext cx="11247120" cy="868680"/>
+          </a:xfrm>
+          <a:prstGeom prst="rect">
+            <a:avLst/>
+          </a:prstGeom>
+          <a:noFill/>
+        </p:spPr>
+        <p:txBody>
+          <a:bodyPr wrap="none">
+            <a:spAutoFit/>
+          </a:bodyPr>
+          <a:lstStyle/>
+          <a:p>
+            <a:pPr>
+              <a:defRPr sz="2700" b="1">
+                <a:solidFill>
+                  <a:srgbClr val="1A2E4A"/>
+                </a:solidFill>
+              </a:defRPr>
+            </a:pPr>
+            <a:r>
+              <a:t>Evaluation protocol</a:t>
+            </a:r>
+          </a:p>
+        </p:txBody>
+      </p:sp>
+      <p:sp>
+        <p:nvSpPr>
+          <p:cNvPr id="3" name="TextBox 2"/>
+          <p:cNvSpPr txBox="1"/>
+          <p:nvPr/>
+        </p:nvSpPr>
+        <p:spPr>
+          <a:xfrm>
+            <a:off x="548640" y="1325880"/>
+            <a:ext cx="11064240" cy="5303520"/>
+          </a:xfrm>
+          <a:prstGeom prst="rect">
+            <a:avLst/>
+          </a:prstGeom>
+          <a:noFill/>
+        </p:spPr>
+        <p:txBody>
+          <a:bodyPr wrap="square">
+            <a:spAutoFit/>
+          </a:bodyPr>
+          <a:lstStyle/>
+          <a:p>
+            <a:pPr>
+              <a:spcAft>
+                <a:spcPts val="600"/>
+              </a:spcAft>
+              <a:defRPr sz="1600" b="1">
+                <a:solidFill>
+                  <a:srgbClr val="1A2E4A"/>
+                </a:solidFill>
+              </a:defRPr>
+            </a:pPr>
+            <a:r>
+              <a:t>Leave-extractants-out grouped CV, 5 folds × 3 repeats: no ligand in both train and test.</a:t>
+            </a:r>
+          </a:p>
+          <a:p>
+            <a:pPr>
+              <a:spcAft>
+                <a:spcPts val="600"/>
+              </a:spcAft>
+              <a:defRPr sz="1600" b="0">
+                <a:solidFill>
+                  <a:srgbClr val="22262A"/>
+                </a:solidFill>
+              </a:defRPr>
+            </a:pPr>
+            <a:r>
+              <a:t>Adjacent pairs built inside composition blocks; replicate measurements of the same (block, metal) averaged first so each contributes one point.</a:t>
+            </a:r>
+          </a:p>
+          <a:p>
+            <a:pPr>
+              <a:spcAft>
+                <a:spcPts val="600"/>
+              </a:spcAft>
+              <a:defRPr sz="1600" b="0">
+                <a:solidFill>
+                  <a:srgbClr val="22262A"/>
+                </a:solidFill>
+              </a:defRPr>
+            </a:pPr>
+            <a:r>
+              <a:t>All reported models are 16–32-seed ensembles scored out-of-fold; deterministic training for paired seed-vs-seed contrasts.</a:t>
+            </a:r>
+          </a:p>
+          <a:p>
+            <a:pPr>
+              <a:spcAft>
+                <a:spcPts val="600"/>
+              </a:spcAft>
+              <a:defRPr sz="1600" b="1">
+                <a:solidFill>
+                  <a:srgbClr val="1A2E4A"/>
+                </a:solidFill>
+              </a:defRPr>
+            </a:pPr>
+            <a:r>
+              <a:t>Measured per-seed sd of a paired Δ: 0.0285 → 8 seeds resolve only ~0.028. Every confirmatory claim in this talk uses 24–32 paired seeds.</a:t>
+            </a:r>
+          </a:p>
+        </p:txBody>
+      </p:sp>
+    </p:spTree>
+  </p:cSld>
+  <p:clrMapOvr>
+    <a:masterClrMapping/>
+  </p:clrMapOvr>
+</p:sld>
+</file>
+
+<file path=ppt/slides/slide9.xml><?xml version="1.0" encoding="utf-8"?>
+<p:sld xmlns:a="http://schemas.openxmlformats.org/drawingml/2006/main" xmlns:p="http://schemas.openxmlformats.org/presentationml/2006/main" xmlns:r="http://schemas.openxmlformats.org/officeDocument/2006/relationships">
+  <p:cSld>
+    <p:spTree>
+      <p:nvGrpSpPr>
+        <p:cNvPr id="1" name=""/>
+        <p:cNvGrpSpPr/>
+        <p:nvPr/>
+      </p:nvGrpSpPr>
+      <p:grpSpPr/>
+      <p:sp>
+        <p:nvSpPr>
+          <p:cNvPr id="2" name="TextBox 1"/>
+          <p:cNvSpPr txBox="1"/>
+          <p:nvPr/>
+        </p:nvSpPr>
+        <p:spPr>
+          <a:xfrm>
+            <a:off x="502920" y="274320"/>
+            <a:ext cx="11247120" cy="868680"/>
+          </a:xfrm>
+          <a:prstGeom prst="rect">
+            <a:avLst/>
+          </a:prstGeom>
+          <a:noFill/>
+        </p:spPr>
+        <p:txBody>
+          <a:bodyPr wrap="none">
+            <a:spAutoFit/>
+          </a:bodyPr>
+          <a:lstStyle/>
+          <a:p>
+            <a:pPr>
+              <a:defRPr sz="2700" b="1">
+                <a:solidFill>
+                  <a:srgbClr val="1A2E4A"/>
+                </a:solidFill>
+              </a:defRPr>
+            </a:pPr>
+            <a:r>
+              <a:t>Three model families, one pair-fitted combination</a:t>
             </a:r>
           </a:p>
         </p:txBody>
@@ -6063,9 +8255,9 @@
                 <a:tableStyleId>{5C22544A-7EE6-4342-B048-85BDC9FD1C3A}</a:tableStyleId>
               </a:tblPr>
               <a:tblGrid>
-                <a:gridCol w="3017520"/>
+                <a:gridCol w="2926080"/>
                 <a:gridCol w="2651760"/>
-                <a:gridCol w="5212080"/>
+                <a:gridCol w="5303520"/>
               </a:tblGrid>
               <a:tr h="347472">
                 <a:tc>
@@ -6074,7 +8266,7 @@
                     <a:lstStyle/>
                     <a:p>
                       <a:pPr>
-                        <a:defRPr sz="1350" b="1">
+                        <a:defRPr sz="1400" b="1">
                           <a:solidFill>
                             <a:srgbClr val="FFFFFF"/>
                           </a:solidFill>
@@ -6093,7 +8285,7 @@
                     <a:lstStyle/>
                     <a:p>
                       <a:pPr>
-                        <a:defRPr sz="1350" b="1">
+                        <a:defRPr sz="1400" b="1">
                           <a:solidFill>
                             <a:srgbClr val="FFFFFF"/>
                           </a:solidFill>
@@ -6112,14 +8304,14 @@
                     <a:lstStyle/>
                     <a:p>
                       <a:pPr>
-                        <a:defRPr sz="1350" b="1">
+                        <a:defRPr sz="1400" b="1">
                           <a:solidFill>
                             <a:srgbClr val="FFFFFF"/>
                           </a:solidFill>
                         </a:defRPr>
                       </a:pPr>
                       <a:r>
-                        <a:t>notes</a:t>
+                        <a:t>key design point</a:t>
                       </a:r>
                     </a:p>
                   </a:txBody>
@@ -6133,7 +8325,7 @@
                     <a:lstStyle/>
                     <a:p>
                       <a:pPr>
-                        <a:defRPr sz="1350"/>
+                        <a:defRPr sz="1400"/>
                       </a:pPr>
                       <a:r>
                         <a:t>gradient boosting (CatBoost)</a:t>
@@ -6148,7 +8340,7 @@
                     <a:lstStyle/>
                     <a:p>
                       <a:pPr>
-                        <a:defRPr sz="1350"/>
+                        <a:defRPr sz="1400"/>
                       </a:pPr>
                       <a:r>
                         <a:t>746 tabular columns</a:t>
@@ -6163,10 +8355,10 @@
                     <a:lstStyle/>
                     <a:p>
                       <a:pPr>
-                        <a:defRPr sz="1350"/>
+                        <a:defRPr sz="1400"/>
                       </a:pPr>
                       <a:r>
-                        <a:t>strongest on absolute log D; loss function turned out to be decisive</a:t>
+                        <a:t>loss function decisive (next slides)</a:t>
                       </a:r>
                     </a:p>
                   </a:txBody>
@@ -6180,7 +8372,7 @@
                     <a:lstStyle/>
                     <a:p>
                       <a:pPr>
-                        <a:defRPr sz="1350"/>
+                        <a:defRPr sz="1400"/>
                       </a:pPr>
                       <a:r>
                         <a:t>fingerprint network</a:t>
@@ -6195,7 +8387,7 @@
                     <a:lstStyle/>
                     <a:p>
                       <a:pPr>
-                        <a:defRPr sz="1350"/>
+                        <a:defRPr sz="1400"/>
                       </a:pPr>
                       <a:r>
                         <a:t>ECFP + descriptors</a:t>
@@ -6210,10 +8402,10 @@
                     <a:lstStyle/>
                     <a:p>
                       <a:pPr>
-                        <a:defRPr sz="1350"/>
+                        <a:defRPr sz="1400"/>
                       </a:pPr>
                       <a:r>
-                        <a:t>scaling repair (quantile → standard) took it from 0.005 to 0.221 on pairs</a:t>
+                        <a:t>scaling repair took pairs R² 0.005 → 0.221</a:t>
                       </a:r>
                     </a:p>
                   </a:txBody>
@@ -6227,10 +8419,10 @@
                     <a:lstStyle/>
                     <a:p>
                       <a:pPr>
-                        <a:defRPr sz="1350"/>
+                        <a:defRPr sz="1400"/>
                       </a:pPr>
                       <a:r>
-                        <a:t>3D encoder</a:t>
+                        <a:t>3D encoder (simplicial)</a:t>
                       </a:r>
                     </a:p>
                   </a:txBody>
@@ -6242,10 +8434,10 @@
                     <a:lstStyle/>
                     <a:p>
                       <a:pPr>
-                        <a:defRPr sz="1350"/>
+                        <a:defRPr sz="1400"/>
                       </a:pPr>
                       <a:r>
-                        <a:t>Vietoris–Rips complex</a:t>
+                        <a:t>VR complex</a:t>
                       </a:r>
                     </a:p>
                   </a:txBody>
@@ -6257,10 +8449,10 @@
                     <a:lstStyle/>
                     <a:p>
                       <a:pPr>
-                        <a:defRPr sz="1350"/>
+                        <a:defRPr sz="1400"/>
                       </a:pPr>
                       <a:r>
-                        <a:t>3 rounds of message passing over nodes/edges/triangles; metal-centred distance-histogram pooling (without it, the encoder cannot even recover the lanthanide index: R² 0.016)</a:t>
+                        <a:t>message passing over nodes/edges/triangles; metal-centred distance-histogram pooling</a:t>
                       </a:r>
                     </a:p>
                   </a:txBody>
@@ -6274,7 +8466,7 @@
                     <a:lstStyle/>
                     <a:p>
                       <a:pPr>
-                        <a:defRPr sz="1350"/>
+                        <a:defRPr sz="1400"/>
                       </a:pPr>
                       <a:r>
                         <a:t>combination</a:t>
@@ -6289,7 +8481,7 @@
                     <a:lstStyle/>
                     <a:p>
                       <a:pPr>
-                        <a:defRPr sz="1350"/>
+                        <a:defRPr sz="1400"/>
                       </a:pPr>
                       <a:r>
                         <a:t>all three</a:t>
@@ -6304,7 +8496,7 @@
                     <a:lstStyle/>
                     <a:p>
                       <a:pPr>
-                        <a:defRPr sz="1350"/>
+                        <a:defRPr sz="1400"/>
                       </a:pPr>
                       <a:r>
                         <a:t>weights fitted on PAIR vectors, nested per held-out extractant (NNLS)</a:t>
@@ -6318,349 +8510,6 @@
           </a:graphicData>
         </a:graphic>
       </p:graphicFrame>
-      <p:sp>
-        <p:nvSpPr>
-          <p:cNvPr id="4" name="TextBox 3"/>
-          <p:cNvSpPr txBox="1"/>
-          <p:nvPr/>
-        </p:nvSpPr>
-        <p:spPr>
-          <a:xfrm>
-            <a:off x="548640" y="4480560"/>
-            <a:ext cx="11064240" cy="2148839"/>
-          </a:xfrm>
-          <a:prstGeom prst="rect">
-            <a:avLst/>
-          </a:prstGeom>
-          <a:noFill/>
-        </p:spPr>
-        <p:txBody>
-          <a:bodyPr wrap="square">
-            <a:spAutoFit/>
-          </a:bodyPr>
-          <a:lstStyle/>
-          <a:p>
-            <a:pPr>
-              <a:spcAft>
-                <a:spcPts val="600"/>
-              </a:spcAft>
-              <a:defRPr sz="1600" b="0">
-                <a:solidFill>
-                  <a:srgbClr val="22262A"/>
-                </a:solidFill>
-              </a:defRPr>
-            </a:pPr>
-            <a:r>
-              <a:t>The pair-fitted combiner matters: fitting stack weights on rows hands 79% of the weight to the model best at levels and worst at pairs; fitting on the scored quantity was worth +0.056.</a:t>
-            </a:r>
-          </a:p>
-        </p:txBody>
-      </p:sp>
-    </p:spTree>
-  </p:cSld>
-  <p:clrMapOvr>
-    <a:masterClrMapping/>
-  </p:clrMapOvr>
-</p:sld>
-</file>
-
-<file path=ppt/slides/slide8.xml><?xml version="1.0" encoding="utf-8"?>
-<p:sld xmlns:a="http://schemas.openxmlformats.org/drawingml/2006/main" xmlns:p="http://schemas.openxmlformats.org/presentationml/2006/main" xmlns:r="http://schemas.openxmlformats.org/officeDocument/2006/relationships">
-  <p:cSld>
-    <p:spTree>
-      <p:nvGrpSpPr>
-        <p:cNvPr id="1" name=""/>
-        <p:cNvGrpSpPr/>
-        <p:nvPr/>
-      </p:nvGrpSpPr>
-      <p:grpSpPr/>
-      <p:sp>
-        <p:nvSpPr>
-          <p:cNvPr id="2" name="TextBox 1"/>
-          <p:cNvSpPr txBox="1"/>
-          <p:nvPr/>
-        </p:nvSpPr>
-        <p:spPr>
-          <a:xfrm>
-            <a:off x="502920" y="274320"/>
-            <a:ext cx="11247120" cy="868680"/>
-          </a:xfrm>
-          <a:prstGeom prst="rect">
-            <a:avLst/>
-          </a:prstGeom>
-          <a:noFill/>
-        </p:spPr>
-        <p:txBody>
-          <a:bodyPr wrap="none">
-            <a:spAutoFit/>
-          </a:bodyPr>
-          <a:lstStyle/>
-          <a:p>
-            <a:pPr>
-              <a:defRPr sz="2800" b="1">
-                <a:solidFill>
-                  <a:srgbClr val="1A2E4A"/>
-                </a:solidFill>
-              </a:defRPr>
-            </a:pPr>
-            <a:r>
-              <a:t>Your question: “constantly more accurate — am I right?”</a:t>
-            </a:r>
-          </a:p>
-          <a:p>
-            <a:pPr>
-              <a:defRPr sz="1400">
-                <a:solidFill>
-                  <a:srgbClr val="555A60"/>
-                </a:solidFill>
-              </a:defRPr>
-            </a:pPr>
-            <a:r>
-              <a:t>The precise answer, before the numbers</a:t>
-            </a:r>
-          </a:p>
-        </p:txBody>
-      </p:sp>
-      <p:sp>
-        <p:nvSpPr>
-          <p:cNvPr id="3" name="TextBox 2"/>
-          <p:cNvSpPr txBox="1"/>
-          <p:nvPr/>
-        </p:nvSpPr>
-        <p:spPr>
-          <a:xfrm>
-            <a:off x="548640" y="1325880"/>
-            <a:ext cx="11064240" cy="5303520"/>
-          </a:xfrm>
-          <a:prstGeom prst="rect">
-            <a:avLst/>
-          </a:prstGeom>
-          <a:noFill/>
-        </p:spPr>
-        <p:txBody>
-          <a:bodyPr wrap="square">
-            <a:spAutoFit/>
-          </a:bodyPr>
-          <a:lstStyle/>
-          <a:p>
-            <a:pPr>
-              <a:spcAft>
-                <a:spcPts val="600"/>
-              </a:spcAft>
-              <a:defRPr sz="1600" b="1">
-                <a:solidFill>
-                  <a:srgbClr val="A8322D"/>
-                </a:solidFill>
-              </a:defRPr>
-            </a:pPr>
-            <a:r>
-              <a:t>Not constantly more accurate as a single model — that was true in July, and is no longer.</a:t>
-            </a:r>
-          </a:p>
-          <a:p>
-            <a:pPr lvl="1">
-              <a:spcAft>
-                <a:spcPts val="600"/>
-              </a:spcAft>
-              <a:defRPr sz="1400" b="0">
-                <a:solidFill>
-                  <a:srgbClr val="22262A"/>
-                </a:solidFill>
-              </a:defRPr>
-            </a:pPr>
-            <a:r>
-              <a:t>With the right loss, gradient boosting on 2D descriptors now reaches 0.278 — above the 3D encoder alone (0.266) and above July's full combination (0.267).</a:t>
-            </a:r>
-          </a:p>
-          <a:p>
-            <a:pPr>
-              <a:spcAft>
-                <a:spcPts val="600"/>
-              </a:spcAft>
-              <a:defRPr sz="1600" b="1">
-                <a:solidFill>
-                  <a:srgbClr val="0E7A5F"/>
-                </a:solidFill>
-              </a:defRPr>
-            </a:pPr>
-            <a:r>
-              <a:t>But the best system still requires the 3D encoder.</a:t>
-            </a:r>
-          </a:p>
-          <a:p>
-            <a:pPr lvl="1">
-              <a:spcAft>
-                <a:spcPts val="600"/>
-              </a:spcAft>
-              <a:defRPr sz="1400" b="0">
-                <a:solidFill>
-                  <a:srgbClr val="22262A"/>
-                </a:solidFill>
-              </a:defRPr>
-            </a:pPr>
-            <a:r>
-              <a:t>0.313 with it vs 0.291 without; the pair-fitted combiner gives the 3D arm the LARGEST weight of the three (0.46 vs 0.42 boosting, 0.11 fingerprint).</a:t>
-            </a:r>
-          </a:p>
-          <a:p>
-            <a:pPr>
-              <a:spcAft>
-                <a:spcPts val="600"/>
-              </a:spcAft>
-              <a:defRPr sz="1600" b="1">
-                <a:solidFill>
-                  <a:srgbClr val="1A2E4A"/>
-                </a:solidFill>
-              </a:defRPr>
-            </a:pPr>
-            <a:r>
-              <a:t>The claim I will defend: the 3D encoder contributes by complementarity — it corrects errors the 2D models share — and that contribution is real under the published blocking and shrinks under stricter blocking.</a:t>
-            </a:r>
-          </a:p>
-        </p:txBody>
-      </p:sp>
-    </p:spTree>
-  </p:cSld>
-  <p:clrMapOvr>
-    <a:masterClrMapping/>
-  </p:clrMapOvr>
-</p:sld>
-</file>
-
-<file path=ppt/slides/slide9.xml><?xml version="1.0" encoding="utf-8"?>
-<p:sld xmlns:a="http://schemas.openxmlformats.org/drawingml/2006/main" xmlns:p="http://schemas.openxmlformats.org/presentationml/2006/main" xmlns:r="http://schemas.openxmlformats.org/officeDocument/2006/relationships">
-  <p:cSld>
-    <p:spTree>
-      <p:nvGrpSpPr>
-        <p:cNvPr id="1" name=""/>
-        <p:cNvGrpSpPr/>
-        <p:nvPr/>
-      </p:nvGrpSpPr>
-      <p:grpSpPr/>
-      <p:sp>
-        <p:nvSpPr>
-          <p:cNvPr id="2" name="TextBox 1"/>
-          <p:cNvSpPr txBox="1"/>
-          <p:nvPr/>
-        </p:nvSpPr>
-        <p:spPr>
-          <a:xfrm>
-            <a:off x="502920" y="274320"/>
-            <a:ext cx="11247120" cy="868680"/>
-          </a:xfrm>
-          <a:prstGeom prst="rect">
-            <a:avLst/>
-          </a:prstGeom>
-          <a:noFill/>
-        </p:spPr>
-        <p:txBody>
-          <a:bodyPr wrap="none">
-            <a:spAutoFit/>
-          </a:bodyPr>
-          <a:lstStyle/>
-          <a:p>
-            <a:pPr>
-              <a:defRPr sz="2800" b="1">
-                <a:solidFill>
-                  <a:srgbClr val="1A2E4A"/>
-                </a:solidFill>
-              </a:defRPr>
-            </a:pPr>
-            <a:r>
-              <a:t>Results: July → today</a:t>
-            </a:r>
-          </a:p>
-          <a:p>
-            <a:pPr>
-              <a:defRPr sz="1400">
-                <a:solidFill>
-                  <a:srgbClr val="555A60"/>
-                </a:solidFill>
-              </a:defRPr>
-            </a:pPr>
-            <a:r>
-              <a:t>Both improvements are objective-function changes; no architecture changed</a:t>
-            </a:r>
-          </a:p>
-        </p:txBody>
-      </p:sp>
-      <p:pic>
-        <p:nvPicPr>
-          <p:cNvPr id="3" name="Picture 2" descr="f4_ladder.png"/>
-          <p:cNvPicPr>
-            <a:picLocks noChangeAspect="1"/>
-          </p:cNvPicPr>
-          <p:nvPr/>
-        </p:nvPicPr>
-        <p:blipFill>
-          <a:blip r:embed="rId2"/>
-          <a:stretch>
-            <a:fillRect/>
-          </a:stretch>
-        </p:blipFill>
-        <p:spPr>
-          <a:xfrm>
-            <a:off x="1615287" y="1371600"/>
-            <a:ext cx="8961120" cy="3751166"/>
-          </a:xfrm>
-          <a:prstGeom prst="rect">
-            <a:avLst/>
-          </a:prstGeom>
-        </p:spPr>
-      </p:pic>
-      <p:sp>
-        <p:nvSpPr>
-          <p:cNvPr id="4" name="TextBox 3"/>
-          <p:cNvSpPr txBox="1"/>
-          <p:nvPr/>
-        </p:nvSpPr>
-        <p:spPr>
-          <a:xfrm>
-            <a:off x="548640" y="5029200"/>
-            <a:ext cx="11064240" cy="1600200"/>
-          </a:xfrm>
-          <a:prstGeom prst="rect">
-            <a:avLst/>
-          </a:prstGeom>
-          <a:noFill/>
-        </p:spPr>
-        <p:txBody>
-          <a:bodyPr wrap="square">
-            <a:spAutoFit/>
-          </a:bodyPr>
-          <a:lstStyle/>
-          <a:p>
-            <a:pPr>
-              <a:spcAft>
-                <a:spcPts val="600"/>
-              </a:spcAft>
-              <a:defRPr sz="1600" b="0">
-                <a:solidFill>
-                  <a:srgbClr val="22262A"/>
-                </a:solidFill>
-              </a:defRPr>
-            </a:pPr>
-            <a:r>
-              <a:t>Boosting: RMSE → MAE → Quantile(0.6) + hyperparameters re-tuned under that loss (+0.136 cumulative; +0.016 confirmed on a held-out third).</a:t>
-            </a:r>
-          </a:p>
-          <a:p>
-            <a:pPr>
-              <a:spcAft>
-                <a:spcPts val="600"/>
-              </a:spcAft>
-              <a:defRPr sz="1600" b="0">
-                <a:solidFill>
-                  <a:srgbClr val="22262A"/>
-                </a:solidFill>
-              </a:defRPr>
-            </a:pPr>
-            <a:r>
-              <a:t>3D encoder: contrast-loss weight 2 → 4 (next slides). Fingerprint network unchanged.</a:t>
-            </a:r>
-          </a:p>
-        </p:txBody>
-      </p:sp>
     </p:spTree>
   </p:cSld>
   <p:clrMapOvr>
@@ -6987,4 +8836,324 @@
   </a:objectDefaults>
   <a:extraClrSchemeLst/>
 </a:theme>
+</file>
+
+<file path=ppt/theme/theme2.xml><?xml version="1.0" encoding="utf-8"?>
+<a:theme xmlns:a="http://schemas.openxmlformats.org/drawingml/2006/main" name="Office Theme">
+  <a:themeElements>
+    <a:clrScheme name="Office">
+      <a:dk1>
+        <a:sysClr val="windowText" lastClr="000000"/>
+      </a:dk1>
+      <a:lt1>
+        <a:sysClr val="window" lastClr="FFFFFF"/>
+      </a:lt1>
+      <a:dk2>
+        <a:srgbClr val="1F497D"/>
+      </a:dk2>
+      <a:lt2>
+        <a:srgbClr val="EEECE1"/>
+      </a:lt2>
+      <a:accent1>
+        <a:srgbClr val="4F81BD"/>
+      </a:accent1>
+      <a:accent2>
+        <a:srgbClr val="C0504D"/>
+      </a:accent2>
+      <a:accent3>
+        <a:srgbClr val="9BBB59"/>
+      </a:accent3>
+      <a:accent4>
+        <a:srgbClr val="8064A2"/>
+      </a:accent4>
+      <a:accent5>
+        <a:srgbClr val="4BACC6"/>
+      </a:accent5>
+      <a:accent6>
+        <a:srgbClr val="F79646"/>
+      </a:accent6>
+      <a:hlink>
+        <a:srgbClr val="0000FF"/>
+      </a:hlink>
+      <a:folHlink>
+        <a:srgbClr val="800080"/>
+      </a:folHlink>
+    </a:clrScheme>
+    <a:fontScheme name="Office">
+      <a:majorFont>
+        <a:latin typeface="Calibri"/>
+        <a:ea typeface=""/>
+        <a:cs typeface=""/>
+        <a:font script="Jpan" typeface="ＭＳ Ｐゴシック"/>
+        <a:font script="Hang" typeface="맑은 고딕"/>
+        <a:font script="Hans" typeface="宋体"/>
+        <a:font script="Hant" typeface="新細明體"/>
+        <a:font script="Arab" typeface="Times New Roman"/>
+        <a:font script="Hebr" typeface="Times New Roman"/>
+        <a:font script="Thai" typeface="Angsana New"/>
+        <a:font script="Ethi" typeface="Nyala"/>
+        <a:font script="Beng" typeface="Vrinda"/>
+        <a:font script="Gujr" typeface="Shruti"/>
+        <a:font script="Khmr" typeface="MoolBoran"/>
+        <a:font script="Knda" typeface="Tunga"/>
+        <a:font script="Guru" typeface="Raavi"/>
+        <a:font script="Cans" typeface="Euphemia"/>
+        <a:font script="Cher" typeface="Plantagenet Cherokee"/>
+        <a:font script="Yiii" typeface="Microsoft Yi Baiti"/>
+        <a:font script="Tibt" typeface="Microsoft Himalaya"/>
+        <a:font script="Thaa" typeface="MV Boli"/>
+        <a:font script="Deva" typeface="Mangal"/>
+        <a:font script="Telu" typeface="Gautami"/>
+        <a:font script="Taml" typeface="Latha"/>
+        <a:font script="Syrc" typeface="Estrangelo Edessa"/>
+        <a:font script="Orya" typeface="Kalinga"/>
+        <a:font script="Mlym" typeface="Kartika"/>
+        <a:font script="Laoo" typeface="DokChampa"/>
+        <a:font script="Sinh" typeface="Iskoola Pota"/>
+        <a:font script="Mong" typeface="Mongolian Baiti"/>
+        <a:font script="Viet" typeface="Times New Roman"/>
+        <a:font script="Uigh" typeface="Microsoft Uighur"/>
+        <a:font script="Geor" typeface="Sylfaen"/>
+      </a:majorFont>
+      <a:minorFont>
+        <a:latin typeface="Calibri"/>
+        <a:ea typeface=""/>
+        <a:cs typeface=""/>
+        <a:font script="Jpan" typeface="ＭＳ Ｐゴシック"/>
+        <a:font script="Hang" typeface="맑은 고딕"/>
+        <a:font script="Hans" typeface="宋体"/>
+        <a:font script="Hant" typeface="新細明體"/>
+        <a:font script="Arab" typeface="Arial"/>
+        <a:font script="Hebr" typeface="Arial"/>
+        <a:font script="Thai" typeface="Cordia New"/>
+        <a:font script="Ethi" typeface="Nyala"/>
+        <a:font script="Beng" typeface="Vrinda"/>
+        <a:font script="Gujr" typeface="Shruti"/>
+        <a:font script="Khmr" typeface="DaunPenh"/>
+        <a:font script="Knda" typeface="Tunga"/>
+        <a:font script="Guru" typeface="Raavi"/>
+        <a:font script="Cans" typeface="Euphemia"/>
+        <a:font script="Cher" typeface="Plantagenet Cherokee"/>
+        <a:font script="Yiii" typeface="Microsoft Yi Baiti"/>
+        <a:font script="Tibt" typeface="Microsoft Himalaya"/>
+        <a:font script="Thaa" typeface="MV Boli"/>
+        <a:font script="Deva" typeface="Mangal"/>
+        <a:font script="Telu" typeface="Gautami"/>
+        <a:font script="Taml" typeface="Latha"/>
+        <a:font script="Syrc" typeface="Estrangelo Edessa"/>
+        <a:font script="Orya" typeface="Kalinga"/>
+        <a:font script="Mlym" typeface="Kartika"/>
+        <a:font script="Laoo" typeface="DokChampa"/>
+        <a:font script="Sinh" typeface="Iskoola Pota"/>
+        <a:font script="Mong" typeface="Mongolian Baiti"/>
+        <a:font script="Viet" typeface="Arial"/>
+        <a:font script="Uigh" typeface="Microsoft Uighur"/>
+        <a:font script="Geor" typeface="Sylfaen"/>
+      </a:minorFont>
+    </a:fontScheme>
+    <a:fmtScheme name="Office">
+      <a:fillStyleLst>
+        <a:solidFill>
+          <a:schemeClr val="phClr"/>
+        </a:solidFill>
+        <a:gradFill rotWithShape="1">
+          <a:gsLst>
+            <a:gs pos="0">
+              <a:schemeClr val="phClr">
+                <a:tint val="50000"/>
+                <a:satMod val="300000"/>
+              </a:schemeClr>
+            </a:gs>
+            <a:gs pos="35000">
+              <a:schemeClr val="phClr">
+                <a:tint val="37000"/>
+                <a:satMod val="300000"/>
+              </a:schemeClr>
+            </a:gs>
+            <a:gs pos="100000">
+              <a:schemeClr val="phClr">
+                <a:tint val="15000"/>
+                <a:satMod val="350000"/>
+              </a:schemeClr>
+            </a:gs>
+          </a:gsLst>
+          <a:lin ang="16200000" scaled="1"/>
+        </a:gradFill>
+        <a:gradFill rotWithShape="1">
+          <a:gsLst>
+            <a:gs pos="0">
+              <a:schemeClr val="phClr">
+                <a:tint val="100000"/>
+                <a:shade val="100000"/>
+                <a:satMod val="130000"/>
+              </a:schemeClr>
+            </a:gs>
+            <a:gs pos="100000">
+              <a:schemeClr val="phClr">
+                <a:tint val="50000"/>
+                <a:shade val="100000"/>
+                <a:satMod val="350000"/>
+              </a:schemeClr>
+            </a:gs>
+          </a:gsLst>
+          <a:lin ang="16200000" scaled="0"/>
+        </a:gradFill>
+      </a:fillStyleLst>
+      <a:lnStyleLst>
+        <a:ln w="9525" cap="flat" cmpd="sng" algn="ctr">
+          <a:solidFill>
+            <a:schemeClr val="phClr">
+              <a:shade val="95000"/>
+              <a:satMod val="105000"/>
+            </a:schemeClr>
+          </a:solidFill>
+          <a:prstDash val="solid"/>
+        </a:ln>
+        <a:ln w="25400" cap="flat" cmpd="sng" algn="ctr">
+          <a:solidFill>
+            <a:schemeClr val="phClr"/>
+          </a:solidFill>
+          <a:prstDash val="solid"/>
+        </a:ln>
+        <a:ln w="38100" cap="flat" cmpd="sng" algn="ctr">
+          <a:solidFill>
+            <a:schemeClr val="phClr"/>
+          </a:solidFill>
+          <a:prstDash val="solid"/>
+        </a:ln>
+      </a:lnStyleLst>
+      <a:effectStyleLst>
+        <a:effectStyle>
+          <a:effectLst>
+            <a:outerShdw blurRad="40000" dist="20000" dir="5400000" rotWithShape="0">
+              <a:srgbClr val="000000">
+                <a:alpha val="38000"/>
+              </a:srgbClr>
+            </a:outerShdw>
+          </a:effectLst>
+        </a:effectStyle>
+        <a:effectStyle>
+          <a:effectLst>
+            <a:outerShdw blurRad="40000" dist="23000" dir="5400000" rotWithShape="0">
+              <a:srgbClr val="000000">
+                <a:alpha val="35000"/>
+              </a:srgbClr>
+            </a:outerShdw>
+          </a:effectLst>
+        </a:effectStyle>
+        <a:effectStyle>
+          <a:effectLst>
+            <a:outerShdw blurRad="40000" dist="23000" dir="5400000" rotWithShape="0">
+              <a:srgbClr val="000000">
+                <a:alpha val="35000"/>
+              </a:srgbClr>
+            </a:outerShdw>
+          </a:effectLst>
+          <a:scene3d>
+            <a:camera prst="orthographicFront">
+              <a:rot lat="0" lon="0" rev="0"/>
+            </a:camera>
+            <a:lightRig rig="threePt" dir="t">
+              <a:rot lat="0" lon="0" rev="1200000"/>
+            </a:lightRig>
+          </a:scene3d>
+          <a:sp3d>
+            <a:bevelT w="63500" h="25400"/>
+          </a:sp3d>
+        </a:effectStyle>
+      </a:effectStyleLst>
+      <a:bgFillStyleLst>
+        <a:solidFill>
+          <a:schemeClr val="phClr"/>
+        </a:solidFill>
+        <a:gradFill rotWithShape="1">
+          <a:gsLst>
+            <a:gs pos="0">
+              <a:schemeClr val="phClr">
+                <a:tint val="40000"/>
+                <a:satMod val="350000"/>
+              </a:schemeClr>
+            </a:gs>
+            <a:gs pos="40000">
+              <a:schemeClr val="phClr">
+                <a:tint val="45000"/>
+                <a:shade val="99000"/>
+                <a:satMod val="350000"/>
+              </a:schemeClr>
+            </a:gs>
+            <a:gs pos="100000">
+              <a:schemeClr val="phClr">
+                <a:shade val="20000"/>
+                <a:satMod val="255000"/>
+              </a:schemeClr>
+            </a:gs>
+          </a:gsLst>
+          <a:path path="circle">
+            <a:fillToRect l="50000" t="-80000" r="50000" b="180000"/>
+          </a:path>
+        </a:gradFill>
+        <a:gradFill rotWithShape="1">
+          <a:gsLst>
+            <a:gs pos="0">
+              <a:schemeClr val="phClr">
+                <a:tint val="80000"/>
+                <a:satMod val="300000"/>
+              </a:schemeClr>
+            </a:gs>
+            <a:gs pos="100000">
+              <a:schemeClr val="phClr">
+                <a:shade val="30000"/>
+                <a:satMod val="200000"/>
+              </a:schemeClr>
+            </a:gs>
+          </a:gsLst>
+          <a:path path="circle">
+            <a:fillToRect l="50000" t="50000" r="50000" b="50000"/>
+          </a:path>
+        </a:gradFill>
+      </a:bgFillStyleLst>
+    </a:fmtScheme>
+  </a:themeElements>
+  <a:objectDefaults>
+    <a:spDef>
+      <a:spPr/>
+      <a:bodyPr/>
+      <a:lstStyle/>
+      <a:style>
+        <a:lnRef idx="1">
+          <a:schemeClr val="accent1"/>
+        </a:lnRef>
+        <a:fillRef idx="3">
+          <a:schemeClr val="accent1"/>
+        </a:fillRef>
+        <a:effectRef idx="2">
+          <a:schemeClr val="accent1"/>
+        </a:effectRef>
+        <a:fontRef idx="minor">
+          <a:schemeClr val="lt1"/>
+        </a:fontRef>
+      </a:style>
+    </a:spDef>
+    <a:lnDef>
+      <a:spPr/>
+      <a:bodyPr/>
+      <a:lstStyle/>
+      <a:style>
+        <a:lnRef idx="2">
+          <a:schemeClr val="accent1"/>
+        </a:lnRef>
+        <a:fillRef idx="0">
+          <a:schemeClr val="accent1"/>
+        </a:fillRef>
+        <a:effectRef idx="1">
+          <a:schemeClr val="accent1"/>
+        </a:effectRef>
+        <a:fontRef idx="minor">
+          <a:schemeClr val="tx1"/>
+        </a:fontRef>
+      </a:style>
+    </a:lnDef>
+  </a:objectDefaults>
+  <a:extraClrSchemeLst/>
+</a:theme>
 </file>